--- a/VKS-on-VCF91.pptx
+++ b/VKS-on-VCF91.pptx
@@ -21,6 +21,11 @@
     <p:sldId id="269" r:id="rId20"/>
     <p:sldId id="270" r:id="rId21"/>
     <p:sldId id="271" r:id="rId22"/>
+    <p:sldId id="272" r:id="rId23"/>
+    <p:sldId id="273" r:id="rId24"/>
+    <p:sldId id="274" r:id="rId25"/>
+    <p:sldId id="275" r:id="rId26"/>
+    <p:sldId id="276" r:id="rId27"/>
   </p:sldIdLst>
   <p:sldSz cx="12188952" cy="6858000" type="screen4x3"/>
   <p:notesSz cx="6858000" cy="9144000"/>
@@ -3468,14 +3473,14 @@
                   <a:srgbClr val="FFFFFF"/>
                 </a:solidFill>
               </a:rPr>
-              <a:t>VKS Cluster 建立完成</a:t>
+              <a:t>Supervisor Configure — 工作負載網路（Workload Networks）</a:t>
             </a:r>
           </a:p>
         </p:txBody>
       </p:sp>
       <p:pic>
         <p:nvPicPr>
-          <p:cNvPr id="6" name="Picture 5" descr="37-vks-cluster-running.jpg"/>
+          <p:cNvPr id="6" name="Picture 5" descr="43b-vc-sup-configure-network-workload.jpg"/>
           <p:cNvPicPr>
             <a:picLocks noChangeAspect="1"/>
           </p:cNvPicPr>
@@ -3490,7 +3495,7 @@
         <p:spPr>
           <a:xfrm>
             <a:off x="274320" y="1005840"/>
-            <a:ext cx="11612880" cy="5029200"/>
+            <a:ext cx="7772400" cy="5303520"/>
           </a:xfrm>
           <a:prstGeom prst="rect">
             <a:avLst/>
@@ -3499,34 +3504,485 @@
       </p:pic>
       <p:sp>
         <p:nvSpPr>
-          <p:cNvPr id="7" name="TextBox 6"/>
-          <p:cNvSpPr txBox="1"/>
-          <p:nvPr/>
-        </p:nvSpPr>
-        <p:spPr>
-          <a:xfrm>
-            <a:off x="274320" y="6172200"/>
-            <a:ext cx="11612880" cy="457200"/>
-          </a:xfrm>
-          <a:prstGeom prst="rect">
-            <a:avLst/>
-          </a:prstGeom>
-          <a:noFill/>
-        </p:spPr>
-        <p:txBody>
-          <a:bodyPr wrap="square">
-            <a:spAutoFit/>
-          </a:bodyPr>
+          <p:cNvPr id="7" name="Rectangle 6"/>
+          <p:cNvSpPr/>
+          <p:nvPr/>
+        </p:nvSpPr>
+        <p:spPr>
+          <a:xfrm>
+            <a:off x="8321040" y="1005840"/>
+            <a:ext cx="3657600" cy="5303520"/>
+          </a:xfrm>
+          <a:prstGeom prst="rect">
+            <a:avLst/>
+          </a:prstGeom>
+          <a:solidFill>
+            <a:srgbClr val="1A1A2E"/>
+          </a:solidFill>
+          <a:ln>
+            <a:noFill/>
+          </a:ln>
+        </p:spPr>
+        <p:style>
+          <a:lnRef idx="1">
+            <a:schemeClr val="accent1"/>
+          </a:lnRef>
+          <a:fillRef idx="3">
+            <a:schemeClr val="accent1"/>
+          </a:fillRef>
+          <a:effectRef idx="2">
+            <a:schemeClr val="accent1"/>
+          </a:effectRef>
+          <a:fontRef idx="minor">
+            <a:schemeClr val="lt1"/>
+          </a:fontRef>
+        </p:style>
+        <p:txBody>
+          <a:bodyPr rtlCol="0" anchor="ctr"/>
           <a:lstStyle/>
           <a:p>
             <a:pPr algn="ctr"/>
-            <a:r>
-              <a:rPr sz="1400" b="1">
-                <a:solidFill>
-                  <a:srgbClr val="00B0EA"/>
-                </a:solidFill>
-              </a:rPr>
-              <a:t>vks-auto-01  •  Available = True  •  v1.34.2+vmware.2  •  CP 192.168.114.135</a:t>
+          </a:p>
+        </p:txBody>
+      </p:sp>
+      <p:sp>
+        <p:nvSpPr>
+          <p:cNvPr id="8" name="TextBox 7"/>
+          <p:cNvSpPr txBox="1"/>
+          <p:nvPr/>
+        </p:nvSpPr>
+        <p:spPr>
+          <a:xfrm>
+            <a:off x="8412480" y="1188720"/>
+            <a:ext cx="3383280" cy="292608"/>
+          </a:xfrm>
+          <a:prstGeom prst="rect">
+            <a:avLst/>
+          </a:prstGeom>
+          <a:noFill/>
+        </p:spPr>
+        <p:txBody>
+          <a:bodyPr wrap="square">
+            <a:spAutoFit/>
+          </a:bodyPr>
+          <a:lstStyle/>
+          <a:p>
+            <a:pPr algn="l"/>
+            <a:r>
+              <a:rPr sz="1200" b="0">
+                <a:solidFill>
+                  <a:srgbClr val="FFFFFF"/>
+                </a:solidFill>
+              </a:rPr>
+              <a:t>NSX Project: Default</a:t>
+            </a:r>
+          </a:p>
+        </p:txBody>
+      </p:sp>
+      <p:sp>
+        <p:nvSpPr>
+          <p:cNvPr id="9" name="TextBox 8"/>
+          <p:cNvSpPr txBox="1"/>
+          <p:nvPr/>
+        </p:nvSpPr>
+        <p:spPr>
+          <a:xfrm>
+            <a:off x="8412480" y="1527048"/>
+            <a:ext cx="3383280" cy="292608"/>
+          </a:xfrm>
+          <a:prstGeom prst="rect">
+            <a:avLst/>
+          </a:prstGeom>
+          <a:noFill/>
+        </p:spPr>
+        <p:txBody>
+          <a:bodyPr wrap="square">
+            <a:spAutoFit/>
+          </a:bodyPr>
+          <a:lstStyle/>
+          <a:p>
+            <a:pPr algn="l"/>
+            <a:r>
+              <a:rPr sz="1200" b="0">
+                <a:solidFill>
+                  <a:srgbClr val="FFFFFF"/>
+                </a:solidFill>
+              </a:rPr>
+              <a:t>VPC Connectivity Profile:</a:t>
+            </a:r>
+          </a:p>
+        </p:txBody>
+      </p:sp>
+      <p:sp>
+        <p:nvSpPr>
+          <p:cNvPr id="10" name="TextBox 9"/>
+          <p:cNvSpPr txBox="1"/>
+          <p:nvPr/>
+        </p:nvSpPr>
+        <p:spPr>
+          <a:xfrm>
+            <a:off x="8412480" y="1865376"/>
+            <a:ext cx="3383280" cy="292608"/>
+          </a:xfrm>
+          <a:prstGeom prst="rect">
+            <a:avLst/>
+          </a:prstGeom>
+          <a:noFill/>
+        </p:spPr>
+        <p:txBody>
+          <a:bodyPr wrap="square">
+            <a:spAutoFit/>
+          </a:bodyPr>
+          <a:lstStyle/>
+          <a:p>
+            <a:pPr algn="l"/>
+            <a:r>
+              <a:rPr sz="1200" b="0">
+                <a:solidFill>
+                  <a:srgbClr val="FFFFFF"/>
+                </a:solidFill>
+              </a:rPr>
+              <a:t>  vcf-m02-vks-vpc-profile</a:t>
+            </a:r>
+          </a:p>
+        </p:txBody>
+      </p:sp>
+      <p:sp>
+        <p:nvSpPr>
+          <p:cNvPr id="11" name="TextBox 10"/>
+          <p:cNvSpPr txBox="1"/>
+          <p:nvPr/>
+        </p:nvSpPr>
+        <p:spPr>
+          <a:xfrm>
+            <a:off x="8412480" y="2203704"/>
+            <a:ext cx="3383280" cy="292608"/>
+          </a:xfrm>
+          <a:prstGeom prst="rect">
+            <a:avLst/>
+          </a:prstGeom>
+          <a:noFill/>
+        </p:spPr>
+        <p:txBody>
+          <a:bodyPr wrap="square">
+            <a:spAutoFit/>
+          </a:bodyPr>
+          <a:lstStyle/>
+          <a:p>
+            <a:pPr algn="l"/>
+            <a:r>
+              <a:rPr sz="1200" b="0">
+                <a:solidFill>
+                  <a:srgbClr val="FFFFFF"/>
+                </a:solidFill>
+              </a:rPr>
+              <a:t/>
+            </a:r>
+          </a:p>
+        </p:txBody>
+      </p:sp>
+      <p:sp>
+        <p:nvSpPr>
+          <p:cNvPr id="12" name="TextBox 11"/>
+          <p:cNvSpPr txBox="1"/>
+          <p:nvPr/>
+        </p:nvSpPr>
+        <p:spPr>
+          <a:xfrm>
+            <a:off x="8412480" y="2542032"/>
+            <a:ext cx="3383280" cy="292608"/>
+          </a:xfrm>
+          <a:prstGeom prst="rect">
+            <a:avLst/>
+          </a:prstGeom>
+          <a:noFill/>
+        </p:spPr>
+        <p:txBody>
+          <a:bodyPr wrap="square">
+            <a:spAutoFit/>
+          </a:bodyPr>
+          <a:lstStyle/>
+          <a:p>
+            <a:pPr algn="l"/>
+            <a:r>
+              <a:rPr sz="1200" b="0">
+                <a:solidFill>
+                  <a:srgbClr val="FFFFFF"/>
+                </a:solidFill>
+              </a:rPr>
+              <a:t>External IP Blocks:</a:t>
+            </a:r>
+          </a:p>
+        </p:txBody>
+      </p:sp>
+      <p:sp>
+        <p:nvSpPr>
+          <p:cNvPr id="13" name="TextBox 12"/>
+          <p:cNvSpPr txBox="1"/>
+          <p:nvPr/>
+        </p:nvSpPr>
+        <p:spPr>
+          <a:xfrm>
+            <a:off x="8412480" y="2880360"/>
+            <a:ext cx="3383280" cy="292608"/>
+          </a:xfrm>
+          <a:prstGeom prst="rect">
+            <a:avLst/>
+          </a:prstGeom>
+          <a:noFill/>
+        </p:spPr>
+        <p:txBody>
+          <a:bodyPr wrap="square">
+            <a:spAutoFit/>
+          </a:bodyPr>
+          <a:lstStyle/>
+          <a:p>
+            <a:pPr algn="l"/>
+            <a:r>
+              <a:rPr sz="1200" b="0">
+                <a:solidFill>
+                  <a:srgbClr val="FFFFFF"/>
+                </a:solidFill>
+              </a:rPr>
+              <a:t>  vcf-m02-vks-ext-ipblock</a:t>
+            </a:r>
+          </a:p>
+        </p:txBody>
+      </p:sp>
+      <p:sp>
+        <p:nvSpPr>
+          <p:cNvPr id="14" name="TextBox 13"/>
+          <p:cNvSpPr txBox="1"/>
+          <p:nvPr/>
+        </p:nvSpPr>
+        <p:spPr>
+          <a:xfrm>
+            <a:off x="8412480" y="3218688"/>
+            <a:ext cx="3383280" cy="292608"/>
+          </a:xfrm>
+          <a:prstGeom prst="rect">
+            <a:avLst/>
+          </a:prstGeom>
+          <a:noFill/>
+        </p:spPr>
+        <p:txBody>
+          <a:bodyPr wrap="square">
+            <a:spAutoFit/>
+          </a:bodyPr>
+          <a:lstStyle/>
+          <a:p>
+            <a:pPr algn="l"/>
+            <a:r>
+              <a:rPr sz="1200" b="0">
+                <a:solidFill>
+                  <a:srgbClr val="FFFFFF"/>
+                </a:solidFill>
+              </a:rPr>
+              <a:t>  192.168.114.128/26</a:t>
+            </a:r>
+          </a:p>
+        </p:txBody>
+      </p:sp>
+      <p:sp>
+        <p:nvSpPr>
+          <p:cNvPr id="15" name="TextBox 14"/>
+          <p:cNvSpPr txBox="1"/>
+          <p:nvPr/>
+        </p:nvSpPr>
+        <p:spPr>
+          <a:xfrm>
+            <a:off x="8412480" y="3557016"/>
+            <a:ext cx="3383280" cy="292608"/>
+          </a:xfrm>
+          <a:prstGeom prst="rect">
+            <a:avLst/>
+          </a:prstGeom>
+          <a:noFill/>
+        </p:spPr>
+        <p:txBody>
+          <a:bodyPr wrap="square">
+            <a:spAutoFit/>
+          </a:bodyPr>
+          <a:lstStyle/>
+          <a:p>
+            <a:pPr algn="l"/>
+            <a:r>
+              <a:rPr sz="1200" b="0">
+                <a:solidFill>
+                  <a:srgbClr val="FFFFFF"/>
+                </a:solidFill>
+              </a:rPr>
+              <a:t>  Usage: 12.5%</a:t>
+            </a:r>
+          </a:p>
+        </p:txBody>
+      </p:sp>
+      <p:sp>
+        <p:nvSpPr>
+          <p:cNvPr id="16" name="TextBox 15"/>
+          <p:cNvSpPr txBox="1"/>
+          <p:nvPr/>
+        </p:nvSpPr>
+        <p:spPr>
+          <a:xfrm>
+            <a:off x="8412480" y="3895344"/>
+            <a:ext cx="3383280" cy="292608"/>
+          </a:xfrm>
+          <a:prstGeom prst="rect">
+            <a:avLst/>
+          </a:prstGeom>
+          <a:noFill/>
+        </p:spPr>
+        <p:txBody>
+          <a:bodyPr wrap="square">
+            <a:spAutoFit/>
+          </a:bodyPr>
+          <a:lstStyle/>
+          <a:p>
+            <a:pPr algn="l"/>
+            <a:r>
+              <a:rPr sz="1200" b="0">
+                <a:solidFill>
+                  <a:srgbClr val="FFFFFF"/>
+                </a:solidFill>
+              </a:rPr>
+              <a:t/>
+            </a:r>
+          </a:p>
+        </p:txBody>
+      </p:sp>
+      <p:sp>
+        <p:nvSpPr>
+          <p:cNvPr id="17" name="TextBox 16"/>
+          <p:cNvSpPr txBox="1"/>
+          <p:nvPr/>
+        </p:nvSpPr>
+        <p:spPr>
+          <a:xfrm>
+            <a:off x="8412480" y="4233672"/>
+            <a:ext cx="3383280" cy="292608"/>
+          </a:xfrm>
+          <a:prstGeom prst="rect">
+            <a:avLst/>
+          </a:prstGeom>
+          <a:noFill/>
+        </p:spPr>
+        <p:txBody>
+          <a:bodyPr wrap="square">
+            <a:spAutoFit/>
+          </a:bodyPr>
+          <a:lstStyle/>
+          <a:p>
+            <a:pPr algn="l"/>
+            <a:r>
+              <a:rPr sz="1200" b="0">
+                <a:solidFill>
+                  <a:srgbClr val="FFFFFF"/>
+                </a:solidFill>
+              </a:rPr>
+              <a:t>Private TGW IP Blocks:</a:t>
+            </a:r>
+          </a:p>
+        </p:txBody>
+      </p:sp>
+      <p:sp>
+        <p:nvSpPr>
+          <p:cNvPr id="18" name="TextBox 17"/>
+          <p:cNvSpPr txBox="1"/>
+          <p:nvPr/>
+        </p:nvSpPr>
+        <p:spPr>
+          <a:xfrm>
+            <a:off x="8412480" y="4572000"/>
+            <a:ext cx="3383280" cy="292608"/>
+          </a:xfrm>
+          <a:prstGeom prst="rect">
+            <a:avLst/>
+          </a:prstGeom>
+          <a:noFill/>
+        </p:spPr>
+        <p:txBody>
+          <a:bodyPr wrap="square">
+            <a:spAutoFit/>
+          </a:bodyPr>
+          <a:lstStyle/>
+          <a:p>
+            <a:pPr algn="l"/>
+            <a:r>
+              <a:rPr sz="1200" b="0">
+                <a:solidFill>
+                  <a:srgbClr val="FFFFFF"/>
+                </a:solidFill>
+              </a:rPr>
+              <a:t>  vcf-m02-vks-priv-tgw</a:t>
+            </a:r>
+          </a:p>
+        </p:txBody>
+      </p:sp>
+      <p:sp>
+        <p:nvSpPr>
+          <p:cNvPr id="19" name="TextBox 18"/>
+          <p:cNvSpPr txBox="1"/>
+          <p:nvPr/>
+        </p:nvSpPr>
+        <p:spPr>
+          <a:xfrm>
+            <a:off x="8412480" y="4910328"/>
+            <a:ext cx="3383280" cy="292608"/>
+          </a:xfrm>
+          <a:prstGeom prst="rect">
+            <a:avLst/>
+          </a:prstGeom>
+          <a:noFill/>
+        </p:spPr>
+        <p:txBody>
+          <a:bodyPr wrap="square">
+            <a:spAutoFit/>
+          </a:bodyPr>
+          <a:lstStyle/>
+          <a:p>
+            <a:pPr algn="l"/>
+            <a:r>
+              <a:rPr sz="1200" b="0">
+                <a:solidFill>
+                  <a:srgbClr val="FFFFFF"/>
+                </a:solidFill>
+              </a:rPr>
+              <a:t>  172.30.0.0/16</a:t>
+            </a:r>
+          </a:p>
+        </p:txBody>
+      </p:sp>
+      <p:sp>
+        <p:nvSpPr>
+          <p:cNvPr id="20" name="TextBox 19"/>
+          <p:cNvSpPr txBox="1"/>
+          <p:nvPr/>
+        </p:nvSpPr>
+        <p:spPr>
+          <a:xfrm>
+            <a:off x="8412480" y="5248656"/>
+            <a:ext cx="3383280" cy="292608"/>
+          </a:xfrm>
+          <a:prstGeom prst="rect">
+            <a:avLst/>
+          </a:prstGeom>
+          <a:noFill/>
+        </p:spPr>
+        <p:txBody>
+          <a:bodyPr wrap="square">
+            <a:spAutoFit/>
+          </a:bodyPr>
+          <a:lstStyle/>
+          <a:p>
+            <a:pPr algn="l"/>
+            <a:r>
+              <a:rPr sz="1200" b="0">
+                <a:solidFill>
+                  <a:srgbClr val="FFFFFF"/>
+                </a:solidFill>
+              </a:rPr>
+              <a:t>  Usage: 0.02%</a:t>
             </a:r>
           </a:p>
         </p:txBody>
@@ -3707,14 +4163,14 @@
                   <a:srgbClr val="FFFFFF"/>
                 </a:solidFill>
               </a:rPr>
-              <a:t>CP + Worker VM 狀態</a:t>
+              <a:t>Supervisor Configure — 儲存設定（Storage）</a:t>
             </a:r>
           </a:p>
         </p:txBody>
       </p:sp>
       <p:pic>
         <p:nvPicPr>
-          <p:cNvPr id="6" name="Picture 5" descr="36-vks-cluster-vms.jpg"/>
+          <p:cNvPr id="6" name="Picture 5" descr="44-vc-sup-configure-storage.jpg"/>
           <p:cNvPicPr>
             <a:picLocks noChangeAspect="1"/>
           </p:cNvPicPr>
@@ -3729,7 +4185,7 @@
         <p:spPr>
           <a:xfrm>
             <a:off x="274320" y="1005840"/>
-            <a:ext cx="11612880" cy="5029200"/>
+            <a:ext cx="7772400" cy="5303520"/>
           </a:xfrm>
           <a:prstGeom prst="rect">
             <a:avLst/>
@@ -3738,34 +4194,485 @@
       </p:pic>
       <p:sp>
         <p:nvSpPr>
-          <p:cNvPr id="7" name="TextBox 6"/>
-          <p:cNvSpPr txBox="1"/>
-          <p:nvPr/>
-        </p:nvSpPr>
-        <p:spPr>
-          <a:xfrm>
-            <a:off x="274320" y="6172200"/>
-            <a:ext cx="11612880" cy="457200"/>
-          </a:xfrm>
-          <a:prstGeom prst="rect">
-            <a:avLst/>
-          </a:prstGeom>
-          <a:noFill/>
-        </p:spPr>
-        <p:txBody>
-          <a:bodyPr wrap="square">
-            <a:spAutoFit/>
-          </a:bodyPr>
+          <p:cNvPr id="7" name="Rectangle 6"/>
+          <p:cNvSpPr/>
+          <p:nvPr/>
+        </p:nvSpPr>
+        <p:spPr>
+          <a:xfrm>
+            <a:off x="8321040" y="1005840"/>
+            <a:ext cx="3657600" cy="5303520"/>
+          </a:xfrm>
+          <a:prstGeom prst="rect">
+            <a:avLst/>
+          </a:prstGeom>
+          <a:solidFill>
+            <a:srgbClr val="1A1A2E"/>
+          </a:solidFill>
+          <a:ln>
+            <a:noFill/>
+          </a:ln>
+        </p:spPr>
+        <p:style>
+          <a:lnRef idx="1">
+            <a:schemeClr val="accent1"/>
+          </a:lnRef>
+          <a:fillRef idx="3">
+            <a:schemeClr val="accent1"/>
+          </a:fillRef>
+          <a:effectRef idx="2">
+            <a:schemeClr val="accent1"/>
+          </a:effectRef>
+          <a:fontRef idx="minor">
+            <a:schemeClr val="lt1"/>
+          </a:fontRef>
+        </p:style>
+        <p:txBody>
+          <a:bodyPr rtlCol="0" anchor="ctr"/>
           <a:lstStyle/>
           <a:p>
             <a:pPr algn="ctr"/>
-            <a:r>
-              <a:rPr sz="1400" b="0">
-                <a:solidFill>
-                  <a:srgbClr val="1A1A2E"/>
-                </a:solidFill>
-              </a:rPr>
-              <a:t>CP: vks-auto-01-7f6ms-fmgz9  •  Worker: vks-auto-01-node-pool-1-5cjwv-...</a:t>
+          </a:p>
+        </p:txBody>
+      </p:sp>
+      <p:sp>
+        <p:nvSpPr>
+          <p:cNvPr id="8" name="TextBox 7"/>
+          <p:cNvSpPr txBox="1"/>
+          <p:nvPr/>
+        </p:nvSpPr>
+        <p:spPr>
+          <a:xfrm>
+            <a:off x="8412480" y="1188720"/>
+            <a:ext cx="3383280" cy="292608"/>
+          </a:xfrm>
+          <a:prstGeom prst="rect">
+            <a:avLst/>
+          </a:prstGeom>
+          <a:noFill/>
+        </p:spPr>
+        <p:txBody>
+          <a:bodyPr wrap="square">
+            <a:spAutoFit/>
+          </a:bodyPr>
+          <a:lstStyle/>
+          <a:p>
+            <a:pPr algn="l"/>
+            <a:r>
+              <a:rPr sz="1200" b="0">
+                <a:solidFill>
+                  <a:srgbClr val="FFFFFF"/>
+                </a:solidFill>
+              </a:rPr>
+              <a:t>Control Plane Nodes:</a:t>
+            </a:r>
+          </a:p>
+        </p:txBody>
+      </p:sp>
+      <p:sp>
+        <p:nvSpPr>
+          <p:cNvPr id="9" name="TextBox 8"/>
+          <p:cNvSpPr txBox="1"/>
+          <p:nvPr/>
+        </p:nvSpPr>
+        <p:spPr>
+          <a:xfrm>
+            <a:off x="8412480" y="1527048"/>
+            <a:ext cx="3383280" cy="292608"/>
+          </a:xfrm>
+          <a:prstGeom prst="rect">
+            <a:avLst/>
+          </a:prstGeom>
+          <a:noFill/>
+        </p:spPr>
+        <p:txBody>
+          <a:bodyPr wrap="square">
+            <a:spAutoFit/>
+          </a:bodyPr>
+          <a:lstStyle/>
+          <a:p>
+            <a:pPr algn="l"/>
+            <a:r>
+              <a:rPr sz="1200" b="0">
+                <a:solidFill>
+                  <a:srgbClr val="FFFFFF"/>
+                </a:solidFill>
+              </a:rPr>
+              <a:t>  Management Storage</a:t>
+            </a:r>
+          </a:p>
+        </p:txBody>
+      </p:sp>
+      <p:sp>
+        <p:nvSpPr>
+          <p:cNvPr id="10" name="TextBox 9"/>
+          <p:cNvSpPr txBox="1"/>
+          <p:nvPr/>
+        </p:nvSpPr>
+        <p:spPr>
+          <a:xfrm>
+            <a:off x="8412480" y="1865376"/>
+            <a:ext cx="3383280" cy="292608"/>
+          </a:xfrm>
+          <a:prstGeom prst="rect">
+            <a:avLst/>
+          </a:prstGeom>
+          <a:noFill/>
+        </p:spPr>
+        <p:txBody>
+          <a:bodyPr wrap="square">
+            <a:spAutoFit/>
+          </a:bodyPr>
+          <a:lstStyle/>
+          <a:p>
+            <a:pPr algn="l"/>
+            <a:r>
+              <a:rPr sz="1200" b="0">
+                <a:solidFill>
+                  <a:srgbClr val="FFFFFF"/>
+                </a:solidFill>
+              </a:rPr>
+              <a:t>  Policy - Single Node</a:t>
+            </a:r>
+          </a:p>
+        </p:txBody>
+      </p:sp>
+      <p:sp>
+        <p:nvSpPr>
+          <p:cNvPr id="11" name="TextBox 10"/>
+          <p:cNvSpPr txBox="1"/>
+          <p:nvPr/>
+        </p:nvSpPr>
+        <p:spPr>
+          <a:xfrm>
+            <a:off x="8412480" y="2203704"/>
+            <a:ext cx="3383280" cy="292608"/>
+          </a:xfrm>
+          <a:prstGeom prst="rect">
+            <a:avLst/>
+          </a:prstGeom>
+          <a:noFill/>
+        </p:spPr>
+        <p:txBody>
+          <a:bodyPr wrap="square">
+            <a:spAutoFit/>
+          </a:bodyPr>
+          <a:lstStyle/>
+          <a:p>
+            <a:pPr algn="l"/>
+            <a:r>
+              <a:rPr sz="1200" b="0">
+                <a:solidFill>
+                  <a:srgbClr val="FFFFFF"/>
+                </a:solidFill>
+              </a:rPr>
+              <a:t>  (FTT=0, nested OK)</a:t>
+            </a:r>
+          </a:p>
+        </p:txBody>
+      </p:sp>
+      <p:sp>
+        <p:nvSpPr>
+          <p:cNvPr id="12" name="TextBox 11"/>
+          <p:cNvSpPr txBox="1"/>
+          <p:nvPr/>
+        </p:nvSpPr>
+        <p:spPr>
+          <a:xfrm>
+            <a:off x="8412480" y="2542032"/>
+            <a:ext cx="3383280" cy="292608"/>
+          </a:xfrm>
+          <a:prstGeom prst="rect">
+            <a:avLst/>
+          </a:prstGeom>
+          <a:noFill/>
+        </p:spPr>
+        <p:txBody>
+          <a:bodyPr wrap="square">
+            <a:spAutoFit/>
+          </a:bodyPr>
+          <a:lstStyle/>
+          <a:p>
+            <a:pPr algn="l"/>
+            <a:r>
+              <a:rPr sz="1200" b="0">
+                <a:solidFill>
+                  <a:srgbClr val="FFFFFF"/>
+                </a:solidFill>
+              </a:rPr>
+              <a:t/>
+            </a:r>
+          </a:p>
+        </p:txBody>
+      </p:sp>
+      <p:sp>
+        <p:nvSpPr>
+          <p:cNvPr id="13" name="TextBox 12"/>
+          <p:cNvSpPr txBox="1"/>
+          <p:nvPr/>
+        </p:nvSpPr>
+        <p:spPr>
+          <a:xfrm>
+            <a:off x="8412480" y="2880360"/>
+            <a:ext cx="3383280" cy="292608"/>
+          </a:xfrm>
+          <a:prstGeom prst="rect">
+            <a:avLst/>
+          </a:prstGeom>
+          <a:noFill/>
+        </p:spPr>
+        <p:txBody>
+          <a:bodyPr wrap="square">
+            <a:spAutoFit/>
+          </a:bodyPr>
+          <a:lstStyle/>
+          <a:p>
+            <a:pPr algn="l"/>
+            <a:r>
+              <a:rPr sz="1200" b="0">
+                <a:solidFill>
+                  <a:srgbClr val="FFFFFF"/>
+                </a:solidFill>
+              </a:rPr>
+              <a:t>Ephemeral Disks:</a:t>
+            </a:r>
+          </a:p>
+        </p:txBody>
+      </p:sp>
+      <p:sp>
+        <p:nvSpPr>
+          <p:cNvPr id="14" name="TextBox 13"/>
+          <p:cNvSpPr txBox="1"/>
+          <p:nvPr/>
+        </p:nvSpPr>
+        <p:spPr>
+          <a:xfrm>
+            <a:off x="8412480" y="3218688"/>
+            <a:ext cx="3383280" cy="292608"/>
+          </a:xfrm>
+          <a:prstGeom prst="rect">
+            <a:avLst/>
+          </a:prstGeom>
+          <a:noFill/>
+        </p:spPr>
+        <p:txBody>
+          <a:bodyPr wrap="square">
+            <a:spAutoFit/>
+          </a:bodyPr>
+          <a:lstStyle/>
+          <a:p>
+            <a:pPr algn="l"/>
+            <a:r>
+              <a:rPr sz="1200" b="0">
+                <a:solidFill>
+                  <a:srgbClr val="FFFFFF"/>
+                </a:solidFill>
+              </a:rPr>
+              <a:t>  同上</a:t>
+            </a:r>
+          </a:p>
+        </p:txBody>
+      </p:sp>
+      <p:sp>
+        <p:nvSpPr>
+          <p:cNvPr id="15" name="TextBox 14"/>
+          <p:cNvSpPr txBox="1"/>
+          <p:nvPr/>
+        </p:nvSpPr>
+        <p:spPr>
+          <a:xfrm>
+            <a:off x="8412480" y="3557016"/>
+            <a:ext cx="3383280" cy="292608"/>
+          </a:xfrm>
+          <a:prstGeom prst="rect">
+            <a:avLst/>
+          </a:prstGeom>
+          <a:noFill/>
+        </p:spPr>
+        <p:txBody>
+          <a:bodyPr wrap="square">
+            <a:spAutoFit/>
+          </a:bodyPr>
+          <a:lstStyle/>
+          <a:p>
+            <a:pPr algn="l"/>
+            <a:r>
+              <a:rPr sz="1200" b="0">
+                <a:solidFill>
+                  <a:srgbClr val="FFFFFF"/>
+                </a:solidFill>
+              </a:rPr>
+              <a:t/>
+            </a:r>
+          </a:p>
+        </p:txBody>
+      </p:sp>
+      <p:sp>
+        <p:nvSpPr>
+          <p:cNvPr id="16" name="TextBox 15"/>
+          <p:cNvSpPr txBox="1"/>
+          <p:nvPr/>
+        </p:nvSpPr>
+        <p:spPr>
+          <a:xfrm>
+            <a:off x="8412480" y="3895344"/>
+            <a:ext cx="3383280" cy="292608"/>
+          </a:xfrm>
+          <a:prstGeom prst="rect">
+            <a:avLst/>
+          </a:prstGeom>
+          <a:noFill/>
+        </p:spPr>
+        <p:txBody>
+          <a:bodyPr wrap="square">
+            <a:spAutoFit/>
+          </a:bodyPr>
+          <a:lstStyle/>
+          <a:p>
+            <a:pPr algn="l"/>
+            <a:r>
+              <a:rPr sz="1200" b="0">
+                <a:solidFill>
+                  <a:srgbClr val="FFFFFF"/>
+                </a:solidFill>
+              </a:rPr>
+              <a:t>Image Cache:</a:t>
+            </a:r>
+          </a:p>
+        </p:txBody>
+      </p:sp>
+      <p:sp>
+        <p:nvSpPr>
+          <p:cNvPr id="17" name="TextBox 16"/>
+          <p:cNvSpPr txBox="1"/>
+          <p:nvPr/>
+        </p:nvSpPr>
+        <p:spPr>
+          <a:xfrm>
+            <a:off x="8412480" y="4233672"/>
+            <a:ext cx="3383280" cy="292608"/>
+          </a:xfrm>
+          <a:prstGeom prst="rect">
+            <a:avLst/>
+          </a:prstGeom>
+          <a:noFill/>
+        </p:spPr>
+        <p:txBody>
+          <a:bodyPr wrap="square">
+            <a:spAutoFit/>
+          </a:bodyPr>
+          <a:lstStyle/>
+          <a:p>
+            <a:pPr algn="l"/>
+            <a:r>
+              <a:rPr sz="1200" b="0">
+                <a:solidFill>
+                  <a:srgbClr val="FFFFFF"/>
+                </a:solidFill>
+              </a:rPr>
+              <a:t>  同上</a:t>
+            </a:r>
+          </a:p>
+        </p:txBody>
+      </p:sp>
+      <p:sp>
+        <p:nvSpPr>
+          <p:cNvPr id="18" name="TextBox 17"/>
+          <p:cNvSpPr txBox="1"/>
+          <p:nvPr/>
+        </p:nvSpPr>
+        <p:spPr>
+          <a:xfrm>
+            <a:off x="8412480" y="4572000"/>
+            <a:ext cx="3383280" cy="292608"/>
+          </a:xfrm>
+          <a:prstGeom prst="rect">
+            <a:avLst/>
+          </a:prstGeom>
+          <a:noFill/>
+        </p:spPr>
+        <p:txBody>
+          <a:bodyPr wrap="square">
+            <a:spAutoFit/>
+          </a:bodyPr>
+          <a:lstStyle/>
+          <a:p>
+            <a:pPr algn="l"/>
+            <a:r>
+              <a:rPr sz="1200" b="0">
+                <a:solidFill>
+                  <a:srgbClr val="FFFFFF"/>
+                </a:solidFill>
+              </a:rPr>
+              <a:t/>
+            </a:r>
+          </a:p>
+        </p:txBody>
+      </p:sp>
+      <p:sp>
+        <p:nvSpPr>
+          <p:cNvPr id="19" name="TextBox 18"/>
+          <p:cNvSpPr txBox="1"/>
+          <p:nvPr/>
+        </p:nvSpPr>
+        <p:spPr>
+          <a:xfrm>
+            <a:off x="8412480" y="4910328"/>
+            <a:ext cx="3383280" cy="292608"/>
+          </a:xfrm>
+          <a:prstGeom prst="rect">
+            <a:avLst/>
+          </a:prstGeom>
+          <a:noFill/>
+        </p:spPr>
+        <p:txBody>
+          <a:bodyPr wrap="square">
+            <a:spAutoFit/>
+          </a:bodyPr>
+          <a:lstStyle/>
+          <a:p>
+            <a:pPr algn="l"/>
+            <a:r>
+              <a:rPr sz="1200" b="0">
+                <a:solidFill>
+                  <a:srgbClr val="FFFFFF"/>
+                </a:solidFill>
+              </a:rPr>
+              <a:t>⚠️ 生產環境建議用 FTT=1+</a:t>
+            </a:r>
+          </a:p>
+        </p:txBody>
+      </p:sp>
+      <p:sp>
+        <p:nvSpPr>
+          <p:cNvPr id="20" name="TextBox 19"/>
+          <p:cNvSpPr txBox="1"/>
+          <p:nvPr/>
+        </p:nvSpPr>
+        <p:spPr>
+          <a:xfrm>
+            <a:off x="8412480" y="5248656"/>
+            <a:ext cx="3383280" cy="292608"/>
+          </a:xfrm>
+          <a:prstGeom prst="rect">
+            <a:avLst/>
+          </a:prstGeom>
+          <a:noFill/>
+        </p:spPr>
+        <p:txBody>
+          <a:bodyPr wrap="square">
+            <a:spAutoFit/>
+          </a:bodyPr>
+          <a:lstStyle/>
+          <a:p>
+            <a:pPr algn="l"/>
+            <a:r>
+              <a:rPr sz="1200" b="0">
+                <a:solidFill>
+                  <a:srgbClr val="FFFFFF"/>
+                </a:solidFill>
+              </a:rPr>
+              <a:t>  (此為 lab single-node)</a:t>
             </a:r>
           </a:p>
         </p:txBody>
@@ -3946,539 +4853,35 @@
                   <a:srgbClr val="FFFFFF"/>
                 </a:solidFill>
               </a:rPr>
-              <a:t>踩坑必修正（否則建不起來）</a:t>
-            </a:r>
-          </a:p>
-        </p:txBody>
-      </p:sp>
-      <p:sp>
-        <p:nvSpPr>
-          <p:cNvPr id="6" name="Rectangle 5"/>
-          <p:cNvSpPr/>
-          <p:nvPr/>
-        </p:nvSpPr>
-        <p:spPr>
-          <a:xfrm>
-            <a:off x="274320" y="1097280"/>
-            <a:ext cx="5669280" cy="5029200"/>
-          </a:xfrm>
-          <a:prstGeom prst="rect">
-            <a:avLst/>
-          </a:prstGeom>
-          <a:solidFill>
-            <a:srgbClr val="1A1A2E"/>
-          </a:solidFill>
-          <a:ln>
-            <a:noFill/>
-          </a:ln>
-        </p:spPr>
-        <p:style>
-          <a:lnRef idx="1">
-            <a:schemeClr val="accent1"/>
-          </a:lnRef>
-          <a:fillRef idx="3">
-            <a:schemeClr val="accent1"/>
-          </a:fillRef>
-          <a:effectRef idx="2">
-            <a:schemeClr val="accent1"/>
-          </a:effectRef>
-          <a:fontRef idx="minor">
-            <a:schemeClr val="lt1"/>
-          </a:fontRef>
-        </p:style>
-        <p:txBody>
-          <a:bodyPr rtlCol="0" anchor="ctr"/>
-          <a:lstStyle/>
-          <a:p>
-            <a:pPr algn="ctr"/>
-          </a:p>
-        </p:txBody>
-      </p:sp>
-      <p:sp>
-        <p:nvSpPr>
-          <p:cNvPr id="7" name="Rectangle 6"/>
-          <p:cNvSpPr/>
-          <p:nvPr/>
-        </p:nvSpPr>
-        <p:spPr>
-          <a:xfrm>
-            <a:off x="6217920" y="1097280"/>
-            <a:ext cx="5669280" cy="5029200"/>
-          </a:xfrm>
-          <a:prstGeom prst="rect">
-            <a:avLst/>
-          </a:prstGeom>
-          <a:solidFill>
-            <a:srgbClr val="1A1A2E"/>
-          </a:solidFill>
-          <a:ln>
-            <a:noFill/>
-          </a:ln>
-        </p:spPr>
-        <p:style>
-          <a:lnRef idx="1">
-            <a:schemeClr val="accent1"/>
-          </a:lnRef>
-          <a:fillRef idx="3">
-            <a:schemeClr val="accent1"/>
-          </a:fillRef>
-          <a:effectRef idx="2">
-            <a:schemeClr val="accent1"/>
-          </a:effectRef>
-          <a:fontRef idx="minor">
-            <a:schemeClr val="lt1"/>
-          </a:fontRef>
-        </p:style>
-        <p:txBody>
-          <a:bodyPr rtlCol="0" anchor="ctr"/>
-          <a:lstStyle/>
-          <a:p>
-            <a:pPr algn="ctr"/>
-          </a:p>
-        </p:txBody>
-      </p:sp>
-      <p:sp>
-        <p:nvSpPr>
-          <p:cNvPr id="8" name="TextBox 7"/>
-          <p:cNvSpPr txBox="1"/>
-          <p:nvPr/>
-        </p:nvSpPr>
-        <p:spPr>
-          <a:xfrm>
-            <a:off x="411480" y="1280160"/>
-            <a:ext cx="5486400" cy="365760"/>
-          </a:xfrm>
-          <a:prstGeom prst="rect">
-            <a:avLst/>
-          </a:prstGeom>
-          <a:noFill/>
-        </p:spPr>
-        <p:txBody>
-          <a:bodyPr wrap="square">
-            <a:spAutoFit/>
-          </a:bodyPr>
-          <a:lstStyle/>
-          <a:p>
-            <a:pPr algn="l"/>
-            <a:r>
-              <a:rPr sz="1300" b="0">
-                <a:solidFill>
-                  <a:srgbClr val="FFFFFF"/>
-                </a:solidFill>
-              </a:rPr>
-              <a:t>Pod CIDR 不能用預設 192.168.0.0/16</a:t>
-            </a:r>
-          </a:p>
-        </p:txBody>
-      </p:sp>
-      <p:sp>
-        <p:nvSpPr>
-          <p:cNvPr id="9" name="TextBox 8"/>
-          <p:cNvSpPr txBox="1"/>
-          <p:nvPr/>
-        </p:nvSpPr>
-        <p:spPr>
-          <a:xfrm>
-            <a:off x="411480" y="1627632"/>
-            <a:ext cx="5486400" cy="365760"/>
-          </a:xfrm>
-          <a:prstGeom prst="rect">
-            <a:avLst/>
-          </a:prstGeom>
-          <a:noFill/>
-        </p:spPr>
-        <p:txBody>
-          <a:bodyPr wrap="square">
-            <a:spAutoFit/>
-          </a:bodyPr>
-          <a:lstStyle/>
-          <a:p>
-            <a:pPr algn="l"/>
-            <a:r>
-              <a:rPr sz="1300" b="0">
-                <a:solidFill>
-                  <a:srgbClr val="FFFFFF"/>
-                </a:solidFill>
-              </a:rPr>
-              <a:t>  → 與管理網段 192.168.114.0/24 重疊</a:t>
-            </a:r>
-          </a:p>
-        </p:txBody>
-      </p:sp>
-      <p:sp>
-        <p:nvSpPr>
-          <p:cNvPr id="10" name="TextBox 9"/>
-          <p:cNvSpPr txBox="1"/>
-          <p:nvPr/>
-        </p:nvSpPr>
-        <p:spPr>
-          <a:xfrm>
-            <a:off x="411480" y="1975104"/>
-            <a:ext cx="5486400" cy="365760"/>
-          </a:xfrm>
-          <a:prstGeom prst="rect">
-            <a:avLst/>
-          </a:prstGeom>
-          <a:noFill/>
-        </p:spPr>
-        <p:txBody>
-          <a:bodyPr wrap="square">
-            <a:spAutoFit/>
-          </a:bodyPr>
-          <a:lstStyle/>
-          <a:p>
-            <a:pPr algn="l"/>
-            <a:r>
-              <a:rPr sz="1300" b="0">
-                <a:solidFill>
-                  <a:srgbClr val="FFFFFF"/>
-                </a:solidFill>
-              </a:rPr>
-              <a:t>  → kubeadm init 後 Antrea overlay route</a:t>
-            </a:r>
-          </a:p>
-        </p:txBody>
-      </p:sp>
-      <p:sp>
-        <p:nvSpPr>
-          <p:cNvPr id="11" name="TextBox 10"/>
-          <p:cNvSpPr txBox="1"/>
-          <p:nvPr/>
-        </p:nvSpPr>
-        <p:spPr>
-          <a:xfrm>
-            <a:off x="411480" y="2322576"/>
-            <a:ext cx="5486400" cy="365760"/>
-          </a:xfrm>
-          <a:prstGeom prst="rect">
-            <a:avLst/>
-          </a:prstGeom>
-          <a:noFill/>
-        </p:spPr>
-        <p:txBody>
-          <a:bodyPr wrap="square">
-            <a:spAutoFit/>
-          </a:bodyPr>
-          <a:lstStyle/>
-          <a:p>
-            <a:pPr algn="l"/>
-            <a:r>
-              <a:rPr sz="1300" b="0">
-                <a:solidFill>
-                  <a:srgbClr val="FFFFFF"/>
-                </a:solidFill>
-              </a:rPr>
-              <a:t>    劫持 DNS / Registry 流量 → CP never Ready</a:t>
-            </a:r>
-          </a:p>
-        </p:txBody>
-      </p:sp>
-      <p:sp>
-        <p:nvSpPr>
-          <p:cNvPr id="12" name="TextBox 11"/>
-          <p:cNvSpPr txBox="1"/>
-          <p:nvPr/>
-        </p:nvSpPr>
-        <p:spPr>
-          <a:xfrm>
-            <a:off x="411480" y="2670048"/>
-            <a:ext cx="5486400" cy="365760"/>
-          </a:xfrm>
-          <a:prstGeom prst="rect">
-            <a:avLst/>
-          </a:prstGeom>
-          <a:noFill/>
-        </p:spPr>
-        <p:txBody>
-          <a:bodyPr wrap="square">
-            <a:spAutoFit/>
-          </a:bodyPr>
-          <a:lstStyle/>
-          <a:p>
-            <a:pPr algn="l"/>
-            <a:r>
-              <a:rPr sz="1300" b="0">
-                <a:solidFill>
-                  <a:srgbClr val="FFFFFF"/>
-                </a:solidFill>
-              </a:rPr>
-              <a:t>  ✅ 改用 100.96.0.0/11</a:t>
-            </a:r>
-          </a:p>
-        </p:txBody>
-      </p:sp>
-      <p:sp>
-        <p:nvSpPr>
-          <p:cNvPr id="13" name="TextBox 12"/>
-          <p:cNvSpPr txBox="1"/>
-          <p:nvPr/>
-        </p:nvSpPr>
-        <p:spPr>
-          <a:xfrm>
-            <a:off x="6355080" y="1280160"/>
-            <a:ext cx="5486400" cy="365760"/>
-          </a:xfrm>
-          <a:prstGeom prst="rect">
-            <a:avLst/>
-          </a:prstGeom>
-          <a:noFill/>
-        </p:spPr>
-        <p:txBody>
-          <a:bodyPr wrap="square">
-            <a:spAutoFit/>
-          </a:bodyPr>
-          <a:lstStyle/>
-          <a:p>
-            <a:pPr algn="l"/>
-            <a:r>
-              <a:rPr sz="1300" b="0">
-                <a:solidFill>
-                  <a:srgbClr val="FFFFFF"/>
-                </a:solidFill>
-              </a:rPr>
-              <a:t>MachineHealthCheck timeout 太短</a:t>
-            </a:r>
-          </a:p>
-        </p:txBody>
-      </p:sp>
-      <p:sp>
-        <p:nvSpPr>
-          <p:cNvPr id="14" name="TextBox 13"/>
-          <p:cNvSpPr txBox="1"/>
-          <p:nvPr/>
-        </p:nvSpPr>
-        <p:spPr>
-          <a:xfrm>
-            <a:off x="6355080" y="1627632"/>
-            <a:ext cx="5486400" cy="365760"/>
-          </a:xfrm>
-          <a:prstGeom prst="rect">
-            <a:avLst/>
-          </a:prstGeom>
-          <a:noFill/>
-        </p:spPr>
-        <p:txBody>
-          <a:bodyPr wrap="square">
-            <a:spAutoFit/>
-          </a:bodyPr>
-          <a:lstStyle/>
-          <a:p>
-            <a:pPr algn="l"/>
-            <a:r>
-              <a:rPr sz="1300" b="0">
-                <a:solidFill>
-                  <a:srgbClr val="FFFFFF"/>
-                </a:solidFill>
-              </a:rPr>
-              <a:t>  → 預設 nodeStartupTimeout = 3600s</a:t>
-            </a:r>
-          </a:p>
-        </p:txBody>
-      </p:sp>
-      <p:sp>
-        <p:nvSpPr>
-          <p:cNvPr id="15" name="TextBox 14"/>
-          <p:cNvSpPr txBox="1"/>
-          <p:nvPr/>
-        </p:nvSpPr>
-        <p:spPr>
-          <a:xfrm>
-            <a:off x="6355080" y="1975104"/>
-            <a:ext cx="5486400" cy="365760"/>
-          </a:xfrm>
-          <a:prstGeom prst="rect">
-            <a:avLst/>
-          </a:prstGeom>
-          <a:noFill/>
-        </p:spPr>
-        <p:txBody>
-          <a:bodyPr wrap="square">
-            <a:spAutoFit/>
-          </a:bodyPr>
-          <a:lstStyle/>
-          <a:p>
-            <a:pPr algn="l"/>
-            <a:r>
-              <a:rPr sz="1300" b="0">
-                <a:solidFill>
-                  <a:srgbClr val="FFFFFF"/>
-                </a:solidFill>
-              </a:rPr>
-              <a:t>  → nested-on-nested 啟動 &gt;60min</a:t>
-            </a:r>
-          </a:p>
-        </p:txBody>
-      </p:sp>
-      <p:sp>
-        <p:nvSpPr>
-          <p:cNvPr id="16" name="TextBox 15"/>
-          <p:cNvSpPr txBox="1"/>
-          <p:nvPr/>
-        </p:nvSpPr>
-        <p:spPr>
-          <a:xfrm>
-            <a:off x="6355080" y="2322576"/>
-            <a:ext cx="5486400" cy="365760"/>
-          </a:xfrm>
-          <a:prstGeom prst="rect">
-            <a:avLst/>
-          </a:prstGeom>
-          <a:noFill/>
-        </p:spPr>
-        <p:txBody>
-          <a:bodyPr wrap="square">
-            <a:spAutoFit/>
-          </a:bodyPr>
-          <a:lstStyle/>
-          <a:p>
-            <a:pPr algn="l"/>
-            <a:r>
-              <a:rPr sz="1300" b="0">
-                <a:solidFill>
-                  <a:srgbClr val="FFFFFF"/>
-                </a:solidFill>
-              </a:rPr>
-              <a:t>  → MHC 提早 remediate → 砍 CP → 死循環</a:t>
-            </a:r>
-          </a:p>
-        </p:txBody>
-      </p:sp>
-      <p:sp>
-        <p:nvSpPr>
-          <p:cNvPr id="17" name="TextBox 16"/>
-          <p:cNvSpPr txBox="1"/>
-          <p:nvPr/>
-        </p:nvSpPr>
-        <p:spPr>
-          <a:xfrm>
-            <a:off x="6355080" y="2670048"/>
-            <a:ext cx="5486400" cy="365760"/>
-          </a:xfrm>
-          <a:prstGeom prst="rect">
-            <a:avLst/>
-          </a:prstGeom>
-          <a:noFill/>
-        </p:spPr>
-        <p:txBody>
-          <a:bodyPr wrap="square">
-            <a:spAutoFit/>
-          </a:bodyPr>
-          <a:lstStyle/>
-          <a:p>
-            <a:pPr algn="l"/>
-            <a:r>
-              <a:rPr sz="1300" b="0">
-                <a:solidFill>
-                  <a:srgbClr val="FFFFFF"/>
-                </a:solidFill>
-              </a:rPr>
-              <a:t>  ✅ topology.controlPlane.healthCheck</a:t>
-            </a:r>
-          </a:p>
-        </p:txBody>
-      </p:sp>
-      <p:sp>
-        <p:nvSpPr>
-          <p:cNvPr id="18" name="TextBox 17"/>
-          <p:cNvSpPr txBox="1"/>
-          <p:nvPr/>
-        </p:nvSpPr>
-        <p:spPr>
-          <a:xfrm>
-            <a:off x="6355080" y="3017520"/>
-            <a:ext cx="5486400" cy="365760"/>
-          </a:xfrm>
-          <a:prstGeom prst="rect">
-            <a:avLst/>
-          </a:prstGeom>
-          <a:noFill/>
-        </p:spPr>
-        <p:txBody>
-          <a:bodyPr wrap="square">
-            <a:spAutoFit/>
-          </a:bodyPr>
-          <a:lstStyle/>
-          <a:p>
-            <a:pPr algn="l"/>
-            <a:r>
-              <a:rPr sz="1300" b="0">
-                <a:solidFill>
-                  <a:srgbClr val="FFFFFF"/>
-                </a:solidFill>
-              </a:rPr>
-              <a:t>     .checks.nodeStartupTimeoutSeconds: 14400</a:t>
-            </a:r>
-          </a:p>
-        </p:txBody>
-      </p:sp>
-      <p:sp>
-        <p:nvSpPr>
-          <p:cNvPr id="19" name="TextBox 18"/>
-          <p:cNvSpPr txBox="1"/>
-          <p:nvPr/>
-        </p:nvSpPr>
-        <p:spPr>
-          <a:xfrm>
-            <a:off x="274320" y="1051560"/>
-            <a:ext cx="2743200" cy="320040"/>
-          </a:xfrm>
-          <a:prstGeom prst="rect">
-            <a:avLst/>
-          </a:prstGeom>
-          <a:noFill/>
-        </p:spPr>
-        <p:txBody>
-          <a:bodyPr wrap="square">
-            <a:spAutoFit/>
-          </a:bodyPr>
-          <a:lstStyle/>
-          <a:p>
-            <a:pPr algn="l"/>
-            <a:r>
-              <a:rPr sz="1400" b="1">
-                <a:solidFill>
-                  <a:srgbClr val="00B0EA"/>
-                </a:solidFill>
-              </a:rPr>
-              <a:t>① Pod CIDR 衝突</a:t>
-            </a:r>
-          </a:p>
-        </p:txBody>
-      </p:sp>
-      <p:sp>
-        <p:nvSpPr>
-          <p:cNvPr id="20" name="TextBox 19"/>
-          <p:cNvSpPr txBox="1"/>
-          <p:nvPr/>
-        </p:nvSpPr>
-        <p:spPr>
-          <a:xfrm>
-            <a:off x="6217920" y="1051560"/>
-            <a:ext cx="4572000" cy="320040"/>
-          </a:xfrm>
-          <a:prstGeom prst="rect">
-            <a:avLst/>
-          </a:prstGeom>
-          <a:noFill/>
-        </p:spPr>
-        <p:txBody>
-          <a:bodyPr wrap="square">
-            <a:spAutoFit/>
-          </a:bodyPr>
-          <a:lstStyle/>
-          <a:p>
-            <a:pPr algn="l"/>
-            <a:r>
-              <a:rPr sz="1400" b="1">
-                <a:solidFill>
-                  <a:srgbClr val="00B0EA"/>
-                </a:solidFill>
-              </a:rPr>
-              <a:t>② MachineHealthCheck Timeout</a:t>
-            </a:r>
-          </a:p>
-        </p:txBody>
-      </p:sp>
+              <a:t>Supervisor 運行狀態</a:t>
+            </a:r>
+          </a:p>
+        </p:txBody>
+      </p:sp>
+      <p:pic>
+        <p:nvPicPr>
+          <p:cNvPr id="6" name="Picture 5" descr="30-supervisor-running.jpg"/>
+          <p:cNvPicPr>
+            <a:picLocks noChangeAspect="1"/>
+          </p:cNvPicPr>
+          <p:nvPr/>
+        </p:nvPicPr>
+        <p:blipFill>
+          <a:blip r:embed="rId2"/>
+          <a:stretch>
+            <a:fillRect/>
+          </a:stretch>
+        </p:blipFill>
+        <p:spPr>
+          <a:xfrm>
+            <a:off x="274320" y="1005840"/>
+            <a:ext cx="11612880" cy="5577840"/>
+          </a:xfrm>
+          <a:prstGeom prst="rect">
+            <a:avLst/>
+          </a:prstGeom>
+        </p:spPr>
+      </p:pic>
     </p:spTree>
   </p:cSld>
   <p:clrMapOvr>
@@ -4655,21 +5058,45 @@
                   <a:srgbClr val="FFFFFF"/>
                 </a:solidFill>
               </a:rPr>
-              <a:t>NSX SNAT 驗證通過</a:t>
-            </a:r>
-          </a:p>
-        </p:txBody>
-      </p:sp>
-      <p:sp>
-        <p:nvSpPr>
-          <p:cNvPr id="6" name="Rectangle 5"/>
+              <a:t>必備：兩個 Content Library</a:t>
+            </a:r>
+          </a:p>
+        </p:txBody>
+      </p:sp>
+      <p:pic>
+        <p:nvPicPr>
+          <p:cNvPr id="6" name="Picture 5" descr="34-content-library-list.jpg"/>
+          <p:cNvPicPr>
+            <a:picLocks noChangeAspect="1"/>
+          </p:cNvPicPr>
+          <p:nvPr/>
+        </p:nvPicPr>
+        <p:blipFill>
+          <a:blip r:embed="rId2"/>
+          <a:stretch>
+            <a:fillRect/>
+          </a:stretch>
+        </p:blipFill>
+        <p:spPr>
+          <a:xfrm>
+            <a:off x="274320" y="1005840"/>
+            <a:ext cx="7315200" cy="5029200"/>
+          </a:xfrm>
+          <a:prstGeom prst="rect">
+            <a:avLst/>
+          </a:prstGeom>
+        </p:spPr>
+      </p:pic>
+      <p:sp>
+        <p:nvSpPr>
+          <p:cNvPr id="7" name="Rectangle 6"/>
           <p:cNvSpPr/>
           <p:nvPr/>
         </p:nvSpPr>
         <p:spPr>
           <a:xfrm>
-            <a:off x="274320" y="1097280"/>
-            <a:ext cx="11612880" cy="5029200"/>
+            <a:off x="7772400" y="1005840"/>
+            <a:ext cx="4114800" cy="5029200"/>
           </a:xfrm>
           <a:prstGeom prst="rect">
             <a:avLst/>
@@ -4705,169 +5132,305 @@
       </p:sp>
       <p:sp>
         <p:nvSpPr>
-          <p:cNvPr id="7" name="TextBox 6"/>
-          <p:cNvSpPr txBox="1"/>
-          <p:nvPr/>
-        </p:nvSpPr>
-        <p:spPr>
-          <a:xfrm>
-            <a:off x="457200" y="1280160"/>
-            <a:ext cx="11247120" cy="365760"/>
-          </a:xfrm>
-          <a:prstGeom prst="rect">
-            <a:avLst/>
-          </a:prstGeom>
-          <a:noFill/>
-        </p:spPr>
-        <p:txBody>
-          <a:bodyPr wrap="square">
-            <a:spAutoFit/>
-          </a:bodyPr>
-          <a:lstStyle/>
-          <a:p>
-            <a:pPr algn="l"/>
-            <a:r>
-              <a:rPr sz="1400" b="0">
+          <p:cNvPr id="8" name="TextBox 7"/>
+          <p:cNvSpPr txBox="1"/>
+          <p:nvPr/>
+        </p:nvSpPr>
+        <p:spPr>
+          <a:xfrm>
+            <a:off x="7863840" y="1188720"/>
+            <a:ext cx="3840480" cy="320040"/>
+          </a:xfrm>
+          <a:prstGeom prst="rect">
+            <a:avLst/>
+          </a:prstGeom>
+          <a:noFill/>
+        </p:spPr>
+        <p:txBody>
+          <a:bodyPr wrap="square">
+            <a:spAutoFit/>
+          </a:bodyPr>
+          <a:lstStyle/>
+          <a:p>
+            <a:pPr algn="l"/>
+            <a:r>
+              <a:rPr sz="1200" b="0">
                 <a:solidFill>
                   <a:srgbClr val="FFFFFF"/>
                 </a:solidFill>
               </a:rPr>
-              <a:t>實測：cluster 建立過程 NSX SNAT session 有效</a:t>
-            </a:r>
-          </a:p>
-        </p:txBody>
-      </p:sp>
-      <p:sp>
-        <p:nvSpPr>
-          <p:cNvPr id="8" name="TextBox 7"/>
-          <p:cNvSpPr txBox="1"/>
-          <p:nvPr/>
-        </p:nvSpPr>
-        <p:spPr>
-          <a:xfrm>
-            <a:off x="457200" y="1627632"/>
-            <a:ext cx="11247120" cy="365760"/>
-          </a:xfrm>
-          <a:prstGeom prst="rect">
-            <a:avLst/>
-          </a:prstGeom>
-          <a:noFill/>
-        </p:spPr>
-        <p:txBody>
-          <a:bodyPr wrap="square">
-            <a:spAutoFit/>
-          </a:bodyPr>
-          <a:lstStyle/>
-          <a:p>
-            <a:pPr algn="l"/>
-            <a:r>
-              <a:rPr sz="1400" b="0">
+              <a:t>tkg-content-library</a:t>
+            </a:r>
+          </a:p>
+        </p:txBody>
+      </p:sp>
+      <p:sp>
+        <p:nvSpPr>
+          <p:cNvPr id="9" name="TextBox 8"/>
+          <p:cNvSpPr txBox="1"/>
+          <p:nvPr/>
+        </p:nvSpPr>
+        <p:spPr>
+          <a:xfrm>
+            <a:off x="7863840" y="1490472"/>
+            <a:ext cx="3840480" cy="320040"/>
+          </a:xfrm>
+          <a:prstGeom prst="rect">
+            <a:avLst/>
+          </a:prstGeom>
+          <a:noFill/>
+        </p:spPr>
+        <p:txBody>
+          <a:bodyPr wrap="square">
+            <a:spAutoFit/>
+          </a:bodyPr>
+          <a:lstStyle/>
+          <a:p>
+            <a:pPr algn="l"/>
+            <a:r>
+              <a:rPr sz="1200" b="0">
                 <a:solidFill>
                   <a:srgbClr val="FFFFFF"/>
                 </a:solidFill>
               </a:rPr>
-              <a:t>SNAT bytes out：99,960 packets / 144 MB（拉 container image）</a:t>
-            </a:r>
-          </a:p>
-        </p:txBody>
-      </p:sp>
-      <p:sp>
-        <p:nvSpPr>
-          <p:cNvPr id="9" name="TextBox 8"/>
-          <p:cNvSpPr txBox="1"/>
-          <p:nvPr/>
-        </p:nvSpPr>
-        <p:spPr>
-          <a:xfrm>
-            <a:off x="457200" y="1975104"/>
-            <a:ext cx="11247120" cy="365760"/>
-          </a:xfrm>
-          <a:prstGeom prst="rect">
-            <a:avLst/>
-          </a:prstGeom>
-          <a:noFill/>
-        </p:spPr>
-        <p:txBody>
-          <a:bodyPr wrap="square">
-            <a:spAutoFit/>
-          </a:bodyPr>
-          <a:lstStyle/>
-          <a:p>
-            <a:pPr algn="l"/>
-            <a:r>
-              <a:rPr sz="1400" b="0">
+              <a:t>  → Supervisor image</a:t>
+            </a:r>
+          </a:p>
+        </p:txBody>
+      </p:sp>
+      <p:sp>
+        <p:nvSpPr>
+          <p:cNvPr id="10" name="TextBox 9"/>
+          <p:cNvSpPr txBox="1"/>
+          <p:nvPr/>
+        </p:nvSpPr>
+        <p:spPr>
+          <a:xfrm>
+            <a:off x="7863840" y="1792224"/>
+            <a:ext cx="3840480" cy="320040"/>
+          </a:xfrm>
+          <a:prstGeom prst="rect">
+            <a:avLst/>
+          </a:prstGeom>
+          <a:noFill/>
+        </p:spPr>
+        <p:txBody>
+          <a:bodyPr wrap="square">
+            <a:spAutoFit/>
+          </a:bodyPr>
+          <a:lstStyle/>
+          <a:p>
+            <a:pPr algn="l"/>
+            <a:r>
+              <a:rPr sz="1200" b="0">
                 <a:solidFill>
                   <a:srgbClr val="FFFFFF"/>
                 </a:solidFill>
               </a:rPr>
-              <a:t>SNAT source：192.168.114.128/26 external block</a:t>
-            </a:r>
-          </a:p>
-        </p:txBody>
-      </p:sp>
-      <p:sp>
-        <p:nvSpPr>
-          <p:cNvPr id="10" name="TextBox 9"/>
-          <p:cNvSpPr txBox="1"/>
-          <p:nvPr/>
-        </p:nvSpPr>
-        <p:spPr>
-          <a:xfrm>
-            <a:off x="457200" y="2322576"/>
-            <a:ext cx="11247120" cy="365760"/>
-          </a:xfrm>
-          <a:prstGeom prst="rect">
-            <a:avLst/>
-          </a:prstGeom>
-          <a:noFill/>
-        </p:spPr>
-        <p:txBody>
-          <a:bodyPr wrap="square">
-            <a:spAutoFit/>
-          </a:bodyPr>
-          <a:lstStyle/>
-          <a:p>
-            <a:pPr algn="l"/>
-            <a:r>
-              <a:rPr sz="1400" b="0">
+              <a:t>  → 訂閱 .../supervisor/v1/latest/lib.json</a:t>
+            </a:r>
+          </a:p>
+        </p:txBody>
+      </p:sp>
+      <p:sp>
+        <p:nvSpPr>
+          <p:cNvPr id="11" name="TextBox 10"/>
+          <p:cNvSpPr txBox="1"/>
+          <p:nvPr/>
+        </p:nvSpPr>
+        <p:spPr>
+          <a:xfrm>
+            <a:off x="7863840" y="2093976"/>
+            <a:ext cx="3840480" cy="320040"/>
+          </a:xfrm>
+          <a:prstGeom prst="rect">
+            <a:avLst/>
+          </a:prstGeom>
+          <a:noFill/>
+        </p:spPr>
+        <p:txBody>
+          <a:bodyPr wrap="square">
+            <a:spAutoFit/>
+          </a:bodyPr>
+          <a:lstStyle/>
+          <a:p>
+            <a:pPr algn="l"/>
+            <a:r>
+              <a:rPr sz="1200" b="0">
                 <a:solidFill>
                   <a:srgbClr val="FFFFFF"/>
                 </a:solidFill>
               </a:rPr>
-              <a:t>VNA cluster 負責 SNAT/LB（Path A DTGW 路線）</a:t>
-            </a:r>
-          </a:p>
-        </p:txBody>
-      </p:sp>
-      <p:sp>
-        <p:nvSpPr>
-          <p:cNvPr id="11" name="TextBox 10"/>
-          <p:cNvSpPr txBox="1"/>
-          <p:nvPr/>
-        </p:nvSpPr>
-        <p:spPr>
-          <a:xfrm>
-            <a:off x="457200" y="2670048"/>
-            <a:ext cx="11247120" cy="365760"/>
-          </a:xfrm>
-          <a:prstGeom prst="rect">
-            <a:avLst/>
-          </a:prstGeom>
-          <a:noFill/>
-        </p:spPr>
-        <p:txBody>
-          <a:bodyPr wrap="square">
-            <a:spAutoFit/>
-          </a:bodyPr>
-          <a:lstStyle/>
-          <a:p>
-            <a:pPr algn="l"/>
-            <a:r>
-              <a:rPr sz="1400" b="0">
+              <a:t/>
+            </a:r>
+          </a:p>
+        </p:txBody>
+      </p:sp>
+      <p:sp>
+        <p:nvSpPr>
+          <p:cNvPr id="12" name="TextBox 11"/>
+          <p:cNvSpPr txBox="1"/>
+          <p:nvPr/>
+        </p:nvSpPr>
+        <p:spPr>
+          <a:xfrm>
+            <a:off x="7863840" y="2395728"/>
+            <a:ext cx="3840480" cy="320040"/>
+          </a:xfrm>
+          <a:prstGeom prst="rect">
+            <a:avLst/>
+          </a:prstGeom>
+          <a:noFill/>
+        </p:spPr>
+        <p:txBody>
+          <a:bodyPr wrap="square">
+            <a:spAutoFit/>
+          </a:bodyPr>
+          <a:lstStyle/>
+          <a:p>
+            <a:pPr algn="l"/>
+            <a:r>
+              <a:rPr sz="1200" b="0">
                 <a:solidFill>
                   <a:srgbClr val="FFFFFF"/>
                 </a:solidFill>
               </a:rPr>
+              <a:t>tkg-tkr-library</a:t>
+            </a:r>
+          </a:p>
+        </p:txBody>
+      </p:sp>
+      <p:sp>
+        <p:nvSpPr>
+          <p:cNvPr id="13" name="TextBox 12"/>
+          <p:cNvSpPr txBox="1"/>
+          <p:nvPr/>
+        </p:nvSpPr>
+        <p:spPr>
+          <a:xfrm>
+            <a:off x="7863840" y="2697480"/>
+            <a:ext cx="3840480" cy="320040"/>
+          </a:xfrm>
+          <a:prstGeom prst="rect">
+            <a:avLst/>
+          </a:prstGeom>
+          <a:noFill/>
+        </p:spPr>
+        <p:txBody>
+          <a:bodyPr wrap="square">
+            <a:spAutoFit/>
+          </a:bodyPr>
+          <a:lstStyle/>
+          <a:p>
+            <a:pPr algn="l"/>
+            <a:r>
+              <a:rPr sz="1200" b="0">
+                <a:solidFill>
+                  <a:srgbClr val="FFFFFF"/>
+                </a:solidFill>
+              </a:rPr>
+              <a:t>  → TKG node image (Photon OS)</a:t>
+            </a:r>
+          </a:p>
+        </p:txBody>
+      </p:sp>
+      <p:sp>
+        <p:nvSpPr>
+          <p:cNvPr id="14" name="TextBox 13"/>
+          <p:cNvSpPr txBox="1"/>
+          <p:nvPr/>
+        </p:nvSpPr>
+        <p:spPr>
+          <a:xfrm>
+            <a:off x="7863840" y="2999232"/>
+            <a:ext cx="3840480" cy="320040"/>
+          </a:xfrm>
+          <a:prstGeom prst="rect">
+            <a:avLst/>
+          </a:prstGeom>
+          <a:noFill/>
+        </p:spPr>
+        <p:txBody>
+          <a:bodyPr wrap="square">
+            <a:spAutoFit/>
+          </a:bodyPr>
+          <a:lstStyle/>
+          <a:p>
+            <a:pPr algn="l"/>
+            <a:r>
+              <a:rPr sz="1200" b="0">
+                <a:solidFill>
+                  <a:srgbClr val="FFFFFF"/>
+                </a:solidFill>
+              </a:rPr>
+              <a:t>  → 訂閱 .../v2/latest/lib.json</a:t>
+            </a:r>
+          </a:p>
+        </p:txBody>
+      </p:sp>
+      <p:sp>
+        <p:nvSpPr>
+          <p:cNvPr id="15" name="TextBox 14"/>
+          <p:cNvSpPr txBox="1"/>
+          <p:nvPr/>
+        </p:nvSpPr>
+        <p:spPr>
+          <a:xfrm>
+            <a:off x="7863840" y="3300984"/>
+            <a:ext cx="3840480" cy="320040"/>
+          </a:xfrm>
+          <a:prstGeom prst="rect">
+            <a:avLst/>
+          </a:prstGeom>
+          <a:noFill/>
+        </p:spPr>
+        <p:txBody>
+          <a:bodyPr wrap="square">
+            <a:spAutoFit/>
+          </a:bodyPr>
+          <a:lstStyle/>
+          <a:p>
+            <a:pPr algn="l"/>
+            <a:r>
+              <a:rPr sz="1200" b="0">
+                <a:solidFill>
+                  <a:srgbClr val="FFFFFF"/>
+                </a:solidFill>
+              </a:rPr>
+              <a:t>  → 7.69 GB / 123 items</a:t>
+            </a:r>
+          </a:p>
+        </p:txBody>
+      </p:sp>
+      <p:sp>
+        <p:nvSpPr>
+          <p:cNvPr id="16" name="TextBox 15"/>
+          <p:cNvSpPr txBox="1"/>
+          <p:nvPr/>
+        </p:nvSpPr>
+        <p:spPr>
+          <a:xfrm>
+            <a:off x="7863840" y="3602736"/>
+            <a:ext cx="3840480" cy="320040"/>
+          </a:xfrm>
+          <a:prstGeom prst="rect">
+            <a:avLst/>
+          </a:prstGeom>
+          <a:noFill/>
+        </p:spPr>
+        <p:txBody>
+          <a:bodyPr wrap="square">
+            <a:spAutoFit/>
+          </a:bodyPr>
+          <a:lstStyle/>
+          <a:p>
+            <a:pPr algn="l"/>
+            <a:r>
+              <a:rPr sz="1200" b="0">
+                <a:solidFill>
+                  <a:srgbClr val="FFFFFF"/>
+                </a:solidFill>
+              </a:rPr>
               <a:t/>
             </a:r>
           </a:p>
@@ -4875,204 +5438,136 @@
       </p:sp>
       <p:sp>
         <p:nvSpPr>
-          <p:cNvPr id="12" name="TextBox 11"/>
-          <p:cNvSpPr txBox="1"/>
-          <p:nvPr/>
-        </p:nvSpPr>
-        <p:spPr>
-          <a:xfrm>
-            <a:off x="457200" y="3017520"/>
-            <a:ext cx="11247120" cy="365760"/>
-          </a:xfrm>
-          <a:prstGeom prst="rect">
-            <a:avLst/>
-          </a:prstGeom>
-          <a:noFill/>
-        </p:spPr>
-        <p:txBody>
-          <a:bodyPr wrap="square">
-            <a:spAutoFit/>
-          </a:bodyPr>
-          <a:lstStyle/>
-          <a:p>
-            <a:pPr algn="l"/>
-            <a:r>
-              <a:rPr sz="1400" b="0">
-                <a:solidFill>
-                  <a:srgbClr val="00B0EA"/>
-                </a:solidFill>
-              </a:rPr>
-              <a:t>kubectl get nodes 輸出：</a:t>
-            </a:r>
-          </a:p>
-        </p:txBody>
-      </p:sp>
-      <p:sp>
-        <p:nvSpPr>
-          <p:cNvPr id="13" name="TextBox 12"/>
-          <p:cNvSpPr txBox="1"/>
-          <p:nvPr/>
-        </p:nvSpPr>
-        <p:spPr>
-          <a:xfrm>
-            <a:off x="457200" y="3364992"/>
-            <a:ext cx="11247120" cy="365760"/>
-          </a:xfrm>
-          <a:prstGeom prst="rect">
-            <a:avLst/>
-          </a:prstGeom>
-          <a:noFill/>
-        </p:spPr>
-        <p:txBody>
-          <a:bodyPr wrap="square">
-            <a:spAutoFit/>
-          </a:bodyPr>
-          <a:lstStyle/>
-          <a:p>
-            <a:pPr algn="l"/>
-            <a:r>
-              <a:rPr sz="1400" b="0">
-                <a:solidFill>
-                  <a:srgbClr val="00B0EA"/>
-                </a:solidFill>
-              </a:rPr>
-              <a:t>  vks-auto-01-7f6ms-fmgz9       Ready   control-plane   v1.34.2+vmware.2</a:t>
-            </a:r>
-          </a:p>
-        </p:txBody>
-      </p:sp>
-      <p:sp>
-        <p:nvSpPr>
-          <p:cNvPr id="14" name="TextBox 13"/>
-          <p:cNvSpPr txBox="1"/>
-          <p:nvPr/>
-        </p:nvSpPr>
-        <p:spPr>
-          <a:xfrm>
-            <a:off x="457200" y="3712464"/>
-            <a:ext cx="11247120" cy="365760"/>
-          </a:xfrm>
-          <a:prstGeom prst="rect">
-            <a:avLst/>
-          </a:prstGeom>
-          <a:noFill/>
-        </p:spPr>
-        <p:txBody>
-          <a:bodyPr wrap="square">
-            <a:spAutoFit/>
-          </a:bodyPr>
-          <a:lstStyle/>
-          <a:p>
-            <a:pPr algn="l"/>
-            <a:r>
-              <a:rPr sz="1400" b="0">
-                <a:solidFill>
-                  <a:srgbClr val="00B0EA"/>
-                </a:solidFill>
-              </a:rPr>
-              <a:t>  vks-auto-01-node-pool-1-...   Ready   &lt;none&gt;          v1.34.2+vmware.2</a:t>
-            </a:r>
-          </a:p>
-        </p:txBody>
-      </p:sp>
-      <p:sp>
-        <p:nvSpPr>
-          <p:cNvPr id="15" name="TextBox 14"/>
-          <p:cNvSpPr txBox="1"/>
-          <p:nvPr/>
-        </p:nvSpPr>
-        <p:spPr>
-          <a:xfrm>
-            <a:off x="457200" y="4059936"/>
-            <a:ext cx="11247120" cy="365760"/>
-          </a:xfrm>
-          <a:prstGeom prst="rect">
-            <a:avLst/>
-          </a:prstGeom>
-          <a:noFill/>
-        </p:spPr>
-        <p:txBody>
-          <a:bodyPr wrap="square">
-            <a:spAutoFit/>
-          </a:bodyPr>
-          <a:lstStyle/>
-          <a:p>
-            <a:pPr algn="l"/>
-            <a:r>
-              <a:rPr sz="1400" b="0">
+          <p:cNvPr id="17" name="TextBox 16"/>
+          <p:cNvSpPr txBox="1"/>
+          <p:nvPr/>
+        </p:nvSpPr>
+        <p:spPr>
+          <a:xfrm>
+            <a:off x="7863840" y="3904488"/>
+            <a:ext cx="3840480" cy="320040"/>
+          </a:xfrm>
+          <a:prstGeom prst="rect">
+            <a:avLst/>
+          </a:prstGeom>
+          <a:noFill/>
+        </p:spPr>
+        <p:txBody>
+          <a:bodyPr wrap="square">
+            <a:spAutoFit/>
+          </a:bodyPr>
+          <a:lstStyle/>
+          <a:p>
+            <a:pPr algn="l"/>
+            <a:r>
+              <a:rPr sz="1200" b="0">
                 <a:solidFill>
                   <a:srgbClr val="FFFFFF"/>
                 </a:solidFill>
               </a:rPr>
-              <a:t/>
-            </a:r>
-          </a:p>
-        </p:txBody>
-      </p:sp>
-      <p:sp>
-        <p:nvSpPr>
-          <p:cNvPr id="16" name="TextBox 15"/>
-          <p:cNvSpPr txBox="1"/>
-          <p:nvPr/>
-        </p:nvSpPr>
-        <p:spPr>
-          <a:xfrm>
-            <a:off x="457200" y="4407408"/>
-            <a:ext cx="11247120" cy="365760"/>
-          </a:xfrm>
-          <a:prstGeom prst="rect">
-            <a:avLst/>
-          </a:prstGeom>
-          <a:noFill/>
-        </p:spPr>
-        <p:txBody>
-          <a:bodyPr wrap="square">
-            <a:spAutoFit/>
-          </a:bodyPr>
-          <a:lstStyle/>
-          <a:p>
-            <a:pPr algn="l"/>
-            <a:r>
-              <a:rPr sz="1400" b="0">
+              <a:t>⚠️ 少了 tkr-library</a:t>
+            </a:r>
+          </a:p>
+        </p:txBody>
+      </p:sp>
+      <p:sp>
+        <p:nvSpPr>
+          <p:cNvPr id="18" name="TextBox 17"/>
+          <p:cNvSpPr txBox="1"/>
+          <p:nvPr/>
+        </p:nvSpPr>
+        <p:spPr>
+          <a:xfrm>
+            <a:off x="7863840" y="4206240"/>
+            <a:ext cx="3840480" cy="320040"/>
+          </a:xfrm>
+          <a:prstGeom prst="rect">
+            <a:avLst/>
+          </a:prstGeom>
+          <a:noFill/>
+        </p:spPr>
+        <p:txBody>
+          <a:bodyPr wrap="square">
+            <a:spAutoFit/>
+          </a:bodyPr>
+          <a:lstStyle/>
+          <a:p>
+            <a:pPr algn="l"/>
+            <a:r>
+              <a:rPr sz="1200" b="0">
                 <a:solidFill>
                   <a:srgbClr val="FFFFFF"/>
                 </a:solidFill>
               </a:rPr>
-              <a:t>Container runtime：containerd 2.1.5-fips</a:t>
-            </a:r>
-          </a:p>
-        </p:txBody>
-      </p:sp>
-      <p:sp>
-        <p:nvSpPr>
-          <p:cNvPr id="17" name="TextBox 16"/>
-          <p:cNvSpPr txBox="1"/>
-          <p:nvPr/>
-        </p:nvSpPr>
-        <p:spPr>
-          <a:xfrm>
-            <a:off x="457200" y="4754880"/>
-            <a:ext cx="11247120" cy="365760"/>
-          </a:xfrm>
-          <a:prstGeom prst="rect">
-            <a:avLst/>
-          </a:prstGeom>
-          <a:noFill/>
-        </p:spPr>
-        <p:txBody>
-          <a:bodyPr wrap="square">
-            <a:spAutoFit/>
-          </a:bodyPr>
-          <a:lstStyle/>
-          <a:p>
-            <a:pPr algn="l"/>
-            <a:r>
-              <a:rPr sz="1400" b="0">
+              <a:t>  tkr-resolver 報</a:t>
+            </a:r>
+          </a:p>
+        </p:txBody>
+      </p:sp>
+      <p:sp>
+        <p:nvSpPr>
+          <p:cNvPr id="19" name="TextBox 18"/>
+          <p:cNvSpPr txBox="1"/>
+          <p:nvPr/>
+        </p:nvSpPr>
+        <p:spPr>
+          <a:xfrm>
+            <a:off x="7863840" y="4507992"/>
+            <a:ext cx="3840480" cy="320040"/>
+          </a:xfrm>
+          <a:prstGeom prst="rect">
+            <a:avLst/>
+          </a:prstGeom>
+          <a:noFill/>
+        </p:spPr>
+        <p:txBody>
+          <a:bodyPr wrap="square">
+            <a:spAutoFit/>
+          </a:bodyPr>
+          <a:lstStyle/>
+          <a:p>
+            <a:pPr algn="l"/>
+            <a:r>
+              <a:rPr sz="1200" b="0">
                 <a:solidFill>
                   <a:srgbClr val="FFFFFF"/>
                 </a:solidFill>
               </a:rPr>
-              <a:t>OS：Photon OS (Linux)</a:t>
+              <a:t>  "Could not resolve KR/OSImage"</a:t>
+            </a:r>
+          </a:p>
+        </p:txBody>
+      </p:sp>
+      <p:sp>
+        <p:nvSpPr>
+          <p:cNvPr id="20" name="TextBox 19"/>
+          <p:cNvSpPr txBox="1"/>
+          <p:nvPr/>
+        </p:nvSpPr>
+        <p:spPr>
+          <a:xfrm>
+            <a:off x="7863840" y="4809744"/>
+            <a:ext cx="3840480" cy="320040"/>
+          </a:xfrm>
+          <a:prstGeom prst="rect">
+            <a:avLst/>
+          </a:prstGeom>
+          <a:noFill/>
+        </p:spPr>
+        <p:txBody>
+          <a:bodyPr wrap="square">
+            <a:spAutoFit/>
+          </a:bodyPr>
+          <a:lstStyle/>
+          <a:p>
+            <a:pPr algn="l"/>
+            <a:r>
+              <a:rPr sz="1200" b="0">
+                <a:solidFill>
+                  <a:srgbClr val="FFFFFF"/>
+                </a:solidFill>
+              </a:rPr>
+              <a:t>  → cluster 建不起來</a:t>
             </a:r>
           </a:p>
         </p:txBody>
@@ -5253,734 +5748,59 @@
                   <a:srgbClr val="FFFFFF"/>
                 </a:solidFill>
               </a:rPr>
-              <a:t>Python 方法（開發用）</a:t>
-            </a:r>
-          </a:p>
-        </p:txBody>
-      </p:sp>
-      <p:sp>
-        <p:nvSpPr>
-          <p:cNvPr id="6" name="Rectangle 5"/>
-          <p:cNvSpPr/>
-          <p:nvPr/>
-        </p:nvSpPr>
-        <p:spPr>
-          <a:xfrm>
-            <a:off x="274320" y="1097280"/>
-            <a:ext cx="11612880" cy="5303520"/>
-          </a:xfrm>
-          <a:prstGeom prst="rect">
-            <a:avLst/>
-          </a:prstGeom>
-          <a:solidFill>
-            <a:srgbClr val="1A1A2E"/>
-          </a:solidFill>
-          <a:ln>
-            <a:noFill/>
-          </a:ln>
-        </p:spPr>
-        <p:style>
-          <a:lnRef idx="1">
-            <a:schemeClr val="accent1"/>
-          </a:lnRef>
-          <a:fillRef idx="3">
-            <a:schemeClr val="accent1"/>
-          </a:fillRef>
-          <a:effectRef idx="2">
-            <a:schemeClr val="accent1"/>
-          </a:effectRef>
-          <a:fontRef idx="minor">
-            <a:schemeClr val="lt1"/>
-          </a:fontRef>
-        </p:style>
-        <p:txBody>
-          <a:bodyPr rtlCol="0" anchor="ctr"/>
-          <a:lstStyle/>
-          <a:p>
-            <a:pPr algn="ctr"/>
-          </a:p>
-        </p:txBody>
-      </p:sp>
-      <p:sp>
-        <p:nvSpPr>
-          <p:cNvPr id="7" name="TextBox 6"/>
-          <p:cNvSpPr txBox="1"/>
-          <p:nvPr/>
-        </p:nvSpPr>
-        <p:spPr>
-          <a:xfrm>
-            <a:off x="457200" y="1234440"/>
-            <a:ext cx="11247120" cy="246888"/>
-          </a:xfrm>
-          <a:prstGeom prst="rect">
-            <a:avLst/>
-          </a:prstGeom>
-          <a:noFill/>
-        </p:spPr>
-        <p:txBody>
-          <a:bodyPr wrap="square">
-            <a:spAutoFit/>
-          </a:bodyPr>
-          <a:lstStyle/>
-          <a:p>
-            <a:pPr algn="l"/>
-            <a:r>
-              <a:rPr sz="1150" b="0">
-                <a:solidFill>
-                  <a:srgbClr val="00B0EA"/>
-                </a:solidFill>
-              </a:rPr>
-              <a:t># 安裝</a:t>
-            </a:r>
-          </a:p>
-        </p:txBody>
-      </p:sp>
-      <p:sp>
-        <p:nvSpPr>
-          <p:cNvPr id="8" name="TextBox 7"/>
-          <p:cNvSpPr txBox="1"/>
-          <p:nvPr/>
-        </p:nvSpPr>
-        <p:spPr>
-          <a:xfrm>
-            <a:off x="457200" y="1476756"/>
-            <a:ext cx="11247120" cy="246888"/>
-          </a:xfrm>
-          <a:prstGeom prst="rect">
-            <a:avLst/>
-          </a:prstGeom>
-          <a:noFill/>
-        </p:spPr>
-        <p:txBody>
-          <a:bodyPr wrap="square">
-            <a:spAutoFit/>
-          </a:bodyPr>
-          <a:lstStyle/>
-          <a:p>
-            <a:pPr algn="l"/>
-            <a:r>
-              <a:rPr sz="1150" b="0">
-                <a:solidFill>
-                  <a:srgbClr val="FFFFFF"/>
-                </a:solidFill>
-              </a:rPr>
-              <a:t>pip install -r requirements.txt   # requests, PyYAML, kubernetes</a:t>
-            </a:r>
-          </a:p>
-        </p:txBody>
-      </p:sp>
-      <p:sp>
-        <p:nvSpPr>
-          <p:cNvPr id="9" name="TextBox 8"/>
-          <p:cNvSpPr txBox="1"/>
-          <p:nvPr/>
-        </p:nvSpPr>
-        <p:spPr>
-          <a:xfrm>
-            <a:off x="457200" y="1719072"/>
-            <a:ext cx="11247120" cy="246888"/>
-          </a:xfrm>
-          <a:prstGeom prst="rect">
-            <a:avLst/>
-          </a:prstGeom>
-          <a:noFill/>
-        </p:spPr>
-        <p:txBody>
-          <a:bodyPr wrap="square">
-            <a:spAutoFit/>
-          </a:bodyPr>
-          <a:lstStyle/>
-          <a:p>
-            <a:pPr algn="l"/>
-            <a:r>
-              <a:rPr sz="1150" b="0">
-                <a:solidFill>
-                  <a:srgbClr val="FFFFFF"/>
-                </a:solidFill>
-              </a:rPr>
-              <a:t/>
-            </a:r>
-          </a:p>
-        </p:txBody>
-      </p:sp>
-      <p:sp>
-        <p:nvSpPr>
-          <p:cNvPr id="10" name="TextBox 9"/>
-          <p:cNvSpPr txBox="1"/>
-          <p:nvPr/>
-        </p:nvSpPr>
-        <p:spPr>
-          <a:xfrm>
-            <a:off x="457200" y="1961388"/>
-            <a:ext cx="11247120" cy="246888"/>
-          </a:xfrm>
-          <a:prstGeom prst="rect">
-            <a:avLst/>
-          </a:prstGeom>
-          <a:noFill/>
-        </p:spPr>
-        <p:txBody>
-          <a:bodyPr wrap="square">
-            <a:spAutoFit/>
-          </a:bodyPr>
-          <a:lstStyle/>
-          <a:p>
-            <a:pPr algn="l"/>
-            <a:r>
-              <a:rPr sz="1150" b="0">
-                <a:solidFill>
-                  <a:srgbClr val="00B0EA"/>
-                </a:solidFill>
-              </a:rPr>
-              <a:t># 設定（或 export VC=... VCPASS=... NSXPASS=...）</a:t>
-            </a:r>
-          </a:p>
-        </p:txBody>
-      </p:sp>
-      <p:sp>
-        <p:nvSpPr>
-          <p:cNvPr id="11" name="TextBox 10"/>
-          <p:cNvSpPr txBox="1"/>
-          <p:nvPr/>
-        </p:nvSpPr>
-        <p:spPr>
-          <a:xfrm>
-            <a:off x="457200" y="2203704"/>
-            <a:ext cx="11247120" cy="246888"/>
-          </a:xfrm>
-          <a:prstGeom prst="rect">
-            <a:avLst/>
-          </a:prstGeom>
-          <a:noFill/>
-        </p:spPr>
-        <p:txBody>
-          <a:bodyPr wrap="square">
-            <a:spAutoFit/>
-          </a:bodyPr>
-          <a:lstStyle/>
-          <a:p>
-            <a:pPr algn="l"/>
-            <a:r>
-              <a:rPr sz="1150" b="0">
-                <a:solidFill>
-                  <a:srgbClr val="00B0EA"/>
-                </a:solidFill>
-              </a:rPr>
-              <a:t># python/lab.py  — 共用連線設定</a:t>
-            </a:r>
-          </a:p>
-        </p:txBody>
-      </p:sp>
-      <p:sp>
-        <p:nvSpPr>
-          <p:cNvPr id="12" name="TextBox 11"/>
-          <p:cNvSpPr txBox="1"/>
-          <p:nvPr/>
-        </p:nvSpPr>
-        <p:spPr>
-          <a:xfrm>
-            <a:off x="457200" y="2446020"/>
-            <a:ext cx="11247120" cy="246888"/>
-          </a:xfrm>
-          <a:prstGeom prst="rect">
-            <a:avLst/>
-          </a:prstGeom>
-          <a:noFill/>
-        </p:spPr>
-        <p:txBody>
-          <a:bodyPr wrap="square">
-            <a:spAutoFit/>
-          </a:bodyPr>
-          <a:lstStyle/>
-          <a:p>
-            <a:pPr algn="l"/>
-            <a:r>
-              <a:rPr sz="1150" b="0">
-                <a:solidFill>
-                  <a:srgbClr val="FFFFFF"/>
-                </a:solidFill>
-              </a:rPr>
-              <a:t/>
-            </a:r>
-          </a:p>
-        </p:txBody>
-      </p:sp>
-      <p:sp>
-        <p:nvSpPr>
-          <p:cNvPr id="13" name="TextBox 12"/>
-          <p:cNvSpPr txBox="1"/>
-          <p:nvPr/>
-        </p:nvSpPr>
-        <p:spPr>
-          <a:xfrm>
-            <a:off x="457200" y="2688336"/>
-            <a:ext cx="11247120" cy="246888"/>
-          </a:xfrm>
-          <a:prstGeom prst="rect">
-            <a:avLst/>
-          </a:prstGeom>
-          <a:noFill/>
-        </p:spPr>
-        <p:txBody>
-          <a:bodyPr wrap="square">
-            <a:spAutoFit/>
-          </a:bodyPr>
-          <a:lstStyle/>
-          <a:p>
-            <a:pPr algn="l"/>
-            <a:r>
-              <a:rPr sz="1150" b="0">
-                <a:solidFill>
-                  <a:srgbClr val="00B0EA"/>
-                </a:solidFill>
-              </a:rPr>
-              <a:t># Step 1 — NSX IP blocks + VPC profile</a:t>
-            </a:r>
-          </a:p>
-        </p:txBody>
-      </p:sp>
-      <p:sp>
-        <p:nvSpPr>
-          <p:cNvPr id="14" name="TextBox 13"/>
-          <p:cNvSpPr txBox="1"/>
-          <p:nvPr/>
-        </p:nvSpPr>
-        <p:spPr>
-          <a:xfrm>
-            <a:off x="457200" y="2930652"/>
-            <a:ext cx="11247120" cy="246888"/>
-          </a:xfrm>
-          <a:prstGeom prst="rect">
-            <a:avLst/>
-          </a:prstGeom>
-          <a:noFill/>
-        </p:spPr>
-        <p:txBody>
-          <a:bodyPr wrap="square">
-            <a:spAutoFit/>
-          </a:bodyPr>
-          <a:lstStyle/>
-          <a:p>
-            <a:pPr algn="l"/>
-            <a:r>
-              <a:rPr sz="1150" b="0">
-                <a:solidFill>
-                  <a:srgbClr val="FFFFFF"/>
-                </a:solidFill>
-              </a:rPr>
-              <a:t>python step1_setup_dtgw.py --dry-run</a:t>
-            </a:r>
-          </a:p>
-        </p:txBody>
-      </p:sp>
-      <p:sp>
-        <p:nvSpPr>
-          <p:cNvPr id="15" name="TextBox 14"/>
-          <p:cNvSpPr txBox="1"/>
-          <p:nvPr/>
-        </p:nvSpPr>
-        <p:spPr>
-          <a:xfrm>
-            <a:off x="457200" y="3172968"/>
-            <a:ext cx="11247120" cy="246888"/>
-          </a:xfrm>
-          <a:prstGeom prst="rect">
-            <a:avLst/>
-          </a:prstGeom>
-          <a:noFill/>
-        </p:spPr>
-        <p:txBody>
-          <a:bodyPr wrap="square">
-            <a:spAutoFit/>
-          </a:bodyPr>
-          <a:lstStyle/>
-          <a:p>
-            <a:pPr algn="l"/>
-            <a:r>
-              <a:rPr sz="1150" b="0">
-                <a:solidFill>
-                  <a:srgbClr val="FFFFFF"/>
-                </a:solidFill>
-              </a:rPr>
-              <a:t>python step1_setup_dtgw.py</a:t>
-            </a:r>
-          </a:p>
-        </p:txBody>
-      </p:sp>
-      <p:sp>
-        <p:nvSpPr>
-          <p:cNvPr id="16" name="TextBox 15"/>
-          <p:cNvSpPr txBox="1"/>
-          <p:nvPr/>
-        </p:nvSpPr>
-        <p:spPr>
-          <a:xfrm>
-            <a:off x="457200" y="3415284"/>
-            <a:ext cx="11247120" cy="246888"/>
-          </a:xfrm>
-          <a:prstGeom prst="rect">
-            <a:avLst/>
-          </a:prstGeom>
-          <a:noFill/>
-        </p:spPr>
-        <p:txBody>
-          <a:bodyPr wrap="square">
-            <a:spAutoFit/>
-          </a:bodyPr>
-          <a:lstStyle/>
-          <a:p>
-            <a:pPr algn="l"/>
-            <a:r>
-              <a:rPr sz="1150" b="0">
-                <a:solidFill>
-                  <a:srgbClr val="FFFFFF"/>
-                </a:solidFill>
-              </a:rPr>
-              <a:t/>
-            </a:r>
-          </a:p>
-        </p:txBody>
-      </p:sp>
-      <p:sp>
-        <p:nvSpPr>
-          <p:cNvPr id="17" name="TextBox 16"/>
-          <p:cNvSpPr txBox="1"/>
-          <p:nvPr/>
-        </p:nvSpPr>
-        <p:spPr>
-          <a:xfrm>
-            <a:off x="457200" y="3657600"/>
-            <a:ext cx="11247120" cy="246888"/>
-          </a:xfrm>
-          <a:prstGeom prst="rect">
-            <a:avLst/>
-          </a:prstGeom>
-          <a:noFill/>
-        </p:spPr>
-        <p:txBody>
-          <a:bodyPr wrap="square">
-            <a:spAutoFit/>
-          </a:bodyPr>
-          <a:lstStyle/>
-          <a:p>
-            <a:pPr algn="l"/>
-            <a:r>
-              <a:rPr sz="1150" b="0">
-                <a:solidFill>
-                  <a:srgbClr val="00B0EA"/>
-                </a:solidFill>
-              </a:rPr>
-              <a:t># Step 2 — 啟用 Supervisor</a:t>
-            </a:r>
-          </a:p>
-        </p:txBody>
-      </p:sp>
-      <p:sp>
-        <p:nvSpPr>
-          <p:cNvPr id="18" name="TextBox 17"/>
-          <p:cNvSpPr txBox="1"/>
-          <p:nvPr/>
-        </p:nvSpPr>
-        <p:spPr>
-          <a:xfrm>
-            <a:off x="457200" y="3899916"/>
-            <a:ext cx="11247120" cy="246888"/>
-          </a:xfrm>
-          <a:prstGeom prst="rect">
-            <a:avLst/>
-          </a:prstGeom>
-          <a:noFill/>
-        </p:spPr>
-        <p:txBody>
-          <a:bodyPr wrap="square">
-            <a:spAutoFit/>
-          </a:bodyPr>
-          <a:lstStyle/>
-          <a:p>
-            <a:pPr algn="l"/>
-            <a:r>
-              <a:rPr sz="1150" b="0">
-                <a:solidFill>
-                  <a:srgbClr val="FFFFFF"/>
-                </a:solidFill>
-              </a:rPr>
-              <a:t>python step2_enable_supervisor.py</a:t>
-            </a:r>
-          </a:p>
-        </p:txBody>
-      </p:sp>
-      <p:sp>
-        <p:nvSpPr>
-          <p:cNvPr id="19" name="TextBox 18"/>
-          <p:cNvSpPr txBox="1"/>
-          <p:nvPr/>
-        </p:nvSpPr>
-        <p:spPr>
-          <a:xfrm>
-            <a:off x="457200" y="4142232"/>
-            <a:ext cx="11247120" cy="246888"/>
-          </a:xfrm>
-          <a:prstGeom prst="rect">
-            <a:avLst/>
-          </a:prstGeom>
-          <a:noFill/>
-        </p:spPr>
-        <p:txBody>
-          <a:bodyPr wrap="square">
-            <a:spAutoFit/>
-          </a:bodyPr>
-          <a:lstStyle/>
-          <a:p>
-            <a:pPr algn="l"/>
-            <a:r>
-              <a:rPr sz="1150" b="0">
-                <a:solidFill>
-                  <a:srgbClr val="FFFFFF"/>
-                </a:solidFill>
-              </a:rPr>
-              <a:t/>
-            </a:r>
-          </a:p>
-        </p:txBody>
-      </p:sp>
-      <p:sp>
-        <p:nvSpPr>
-          <p:cNvPr id="20" name="TextBox 19"/>
-          <p:cNvSpPr txBox="1"/>
-          <p:nvPr/>
-        </p:nvSpPr>
-        <p:spPr>
-          <a:xfrm>
-            <a:off x="457200" y="4384548"/>
-            <a:ext cx="11247120" cy="246888"/>
-          </a:xfrm>
-          <a:prstGeom prst="rect">
-            <a:avLst/>
-          </a:prstGeom>
-          <a:noFill/>
-        </p:spPr>
-        <p:txBody>
-          <a:bodyPr wrap="square">
-            <a:spAutoFit/>
-          </a:bodyPr>
-          <a:lstStyle/>
-          <a:p>
-            <a:pPr algn="l"/>
-            <a:r>
-              <a:rPr sz="1150" b="0">
-                <a:solidFill>
-                  <a:srgbClr val="00B0EA"/>
-                </a:solidFill>
-              </a:rPr>
-              <a:t># Step 3 — 建 namespace</a:t>
-            </a:r>
-          </a:p>
-        </p:txBody>
-      </p:sp>
-      <p:sp>
-        <p:nvSpPr>
-          <p:cNvPr id="21" name="TextBox 20"/>
-          <p:cNvSpPr txBox="1"/>
-          <p:nvPr/>
-        </p:nvSpPr>
-        <p:spPr>
-          <a:xfrm>
-            <a:off x="457200" y="4626864"/>
-            <a:ext cx="11247120" cy="246888"/>
-          </a:xfrm>
-          <a:prstGeom prst="rect">
-            <a:avLst/>
-          </a:prstGeom>
-          <a:noFill/>
-        </p:spPr>
-        <p:txBody>
-          <a:bodyPr wrap="square">
-            <a:spAutoFit/>
-          </a:bodyPr>
-          <a:lstStyle/>
-          <a:p>
-            <a:pPr algn="l"/>
-            <a:r>
-              <a:rPr sz="1150" b="0">
-                <a:solidFill>
-                  <a:srgbClr val="FFFFFF"/>
-                </a:solidFill>
-              </a:rPr>
-              <a:t>python step3_new_namespace.py</a:t>
-            </a:r>
-          </a:p>
-        </p:txBody>
-      </p:sp>
-      <p:sp>
-        <p:nvSpPr>
-          <p:cNvPr id="22" name="TextBox 21"/>
-          <p:cNvSpPr txBox="1"/>
-          <p:nvPr/>
-        </p:nvSpPr>
-        <p:spPr>
-          <a:xfrm>
-            <a:off x="457200" y="4869180"/>
-            <a:ext cx="11247120" cy="246888"/>
-          </a:xfrm>
-          <a:prstGeom prst="rect">
-            <a:avLst/>
-          </a:prstGeom>
-          <a:noFill/>
-        </p:spPr>
-        <p:txBody>
-          <a:bodyPr wrap="square">
-            <a:spAutoFit/>
-          </a:bodyPr>
-          <a:lstStyle/>
-          <a:p>
-            <a:pPr algn="l"/>
-            <a:r>
-              <a:rPr sz="1150" b="0">
-                <a:solidFill>
-                  <a:srgbClr val="FFFFFF"/>
-                </a:solidFill>
-              </a:rPr>
-              <a:t/>
-            </a:r>
-          </a:p>
-        </p:txBody>
-      </p:sp>
-      <p:sp>
-        <p:nvSpPr>
-          <p:cNvPr id="23" name="TextBox 22"/>
-          <p:cNvSpPr txBox="1"/>
-          <p:nvPr/>
-        </p:nvSpPr>
-        <p:spPr>
-          <a:xfrm>
-            <a:off x="457200" y="5111496"/>
-            <a:ext cx="11247120" cy="246888"/>
-          </a:xfrm>
-          <a:prstGeom prst="rect">
-            <a:avLst/>
-          </a:prstGeom>
-          <a:noFill/>
-        </p:spPr>
-        <p:txBody>
-          <a:bodyPr wrap="square">
-            <a:spAutoFit/>
-          </a:bodyPr>
-          <a:lstStyle/>
-          <a:p>
-            <a:pPr algn="l"/>
-            <a:r>
-              <a:rPr sz="1150" b="0">
-                <a:solidFill>
-                  <a:srgbClr val="00B0EA"/>
-                </a:solidFill>
-              </a:rPr>
-              <a:t># Step 4 — 建 VKS cluster (kubectl 或 kubernetes client)</a:t>
-            </a:r>
-          </a:p>
-        </p:txBody>
-      </p:sp>
-      <p:sp>
-        <p:nvSpPr>
-          <p:cNvPr id="24" name="TextBox 23"/>
-          <p:cNvSpPr txBox="1"/>
-          <p:nvPr/>
-        </p:nvSpPr>
-        <p:spPr>
-          <a:xfrm>
-            <a:off x="457200" y="5353812"/>
-            <a:ext cx="11247120" cy="246888"/>
-          </a:xfrm>
-          <a:prstGeom prst="rect">
-            <a:avLst/>
-          </a:prstGeom>
-          <a:noFill/>
-        </p:spPr>
-        <p:txBody>
-          <a:bodyPr wrap="square">
-            <a:spAutoFit/>
-          </a:bodyPr>
-          <a:lstStyle/>
-          <a:p>
-            <a:pPr algn="l"/>
-            <a:r>
-              <a:rPr sz="1150" b="0">
-                <a:solidFill>
-                  <a:srgbClr val="FFFFFF"/>
-                </a:solidFill>
-              </a:rPr>
-              <a:t>kubectl-vsphere login --server=192.168.114.132 -u administrator@vsphere.local --insecure-skip-tls-verify</a:t>
-            </a:r>
-          </a:p>
-        </p:txBody>
-      </p:sp>
-      <p:sp>
-        <p:nvSpPr>
-          <p:cNvPr id="25" name="TextBox 24"/>
-          <p:cNvSpPr txBox="1"/>
-          <p:nvPr/>
-        </p:nvSpPr>
-        <p:spPr>
-          <a:xfrm>
-            <a:off x="457200" y="5596128"/>
-            <a:ext cx="11247120" cy="246888"/>
-          </a:xfrm>
-          <a:prstGeom prst="rect">
-            <a:avLst/>
-          </a:prstGeom>
-          <a:noFill/>
-        </p:spPr>
-        <p:txBody>
-          <a:bodyPr wrap="square">
-            <a:spAutoFit/>
-          </a:bodyPr>
-          <a:lstStyle/>
-          <a:p>
-            <a:pPr algn="l"/>
-            <a:r>
-              <a:rPr sz="1150" b="0">
-                <a:solidFill>
-                  <a:srgbClr val="FFFFFF"/>
-                </a:solidFill>
-              </a:rPr>
-              <a:t>python step4_new_vks_cluster.py</a:t>
-            </a:r>
-          </a:p>
-        </p:txBody>
-      </p:sp>
-      <p:sp>
-        <p:nvSpPr>
-          <p:cNvPr id="26" name="TextBox 25"/>
-          <p:cNvSpPr txBox="1"/>
-          <p:nvPr/>
-        </p:nvSpPr>
-        <p:spPr>
-          <a:xfrm>
-            <a:off x="457200" y="5838444"/>
-            <a:ext cx="11247120" cy="246888"/>
-          </a:xfrm>
-          <a:prstGeom prst="rect">
-            <a:avLst/>
-          </a:prstGeom>
-          <a:noFill/>
-        </p:spPr>
-        <p:txBody>
-          <a:bodyPr wrap="square">
-            <a:spAutoFit/>
-          </a:bodyPr>
-          <a:lstStyle/>
-          <a:p>
-            <a:pPr algn="l"/>
-            <a:r>
-              <a:rPr sz="1150" b="0">
-                <a:solidFill>
-                  <a:srgbClr val="FFFFFF"/>
-                </a:solidFill>
-              </a:rPr>
-              <a:t>python step4_new_vks_cluster.py --client   # 純 python-kubernetes</a:t>
-            </a:r>
-          </a:p>
-        </p:txBody>
-      </p:sp>
+              <a:t>Namespace vks-automation</a:t>
+            </a:r>
+          </a:p>
+        </p:txBody>
+      </p:sp>
+      <p:pic>
+        <p:nvPicPr>
+          <p:cNvPr id="6" name="Picture 5" descr="33-namespace-vks-automation.jpg"/>
+          <p:cNvPicPr>
+            <a:picLocks noChangeAspect="1"/>
+          </p:cNvPicPr>
+          <p:nvPr/>
+        </p:nvPicPr>
+        <p:blipFill>
+          <a:blip r:embed="rId2"/>
+          <a:stretch>
+            <a:fillRect/>
+          </a:stretch>
+        </p:blipFill>
+        <p:spPr>
+          <a:xfrm>
+            <a:off x="274320" y="1005840"/>
+            <a:ext cx="5669280" cy="5029200"/>
+          </a:xfrm>
+          <a:prstGeom prst="rect">
+            <a:avLst/>
+          </a:prstGeom>
+        </p:spPr>
+      </p:pic>
+      <p:pic>
+        <p:nvPicPr>
+          <p:cNvPr id="7" name="Picture 6" descr="32-namespaces-list.jpg"/>
+          <p:cNvPicPr>
+            <a:picLocks noChangeAspect="1"/>
+          </p:cNvPicPr>
+          <p:nvPr/>
+        </p:nvPicPr>
+        <p:blipFill>
+          <a:blip r:embed="rId3"/>
+          <a:stretch>
+            <a:fillRect/>
+          </a:stretch>
+        </p:blipFill>
+        <p:spPr>
+          <a:xfrm>
+            <a:off x="6126480" y="1005840"/>
+            <a:ext cx="5760720" cy="5029200"/>
+          </a:xfrm>
+          <a:prstGeom prst="rect">
+            <a:avLst/>
+          </a:prstGeom>
+        </p:spPr>
+      </p:pic>
     </p:spTree>
   </p:cSld>
   <p:clrMapOvr>
@@ -6157,1079 +5977,65 @@
                   <a:srgbClr val="FFFFFF"/>
                 </a:solidFill>
               </a:rPr>
-              <a:t>PowerShell &amp; API 方法</a:t>
-            </a:r>
-          </a:p>
-        </p:txBody>
-      </p:sp>
-      <p:sp>
-        <p:nvSpPr>
-          <p:cNvPr id="6" name="Rectangle 5"/>
-          <p:cNvSpPr/>
-          <p:nvPr/>
-        </p:nvSpPr>
-        <p:spPr>
-          <a:xfrm>
-            <a:off x="274320" y="1097280"/>
-            <a:ext cx="5486400" cy="5029200"/>
-          </a:xfrm>
-          <a:prstGeom prst="rect">
-            <a:avLst/>
-          </a:prstGeom>
-          <a:solidFill>
-            <a:srgbClr val="1A1A2E"/>
-          </a:solidFill>
-          <a:ln>
-            <a:noFill/>
-          </a:ln>
-        </p:spPr>
-        <p:style>
-          <a:lnRef idx="1">
-            <a:schemeClr val="accent1"/>
-          </a:lnRef>
-          <a:fillRef idx="3">
-            <a:schemeClr val="accent1"/>
-          </a:fillRef>
-          <a:effectRef idx="2">
-            <a:schemeClr val="accent1"/>
-          </a:effectRef>
-          <a:fontRef idx="minor">
-            <a:schemeClr val="lt1"/>
-          </a:fontRef>
-        </p:style>
-        <p:txBody>
-          <a:bodyPr rtlCol="0" anchor="ctr"/>
+              <a:t>VKS Cluster 建立完成</a:t>
+            </a:r>
+          </a:p>
+        </p:txBody>
+      </p:sp>
+      <p:pic>
+        <p:nvPicPr>
+          <p:cNvPr id="6" name="Picture 5" descr="37-vks-cluster-running.jpg"/>
+          <p:cNvPicPr>
+            <a:picLocks noChangeAspect="1"/>
+          </p:cNvPicPr>
+          <p:nvPr/>
+        </p:nvPicPr>
+        <p:blipFill>
+          <a:blip r:embed="rId2"/>
+          <a:stretch>
+            <a:fillRect/>
+          </a:stretch>
+        </p:blipFill>
+        <p:spPr>
+          <a:xfrm>
+            <a:off x="274320" y="1005840"/>
+            <a:ext cx="11612880" cy="5029200"/>
+          </a:xfrm>
+          <a:prstGeom prst="rect">
+            <a:avLst/>
+          </a:prstGeom>
+        </p:spPr>
+      </p:pic>
+      <p:sp>
+        <p:nvSpPr>
+          <p:cNvPr id="7" name="TextBox 6"/>
+          <p:cNvSpPr txBox="1"/>
+          <p:nvPr/>
+        </p:nvSpPr>
+        <p:spPr>
+          <a:xfrm>
+            <a:off x="274320" y="6172200"/>
+            <a:ext cx="11612880" cy="457200"/>
+          </a:xfrm>
+          <a:prstGeom prst="rect">
+            <a:avLst/>
+          </a:prstGeom>
+          <a:noFill/>
+        </p:spPr>
+        <p:txBody>
+          <a:bodyPr wrap="square">
+            <a:spAutoFit/>
+          </a:bodyPr>
           <a:lstStyle/>
           <a:p>
             <a:pPr algn="ctr"/>
-          </a:p>
-        </p:txBody>
-      </p:sp>
-      <p:sp>
-        <p:nvSpPr>
-          <p:cNvPr id="7" name="Rectangle 6"/>
-          <p:cNvSpPr/>
-          <p:nvPr/>
-        </p:nvSpPr>
-        <p:spPr>
-          <a:xfrm>
-            <a:off x="6035040" y="1097280"/>
-            <a:ext cx="5852160" cy="5029200"/>
-          </a:xfrm>
-          <a:prstGeom prst="rect">
-            <a:avLst/>
-          </a:prstGeom>
-          <a:solidFill>
-            <a:srgbClr val="1A1A2E"/>
-          </a:solidFill>
-          <a:ln>
-            <a:noFill/>
-          </a:ln>
-        </p:spPr>
-        <p:style>
-          <a:lnRef idx="1">
-            <a:schemeClr val="accent1"/>
-          </a:lnRef>
-          <a:fillRef idx="3">
-            <a:schemeClr val="accent1"/>
-          </a:fillRef>
-          <a:effectRef idx="2">
-            <a:schemeClr val="accent1"/>
-          </a:effectRef>
-          <a:fontRef idx="minor">
-            <a:schemeClr val="lt1"/>
-          </a:fontRef>
-        </p:style>
-        <p:txBody>
-          <a:bodyPr rtlCol="0" anchor="ctr"/>
-          <a:lstStyle/>
-          <a:p>
-            <a:pPr algn="ctr"/>
-          </a:p>
-        </p:txBody>
-      </p:sp>
-      <p:sp>
-        <p:nvSpPr>
-          <p:cNvPr id="8" name="TextBox 7"/>
-          <p:cNvSpPr txBox="1"/>
-          <p:nvPr/>
-        </p:nvSpPr>
-        <p:spPr>
-          <a:xfrm>
-            <a:off x="457200" y="1280160"/>
-            <a:ext cx="5212080" cy="301752"/>
-          </a:xfrm>
-          <a:prstGeom prst="rect">
-            <a:avLst/>
-          </a:prstGeom>
-          <a:noFill/>
-        </p:spPr>
-        <p:txBody>
-          <a:bodyPr wrap="square">
-            <a:spAutoFit/>
-          </a:bodyPr>
-          <a:lstStyle/>
-          <a:p>
-            <a:pPr algn="l"/>
-            <a:r>
-              <a:rPr sz="1100" b="0">
+            <a:r>
+              <a:rPr sz="1400" b="1">
                 <a:solidFill>
                   <a:srgbClr val="00B0EA"/>
                 </a:solidFill>
               </a:rPr>
-              <a:t># PowerShell（common/ + path-a-dtgw/）</a:t>
-            </a:r>
-          </a:p>
-        </p:txBody>
-      </p:sp>
-      <p:sp>
-        <p:nvSpPr>
-          <p:cNvPr id="9" name="TextBox 8"/>
-          <p:cNvSpPr txBox="1"/>
-          <p:nvPr/>
-        </p:nvSpPr>
-        <p:spPr>
-          <a:xfrm>
-            <a:off x="457200" y="1572768"/>
-            <a:ext cx="5212080" cy="301752"/>
-          </a:xfrm>
-          <a:prstGeom prst="rect">
-            <a:avLst/>
-          </a:prstGeom>
-          <a:noFill/>
-        </p:spPr>
-        <p:txBody>
-          <a:bodyPr wrap="square">
-            <a:spAutoFit/>
-          </a:bodyPr>
-          <a:lstStyle/>
-          <a:p>
-            <a:pPr algn="l"/>
-            <a:r>
-              <a:rPr sz="1100" b="0">
-                <a:solidFill>
-                  <a:srgbClr val="FFFFFF"/>
-                </a:solidFill>
-              </a:rPr>
-              <a:t/>
-            </a:r>
-          </a:p>
-        </p:txBody>
-      </p:sp>
-      <p:sp>
-        <p:nvSpPr>
-          <p:cNvPr id="10" name="TextBox 9"/>
-          <p:cNvSpPr txBox="1"/>
-          <p:nvPr/>
-        </p:nvSpPr>
-        <p:spPr>
-          <a:xfrm>
-            <a:off x="457200" y="1865376"/>
-            <a:ext cx="5212080" cy="301752"/>
-          </a:xfrm>
-          <a:prstGeom prst="rect">
-            <a:avLst/>
-          </a:prstGeom>
-          <a:noFill/>
-        </p:spPr>
-        <p:txBody>
-          <a:bodyPr wrap="square">
-            <a:spAutoFit/>
-          </a:bodyPr>
-          <a:lstStyle/>
-          <a:p>
-            <a:pPr algn="l"/>
-            <a:r>
-              <a:rPr sz="1100" b="0">
-                <a:solidFill>
-                  <a:srgbClr val="FFFFFF"/>
-                </a:solidFill>
-              </a:rPr>
-              <a:t>pwsh Step0-Check-Prereqs.ps1</a:t>
-            </a:r>
-          </a:p>
-        </p:txBody>
-      </p:sp>
-      <p:sp>
-        <p:nvSpPr>
-          <p:cNvPr id="11" name="TextBox 10"/>
-          <p:cNvSpPr txBox="1"/>
-          <p:nvPr/>
-        </p:nvSpPr>
-        <p:spPr>
-          <a:xfrm>
-            <a:off x="457200" y="2157984"/>
-            <a:ext cx="5212080" cy="301752"/>
-          </a:xfrm>
-          <a:prstGeom prst="rect">
-            <a:avLst/>
-          </a:prstGeom>
-          <a:noFill/>
-        </p:spPr>
-        <p:txBody>
-          <a:bodyPr wrap="square">
-            <a:spAutoFit/>
-          </a:bodyPr>
-          <a:lstStyle/>
-          <a:p>
-            <a:pPr algn="l"/>
-            <a:r>
-              <a:rPr sz="1100" b="0">
-                <a:solidFill>
-                  <a:srgbClr val="FFFFFF"/>
-                </a:solidFill>
-              </a:rPr>
-              <a:t>pwsh path-a-dtgw/Step1-Setup-DTGW.ps1 \</a:t>
-            </a:r>
-          </a:p>
-        </p:txBody>
-      </p:sp>
-      <p:sp>
-        <p:nvSpPr>
-          <p:cNvPr id="12" name="TextBox 11"/>
-          <p:cNvSpPr txBox="1"/>
-          <p:nvPr/>
-        </p:nvSpPr>
-        <p:spPr>
-          <a:xfrm>
-            <a:off x="457200" y="2450592"/>
-            <a:ext cx="5212080" cy="301752"/>
-          </a:xfrm>
-          <a:prstGeom prst="rect">
-            <a:avLst/>
-          </a:prstGeom>
-          <a:noFill/>
-        </p:spPr>
-        <p:txBody>
-          <a:bodyPr wrap="square">
-            <a:spAutoFit/>
-          </a:bodyPr>
-          <a:lstStyle/>
-          <a:p>
-            <a:pPr algn="l"/>
-            <a:r>
-              <a:rPr sz="1100" b="0">
-                <a:solidFill>
-                  <a:srgbClr val="FFFFFF"/>
-                </a:solidFill>
-              </a:rPr>
-              <a:t>     -DryRun    # 先 dry-run</a:t>
-            </a:r>
-          </a:p>
-        </p:txBody>
-      </p:sp>
-      <p:sp>
-        <p:nvSpPr>
-          <p:cNvPr id="13" name="TextBox 12"/>
-          <p:cNvSpPr txBox="1"/>
-          <p:nvPr/>
-        </p:nvSpPr>
-        <p:spPr>
-          <a:xfrm>
-            <a:off x="457200" y="2743200"/>
-            <a:ext cx="5212080" cy="301752"/>
-          </a:xfrm>
-          <a:prstGeom prst="rect">
-            <a:avLst/>
-          </a:prstGeom>
-          <a:noFill/>
-        </p:spPr>
-        <p:txBody>
-          <a:bodyPr wrap="square">
-            <a:spAutoFit/>
-          </a:bodyPr>
-          <a:lstStyle/>
-          <a:p>
-            <a:pPr algn="l"/>
-            <a:r>
-              <a:rPr sz="1100" b="0">
-                <a:solidFill>
-                  <a:srgbClr val="FFFFFF"/>
-                </a:solidFill>
-              </a:rPr>
-              <a:t>pwsh path-a-dtgw/Step1-Setup-DTGW.ps1</a:t>
-            </a:r>
-          </a:p>
-        </p:txBody>
-      </p:sp>
-      <p:sp>
-        <p:nvSpPr>
-          <p:cNvPr id="14" name="TextBox 13"/>
-          <p:cNvSpPr txBox="1"/>
-          <p:nvPr/>
-        </p:nvSpPr>
-        <p:spPr>
-          <a:xfrm>
-            <a:off x="457200" y="3035808"/>
-            <a:ext cx="5212080" cy="301752"/>
-          </a:xfrm>
-          <a:prstGeom prst="rect">
-            <a:avLst/>
-          </a:prstGeom>
-          <a:noFill/>
-        </p:spPr>
-        <p:txBody>
-          <a:bodyPr wrap="square">
-            <a:spAutoFit/>
-          </a:bodyPr>
-          <a:lstStyle/>
-          <a:p>
-            <a:pPr algn="l"/>
-            <a:r>
-              <a:rPr sz="1100" b="0">
-                <a:solidFill>
-                  <a:srgbClr val="FFFFFF"/>
-                </a:solidFill>
-              </a:rPr>
-              <a:t>pwsh Step2-Enable-Supervisor.ps1</a:t>
-            </a:r>
-          </a:p>
-        </p:txBody>
-      </p:sp>
-      <p:sp>
-        <p:nvSpPr>
-          <p:cNvPr id="15" name="TextBox 14"/>
-          <p:cNvSpPr txBox="1"/>
-          <p:nvPr/>
-        </p:nvSpPr>
-        <p:spPr>
-          <a:xfrm>
-            <a:off x="457200" y="3328416"/>
-            <a:ext cx="5212080" cy="301752"/>
-          </a:xfrm>
-          <a:prstGeom prst="rect">
-            <a:avLst/>
-          </a:prstGeom>
-          <a:noFill/>
-        </p:spPr>
-        <p:txBody>
-          <a:bodyPr wrap="square">
-            <a:spAutoFit/>
-          </a:bodyPr>
-          <a:lstStyle/>
-          <a:p>
-            <a:pPr algn="l"/>
-            <a:r>
-              <a:rPr sz="1100" b="0">
-                <a:solidFill>
-                  <a:srgbClr val="FFFFFF"/>
-                </a:solidFill>
-              </a:rPr>
-              <a:t>pwsh Step3-New-Namespace.ps1</a:t>
-            </a:r>
-          </a:p>
-        </p:txBody>
-      </p:sp>
-      <p:sp>
-        <p:nvSpPr>
-          <p:cNvPr id="16" name="TextBox 15"/>
-          <p:cNvSpPr txBox="1"/>
-          <p:nvPr/>
-        </p:nvSpPr>
-        <p:spPr>
-          <a:xfrm>
-            <a:off x="457200" y="3621024"/>
-            <a:ext cx="5212080" cy="301752"/>
-          </a:xfrm>
-          <a:prstGeom prst="rect">
-            <a:avLst/>
-          </a:prstGeom>
-          <a:noFill/>
-        </p:spPr>
-        <p:txBody>
-          <a:bodyPr wrap="square">
-            <a:spAutoFit/>
-          </a:bodyPr>
-          <a:lstStyle/>
-          <a:p>
-            <a:pPr algn="l"/>
-            <a:r>
-              <a:rPr sz="1100" b="0">
-                <a:solidFill>
-                  <a:srgbClr val="FFFFFF"/>
-                </a:solidFill>
-              </a:rPr>
-              <a:t>pwsh Step4-New-VksCluster.ps1</a:t>
-            </a:r>
-          </a:p>
-        </p:txBody>
-      </p:sp>
-      <p:sp>
-        <p:nvSpPr>
-          <p:cNvPr id="17" name="TextBox 16"/>
-          <p:cNvSpPr txBox="1"/>
-          <p:nvPr/>
-        </p:nvSpPr>
-        <p:spPr>
-          <a:xfrm>
-            <a:off x="457200" y="3913632"/>
-            <a:ext cx="5212080" cy="301752"/>
-          </a:xfrm>
-          <a:prstGeom prst="rect">
-            <a:avLst/>
-          </a:prstGeom>
-          <a:noFill/>
-        </p:spPr>
-        <p:txBody>
-          <a:bodyPr wrap="square">
-            <a:spAutoFit/>
-          </a:bodyPr>
-          <a:lstStyle/>
-          <a:p>
-            <a:pPr algn="l"/>
-            <a:r>
-              <a:rPr sz="1100" b="0">
-                <a:solidFill>
-                  <a:srgbClr val="FFFFFF"/>
-                </a:solidFill>
-              </a:rPr>
-              <a:t/>
-            </a:r>
-          </a:p>
-        </p:txBody>
-      </p:sp>
-      <p:sp>
-        <p:nvSpPr>
-          <p:cNvPr id="18" name="TextBox 17"/>
-          <p:cNvSpPr txBox="1"/>
-          <p:nvPr/>
-        </p:nvSpPr>
-        <p:spPr>
-          <a:xfrm>
-            <a:off x="457200" y="4206240"/>
-            <a:ext cx="5212080" cy="301752"/>
-          </a:xfrm>
-          <a:prstGeom prst="rect">
-            <a:avLst/>
-          </a:prstGeom>
-          <a:noFill/>
-        </p:spPr>
-        <p:txBody>
-          <a:bodyPr wrap="square">
-            <a:spAutoFit/>
-          </a:bodyPr>
-          <a:lstStyle/>
-          <a:p>
-            <a:pPr algn="l"/>
-            <a:r>
-              <a:rPr sz="1100" b="0">
-                <a:solidFill>
-                  <a:srgbClr val="00B0EA"/>
-                </a:solidFill>
-              </a:rPr>
-              <a:t># PowerCLI cmdlet 路線</a:t>
-            </a:r>
-          </a:p>
-        </p:txBody>
-      </p:sp>
-      <p:sp>
-        <p:nvSpPr>
-          <p:cNvPr id="19" name="TextBox 18"/>
-          <p:cNvSpPr txBox="1"/>
-          <p:nvPr/>
-        </p:nvSpPr>
-        <p:spPr>
-          <a:xfrm>
-            <a:off x="457200" y="4498848"/>
-            <a:ext cx="5212080" cy="301752"/>
-          </a:xfrm>
-          <a:prstGeom prst="rect">
-            <a:avLst/>
-          </a:prstGeom>
-          <a:noFill/>
-        </p:spPr>
-        <p:txBody>
-          <a:bodyPr wrap="square">
-            <a:spAutoFit/>
-          </a:bodyPr>
-          <a:lstStyle/>
-          <a:p>
-            <a:pPr algn="l"/>
-            <a:r>
-              <a:rPr sz="1100" b="0">
-                <a:solidFill>
-                  <a:srgbClr val="FFFFFF"/>
-                </a:solidFill>
-              </a:rPr>
-              <a:t>Enable-WMCluster ...</a:t>
-            </a:r>
-          </a:p>
-        </p:txBody>
-      </p:sp>
-      <p:sp>
-        <p:nvSpPr>
-          <p:cNvPr id="20" name="TextBox 19"/>
-          <p:cNvSpPr txBox="1"/>
-          <p:nvPr/>
-        </p:nvSpPr>
-        <p:spPr>
-          <a:xfrm>
-            <a:off x="457200" y="4791456"/>
-            <a:ext cx="5212080" cy="301752"/>
-          </a:xfrm>
-          <a:prstGeom prst="rect">
-            <a:avLst/>
-          </a:prstGeom>
-          <a:noFill/>
-        </p:spPr>
-        <p:txBody>
-          <a:bodyPr wrap="square">
-            <a:spAutoFit/>
-          </a:bodyPr>
-          <a:lstStyle/>
-          <a:p>
-            <a:pPr algn="l"/>
-            <a:r>
-              <a:rPr sz="1100" b="0">
-                <a:solidFill>
-                  <a:srgbClr val="FFFFFF"/>
-                </a:solidFill>
-              </a:rPr>
-              <a:t>New-WMNamespace ...</a:t>
-            </a:r>
-          </a:p>
-        </p:txBody>
-      </p:sp>
-      <p:sp>
-        <p:nvSpPr>
-          <p:cNvPr id="21" name="TextBox 20"/>
-          <p:cNvSpPr txBox="1"/>
-          <p:nvPr/>
-        </p:nvSpPr>
-        <p:spPr>
-          <a:xfrm>
-            <a:off x="6172200" y="1280160"/>
-            <a:ext cx="5577840" cy="301752"/>
-          </a:xfrm>
-          <a:prstGeom prst="rect">
-            <a:avLst/>
-          </a:prstGeom>
-          <a:noFill/>
-        </p:spPr>
-        <p:txBody>
-          <a:bodyPr wrap="square">
-            <a:spAutoFit/>
-          </a:bodyPr>
-          <a:lstStyle/>
-          <a:p>
-            <a:pPr algn="l"/>
-            <a:r>
-              <a:rPr sz="1100" b="0">
-                <a:solidFill>
-                  <a:srgbClr val="00B0EA"/>
-                </a:solidFill>
-              </a:rPr>
-              <a:t># API（curl / 語言無關）</a:t>
-            </a:r>
-          </a:p>
-        </p:txBody>
-      </p:sp>
-      <p:sp>
-        <p:nvSpPr>
-          <p:cNvPr id="22" name="TextBox 21"/>
-          <p:cNvSpPr txBox="1"/>
-          <p:nvPr/>
-        </p:nvSpPr>
-        <p:spPr>
-          <a:xfrm>
-            <a:off x="6172200" y="1572768"/>
-            <a:ext cx="5577840" cy="301752"/>
-          </a:xfrm>
-          <a:prstGeom prst="rect">
-            <a:avLst/>
-          </a:prstGeom>
-          <a:noFill/>
-        </p:spPr>
-        <p:txBody>
-          <a:bodyPr wrap="square">
-            <a:spAutoFit/>
-          </a:bodyPr>
-          <a:lstStyle/>
-          <a:p>
-            <a:pPr algn="l"/>
-            <a:r>
-              <a:rPr sz="1100" b="0">
-                <a:solidFill>
-                  <a:srgbClr val="FFFFFF"/>
-                </a:solidFill>
-              </a:rPr>
-              <a:t/>
-            </a:r>
-          </a:p>
-        </p:txBody>
-      </p:sp>
-      <p:sp>
-        <p:nvSpPr>
-          <p:cNvPr id="23" name="TextBox 22"/>
-          <p:cNvSpPr txBox="1"/>
-          <p:nvPr/>
-        </p:nvSpPr>
-        <p:spPr>
-          <a:xfrm>
-            <a:off x="6172200" y="1865376"/>
-            <a:ext cx="5577840" cy="301752"/>
-          </a:xfrm>
-          <a:prstGeom prst="rect">
-            <a:avLst/>
-          </a:prstGeom>
-          <a:noFill/>
-        </p:spPr>
-        <p:txBody>
-          <a:bodyPr wrap="square">
-            <a:spAutoFit/>
-          </a:bodyPr>
-          <a:lstStyle/>
-          <a:p>
-            <a:pPr algn="l"/>
-            <a:r>
-              <a:rPr sz="1100" b="0">
-                <a:solidFill>
-                  <a:srgbClr val="00B0EA"/>
-                </a:solidFill>
-              </a:rPr>
-              <a:t># 認證</a:t>
-            </a:r>
-          </a:p>
-        </p:txBody>
-      </p:sp>
-      <p:sp>
-        <p:nvSpPr>
-          <p:cNvPr id="24" name="TextBox 23"/>
-          <p:cNvSpPr txBox="1"/>
-          <p:nvPr/>
-        </p:nvSpPr>
-        <p:spPr>
-          <a:xfrm>
-            <a:off x="6172200" y="2157984"/>
-            <a:ext cx="5577840" cy="301752"/>
-          </a:xfrm>
-          <a:prstGeom prst="rect">
-            <a:avLst/>
-          </a:prstGeom>
-          <a:noFill/>
-        </p:spPr>
-        <p:txBody>
-          <a:bodyPr wrap="square">
-            <a:spAutoFit/>
-          </a:bodyPr>
-          <a:lstStyle/>
-          <a:p>
-            <a:pPr algn="l"/>
-            <a:r>
-              <a:rPr sz="1100" b="0">
-                <a:solidFill>
-                  <a:srgbClr val="FFFFFF"/>
-                </a:solidFill>
-              </a:rPr>
-              <a:t>SID=$(curl -u admin:pass -X POST</a:t>
-            </a:r>
-          </a:p>
-        </p:txBody>
-      </p:sp>
-      <p:sp>
-        <p:nvSpPr>
-          <p:cNvPr id="25" name="TextBox 24"/>
-          <p:cNvSpPr txBox="1"/>
-          <p:nvPr/>
-        </p:nvSpPr>
-        <p:spPr>
-          <a:xfrm>
-            <a:off x="6172200" y="2450592"/>
-            <a:ext cx="5577840" cy="301752"/>
-          </a:xfrm>
-          <a:prstGeom prst="rect">
-            <a:avLst/>
-          </a:prstGeom>
-          <a:noFill/>
-        </p:spPr>
-        <p:txBody>
-          <a:bodyPr wrap="square">
-            <a:spAutoFit/>
-          </a:bodyPr>
-          <a:lstStyle/>
-          <a:p>
-            <a:pPr algn="l"/>
-            <a:r>
-              <a:rPr sz="1100" b="0">
-                <a:solidFill>
-                  <a:srgbClr val="FFFFFF"/>
-                </a:solidFill>
-              </a:rPr>
-              <a:t>  https://vc/api/session)</a:t>
-            </a:r>
-          </a:p>
-        </p:txBody>
-      </p:sp>
-      <p:sp>
-        <p:nvSpPr>
-          <p:cNvPr id="26" name="TextBox 25"/>
-          <p:cNvSpPr txBox="1"/>
-          <p:nvPr/>
-        </p:nvSpPr>
-        <p:spPr>
-          <a:xfrm>
-            <a:off x="6172200" y="2743200"/>
-            <a:ext cx="5577840" cy="301752"/>
-          </a:xfrm>
-          <a:prstGeom prst="rect">
-            <a:avLst/>
-          </a:prstGeom>
-          <a:noFill/>
-        </p:spPr>
-        <p:txBody>
-          <a:bodyPr wrap="square">
-            <a:spAutoFit/>
-          </a:bodyPr>
-          <a:lstStyle/>
-          <a:p>
-            <a:pPr algn="l"/>
-            <a:r>
-              <a:rPr sz="1100" b="0">
-                <a:solidFill>
-                  <a:srgbClr val="FFFFFF"/>
-                </a:solidFill>
-              </a:rPr>
-              <a:t/>
-            </a:r>
-          </a:p>
-        </p:txBody>
-      </p:sp>
-      <p:sp>
-        <p:nvSpPr>
-          <p:cNvPr id="27" name="TextBox 26"/>
-          <p:cNvSpPr txBox="1"/>
-          <p:nvPr/>
-        </p:nvSpPr>
-        <p:spPr>
-          <a:xfrm>
-            <a:off x="6172200" y="3035808"/>
-            <a:ext cx="5577840" cy="301752"/>
-          </a:xfrm>
-          <a:prstGeom prst="rect">
-            <a:avLst/>
-          </a:prstGeom>
-          <a:noFill/>
-        </p:spPr>
-        <p:txBody>
-          <a:bodyPr wrap="square">
-            <a:spAutoFit/>
-          </a:bodyPr>
-          <a:lstStyle/>
-          <a:p>
-            <a:pPr algn="l"/>
-            <a:r>
-              <a:rPr sz="1100" b="0">
-                <a:solidFill>
-                  <a:srgbClr val="00B0EA"/>
-                </a:solidFill>
-              </a:rPr>
-              <a:t># NSX IP blocks</a:t>
-            </a:r>
-          </a:p>
-        </p:txBody>
-      </p:sp>
-      <p:sp>
-        <p:nvSpPr>
-          <p:cNvPr id="28" name="TextBox 27"/>
-          <p:cNvSpPr txBox="1"/>
-          <p:nvPr/>
-        </p:nvSpPr>
-        <p:spPr>
-          <a:xfrm>
-            <a:off x="6172200" y="3328416"/>
-            <a:ext cx="5577840" cy="301752"/>
-          </a:xfrm>
-          <a:prstGeom prst="rect">
-            <a:avLst/>
-          </a:prstGeom>
-          <a:noFill/>
-        </p:spPr>
-        <p:txBody>
-          <a:bodyPr wrap="square">
-            <a:spAutoFit/>
-          </a:bodyPr>
-          <a:lstStyle/>
-          <a:p>
-            <a:pPr algn="l"/>
-            <a:r>
-              <a:rPr sz="1100" b="0">
-                <a:solidFill>
-                  <a:srgbClr val="FFFFFF"/>
-                </a:solidFill>
-              </a:rPr>
-              <a:t>curl -X PATCH https://nsx/policy/api/v1</a:t>
-            </a:r>
-          </a:p>
-        </p:txBody>
-      </p:sp>
-      <p:sp>
-        <p:nvSpPr>
-          <p:cNvPr id="29" name="TextBox 28"/>
-          <p:cNvSpPr txBox="1"/>
-          <p:nvPr/>
-        </p:nvSpPr>
-        <p:spPr>
-          <a:xfrm>
-            <a:off x="6172200" y="3621024"/>
-            <a:ext cx="5577840" cy="301752"/>
-          </a:xfrm>
-          <a:prstGeom prst="rect">
-            <a:avLst/>
-          </a:prstGeom>
-          <a:noFill/>
-        </p:spPr>
-        <p:txBody>
-          <a:bodyPr wrap="square">
-            <a:spAutoFit/>
-          </a:bodyPr>
-          <a:lstStyle/>
-          <a:p>
-            <a:pPr algn="l"/>
-            <a:r>
-              <a:rPr sz="1100" b="0">
-                <a:solidFill>
-                  <a:srgbClr val="FFFFFF"/>
-                </a:solidFill>
-              </a:rPr>
-              <a:t>  /infra/ip-blocks/vcf-m02-vks-ext</a:t>
-            </a:r>
-          </a:p>
-        </p:txBody>
-      </p:sp>
-      <p:sp>
-        <p:nvSpPr>
-          <p:cNvPr id="30" name="TextBox 29"/>
-          <p:cNvSpPr txBox="1"/>
-          <p:nvPr/>
-        </p:nvSpPr>
-        <p:spPr>
-          <a:xfrm>
-            <a:off x="6172200" y="3913632"/>
-            <a:ext cx="5577840" cy="301752"/>
-          </a:xfrm>
-          <a:prstGeom prst="rect">
-            <a:avLst/>
-          </a:prstGeom>
-          <a:noFill/>
-        </p:spPr>
-        <p:txBody>
-          <a:bodyPr wrap="square">
-            <a:spAutoFit/>
-          </a:bodyPr>
-          <a:lstStyle/>
-          <a:p>
-            <a:pPr algn="l"/>
-            <a:r>
-              <a:rPr sz="1100" b="0">
-                <a:solidFill>
-                  <a:srgbClr val="FFFFFF"/>
-                </a:solidFill>
-              </a:rPr>
-              <a:t/>
-            </a:r>
-          </a:p>
-        </p:txBody>
-      </p:sp>
-      <p:sp>
-        <p:nvSpPr>
-          <p:cNvPr id="31" name="TextBox 30"/>
-          <p:cNvSpPr txBox="1"/>
-          <p:nvPr/>
-        </p:nvSpPr>
-        <p:spPr>
-          <a:xfrm>
-            <a:off x="6172200" y="4206240"/>
-            <a:ext cx="5577840" cy="301752"/>
-          </a:xfrm>
-          <a:prstGeom prst="rect">
-            <a:avLst/>
-          </a:prstGeom>
-          <a:noFill/>
-        </p:spPr>
-        <p:txBody>
-          <a:bodyPr wrap="square">
-            <a:spAutoFit/>
-          </a:bodyPr>
-          <a:lstStyle/>
-          <a:p>
-            <a:pPr algn="l"/>
-            <a:r>
-              <a:rPr sz="1100" b="0">
-                <a:solidFill>
-                  <a:srgbClr val="00B0EA"/>
-                </a:solidFill>
-              </a:rPr>
-              <a:t># 啟用 Supervisor</a:t>
-            </a:r>
-          </a:p>
-        </p:txBody>
-      </p:sp>
-      <p:sp>
-        <p:nvSpPr>
-          <p:cNvPr id="32" name="TextBox 31"/>
-          <p:cNvSpPr txBox="1"/>
-          <p:nvPr/>
-        </p:nvSpPr>
-        <p:spPr>
-          <a:xfrm>
-            <a:off x="6172200" y="4498848"/>
-            <a:ext cx="5577840" cy="301752"/>
-          </a:xfrm>
-          <a:prstGeom prst="rect">
-            <a:avLst/>
-          </a:prstGeom>
-          <a:noFill/>
-        </p:spPr>
-        <p:txBody>
-          <a:bodyPr wrap="square">
-            <a:spAutoFit/>
-          </a:bodyPr>
-          <a:lstStyle/>
-          <a:p>
-            <a:pPr algn="l"/>
-            <a:r>
-              <a:rPr sz="1100" b="0">
-                <a:solidFill>
-                  <a:srgbClr val="FFFFFF"/>
-                </a:solidFill>
-              </a:rPr>
-              <a:t>curl -X POST https://vc/api/vcenter</a:t>
-            </a:r>
-          </a:p>
-        </p:txBody>
-      </p:sp>
-      <p:sp>
-        <p:nvSpPr>
-          <p:cNvPr id="33" name="TextBox 32"/>
-          <p:cNvSpPr txBox="1"/>
-          <p:nvPr/>
-        </p:nvSpPr>
-        <p:spPr>
-          <a:xfrm>
-            <a:off x="6172200" y="4791456"/>
-            <a:ext cx="5577840" cy="301752"/>
-          </a:xfrm>
-          <a:prstGeom prst="rect">
-            <a:avLst/>
-          </a:prstGeom>
-          <a:noFill/>
-        </p:spPr>
-        <p:txBody>
-          <a:bodyPr wrap="square">
-            <a:spAutoFit/>
-          </a:bodyPr>
-          <a:lstStyle/>
-          <a:p>
-            <a:pPr algn="l"/>
-            <a:r>
-              <a:rPr sz="1100" b="0">
-                <a:solidFill>
-                  <a:srgbClr val="FFFFFF"/>
-                </a:solidFill>
-              </a:rPr>
-              <a:t>  /namespace-management/supervisors</a:t>
-            </a:r>
-          </a:p>
-        </p:txBody>
-      </p:sp>
-      <p:sp>
-        <p:nvSpPr>
-          <p:cNvPr id="34" name="TextBox 33"/>
-          <p:cNvSpPr txBox="1"/>
-          <p:nvPr/>
-        </p:nvSpPr>
-        <p:spPr>
-          <a:xfrm>
-            <a:off x="6172200" y="5084064"/>
-            <a:ext cx="5577840" cy="301752"/>
-          </a:xfrm>
-          <a:prstGeom prst="rect">
-            <a:avLst/>
-          </a:prstGeom>
-          <a:noFill/>
-        </p:spPr>
-        <p:txBody>
-          <a:bodyPr wrap="square">
-            <a:spAutoFit/>
-          </a:bodyPr>
-          <a:lstStyle/>
-          <a:p>
-            <a:pPr algn="l"/>
-            <a:r>
-              <a:rPr sz="1100" b="0">
-                <a:solidFill>
-                  <a:srgbClr val="FFFFFF"/>
-                </a:solidFill>
-              </a:rPr>
-              <a:t/>
-            </a:r>
-          </a:p>
-        </p:txBody>
-      </p:sp>
-      <p:sp>
-        <p:nvSpPr>
-          <p:cNvPr id="35" name="TextBox 34"/>
-          <p:cNvSpPr txBox="1"/>
-          <p:nvPr/>
-        </p:nvSpPr>
-        <p:spPr>
-          <a:xfrm>
-            <a:off x="6172200" y="5376672"/>
-            <a:ext cx="5577840" cy="301752"/>
-          </a:xfrm>
-          <a:prstGeom prst="rect">
-            <a:avLst/>
-          </a:prstGeom>
-          <a:noFill/>
-        </p:spPr>
-        <p:txBody>
-          <a:bodyPr wrap="square">
-            <a:spAutoFit/>
-          </a:bodyPr>
-          <a:lstStyle/>
-          <a:p>
-            <a:pPr algn="l"/>
-            <a:r>
-              <a:rPr sz="1100" b="0">
-                <a:solidFill>
-                  <a:srgbClr val="00B0EA"/>
-                </a:solidFill>
-              </a:rPr>
-              <a:t># VKS cluster (Cluster CR)</a:t>
-            </a:r>
-          </a:p>
-        </p:txBody>
-      </p:sp>
-      <p:sp>
-        <p:nvSpPr>
-          <p:cNvPr id="36" name="TextBox 35"/>
-          <p:cNvSpPr txBox="1"/>
-          <p:nvPr/>
-        </p:nvSpPr>
-        <p:spPr>
-          <a:xfrm>
-            <a:off x="6172200" y="5669280"/>
-            <a:ext cx="5577840" cy="301752"/>
-          </a:xfrm>
-          <a:prstGeom prst="rect">
-            <a:avLst/>
-          </a:prstGeom>
-          <a:noFill/>
-        </p:spPr>
-        <p:txBody>
-          <a:bodyPr wrap="square">
-            <a:spAutoFit/>
-          </a:bodyPr>
-          <a:lstStyle/>
-          <a:p>
-            <a:pPr algn="l"/>
-            <a:r>
-              <a:rPr sz="1100" b="0">
-                <a:solidFill>
-                  <a:srgbClr val="FFFFFF"/>
-                </a:solidFill>
-              </a:rPr>
-              <a:t>kubectl apply -f common/vks-cluster.yaml</a:t>
+              <a:t>vks-auto-01  •  Available = True  •  v1.34.2+vmware.2  •  CP 192.168.114.135</a:t>
             </a:r>
           </a:p>
         </p:txBody>
@@ -7267,6 +6073,49 @@
             <a:avLst/>
           </a:prstGeom>
           <a:solidFill>
+            <a:srgbClr val="F5F7FA"/>
+          </a:solidFill>
+          <a:ln>
+            <a:noFill/>
+          </a:ln>
+        </p:spPr>
+        <p:style>
+          <a:lnRef idx="1">
+            <a:schemeClr val="accent1"/>
+          </a:lnRef>
+          <a:fillRef idx="3">
+            <a:schemeClr val="accent1"/>
+          </a:fillRef>
+          <a:effectRef idx="2">
+            <a:schemeClr val="accent1"/>
+          </a:effectRef>
+          <a:fontRef idx="minor">
+            <a:schemeClr val="lt1"/>
+          </a:fontRef>
+        </p:style>
+        <p:txBody>
+          <a:bodyPr rtlCol="0" anchor="ctr"/>
+          <a:lstStyle/>
+          <a:p>
+            <a:pPr algn="ctr"/>
+          </a:p>
+        </p:txBody>
+      </p:sp>
+      <p:sp>
+        <p:nvSpPr>
+          <p:cNvPr id="3" name="Rectangle 2"/>
+          <p:cNvSpPr/>
+          <p:nvPr/>
+        </p:nvSpPr>
+        <p:spPr>
+          <a:xfrm>
+            <a:off x="0" y="0"/>
+            <a:ext cx="12188952" cy="914400"/>
+          </a:xfrm>
+          <a:prstGeom prst="rect">
+            <a:avLst/>
+          </a:prstGeom>
+          <a:solidFill>
             <a:srgbClr val="1A1A2E"/>
           </a:solidFill>
           <a:ln>
@@ -7297,14 +6146,14 @@
       </p:sp>
       <p:sp>
         <p:nvSpPr>
-          <p:cNvPr id="3" name="Rectangle 2"/>
+          <p:cNvPr id="4" name="Rectangle 3"/>
           <p:cNvSpPr/>
           <p:nvPr/>
         </p:nvSpPr>
         <p:spPr>
           <a:xfrm>
             <a:off x="0" y="0"/>
-            <a:ext cx="109728" cy="6858000"/>
+            <a:ext cx="109728" cy="914400"/>
           </a:xfrm>
           <a:prstGeom prst="rect">
             <a:avLst/>
@@ -7340,35 +6189,240 @@
       </p:sp>
       <p:sp>
         <p:nvSpPr>
-          <p:cNvPr id="4" name="TextBox 3"/>
-          <p:cNvSpPr txBox="1"/>
-          <p:nvPr/>
-        </p:nvSpPr>
-        <p:spPr>
-          <a:xfrm>
-            <a:off x="274320" y="2286000"/>
-            <a:ext cx="11612880" cy="1645920"/>
-          </a:xfrm>
-          <a:prstGeom prst="rect">
-            <a:avLst/>
-          </a:prstGeom>
-          <a:noFill/>
-        </p:spPr>
-        <p:txBody>
-          <a:bodyPr wrap="square">
-            <a:spAutoFit/>
-          </a:bodyPr>
-          <a:lstStyle/>
-          <a:p>
-            <a:pPr algn="l"/>
-            <a:r>
-              <a:rPr sz="4000" b="1">
+          <p:cNvPr id="5" name="TextBox 4"/>
+          <p:cNvSpPr txBox="1"/>
+          <p:nvPr/>
+        </p:nvSpPr>
+        <p:spPr>
+          <a:xfrm>
+            <a:off x="228600" y="109728"/>
+            <a:ext cx="11612880" cy="694944"/>
+          </a:xfrm>
+          <a:prstGeom prst="rect">
+            <a:avLst/>
+          </a:prstGeom>
+          <a:noFill/>
+        </p:spPr>
+        <p:txBody>
+          <a:bodyPr wrap="square">
+            <a:spAutoFit/>
+          </a:bodyPr>
+          <a:lstStyle/>
+          <a:p>
+            <a:pPr algn="l"/>
+            <a:r>
+              <a:rPr sz="2600" b="1">
                 <a:solidFill>
                   <a:srgbClr val="FFFFFF"/>
                 </a:solidFill>
               </a:rPr>
-              <a:t>完成</a:t>
-            </a:r>
+              <a:t>CP + Worker VM 狀態</a:t>
+            </a:r>
+          </a:p>
+        </p:txBody>
+      </p:sp>
+      <p:pic>
+        <p:nvPicPr>
+          <p:cNvPr id="6" name="Picture 5" descr="36-vks-cluster-vms.jpg"/>
+          <p:cNvPicPr>
+            <a:picLocks noChangeAspect="1"/>
+          </p:cNvPicPr>
+          <p:nvPr/>
+        </p:nvPicPr>
+        <p:blipFill>
+          <a:blip r:embed="rId2"/>
+          <a:stretch>
+            <a:fillRect/>
+          </a:stretch>
+        </p:blipFill>
+        <p:spPr>
+          <a:xfrm>
+            <a:off x="274320" y="1005840"/>
+            <a:ext cx="11612880" cy="5029200"/>
+          </a:xfrm>
+          <a:prstGeom prst="rect">
+            <a:avLst/>
+          </a:prstGeom>
+        </p:spPr>
+      </p:pic>
+      <p:sp>
+        <p:nvSpPr>
+          <p:cNvPr id="7" name="TextBox 6"/>
+          <p:cNvSpPr txBox="1"/>
+          <p:nvPr/>
+        </p:nvSpPr>
+        <p:spPr>
+          <a:xfrm>
+            <a:off x="274320" y="6172200"/>
+            <a:ext cx="11612880" cy="457200"/>
+          </a:xfrm>
+          <a:prstGeom prst="rect">
+            <a:avLst/>
+          </a:prstGeom>
+          <a:noFill/>
+        </p:spPr>
+        <p:txBody>
+          <a:bodyPr wrap="square">
+            <a:spAutoFit/>
+          </a:bodyPr>
+          <a:lstStyle/>
+          <a:p>
+            <a:pPr algn="ctr"/>
+            <a:r>
+              <a:rPr sz="1400" b="0">
+                <a:solidFill>
+                  <a:srgbClr val="1A1A2E"/>
+                </a:solidFill>
+              </a:rPr>
+              <a:t>CP: vks-auto-01-7f6ms-fmgz9  •  Worker: vks-auto-01-node-pool-1-5cjwv-...</a:t>
+            </a:r>
+          </a:p>
+        </p:txBody>
+      </p:sp>
+    </p:spTree>
+  </p:cSld>
+  <p:clrMapOvr>
+    <a:masterClrMapping/>
+  </p:clrMapOvr>
+</p:sld>
+</file>
+
+<file path=ppt/slides/slide17.xml><?xml version="1.0" encoding="utf-8"?>
+<p:sld xmlns:a="http://schemas.openxmlformats.org/drawingml/2006/main" xmlns:p="http://schemas.openxmlformats.org/presentationml/2006/main" xmlns:r="http://schemas.openxmlformats.org/officeDocument/2006/relationships">
+  <p:cSld>
+    <p:spTree>
+      <p:nvGrpSpPr>
+        <p:cNvPr id="1" name=""/>
+        <p:cNvGrpSpPr/>
+        <p:nvPr/>
+      </p:nvGrpSpPr>
+      <p:grpSpPr/>
+      <p:sp>
+        <p:nvSpPr>
+          <p:cNvPr id="2" name="Rectangle 1"/>
+          <p:cNvSpPr/>
+          <p:nvPr/>
+        </p:nvSpPr>
+        <p:spPr>
+          <a:xfrm>
+            <a:off x="0" y="0"/>
+            <a:ext cx="12188952" cy="6858000"/>
+          </a:xfrm>
+          <a:prstGeom prst="rect">
+            <a:avLst/>
+          </a:prstGeom>
+          <a:solidFill>
+            <a:srgbClr val="F5F7FA"/>
+          </a:solidFill>
+          <a:ln>
+            <a:noFill/>
+          </a:ln>
+        </p:spPr>
+        <p:style>
+          <a:lnRef idx="1">
+            <a:schemeClr val="accent1"/>
+          </a:lnRef>
+          <a:fillRef idx="3">
+            <a:schemeClr val="accent1"/>
+          </a:fillRef>
+          <a:effectRef idx="2">
+            <a:schemeClr val="accent1"/>
+          </a:effectRef>
+          <a:fontRef idx="minor">
+            <a:schemeClr val="lt1"/>
+          </a:fontRef>
+        </p:style>
+        <p:txBody>
+          <a:bodyPr rtlCol="0" anchor="ctr"/>
+          <a:lstStyle/>
+          <a:p>
+            <a:pPr algn="ctr"/>
+          </a:p>
+        </p:txBody>
+      </p:sp>
+      <p:sp>
+        <p:nvSpPr>
+          <p:cNvPr id="3" name="Rectangle 2"/>
+          <p:cNvSpPr/>
+          <p:nvPr/>
+        </p:nvSpPr>
+        <p:spPr>
+          <a:xfrm>
+            <a:off x="0" y="0"/>
+            <a:ext cx="12188952" cy="914400"/>
+          </a:xfrm>
+          <a:prstGeom prst="rect">
+            <a:avLst/>
+          </a:prstGeom>
+          <a:solidFill>
+            <a:srgbClr val="1A1A2E"/>
+          </a:solidFill>
+          <a:ln>
+            <a:noFill/>
+          </a:ln>
+        </p:spPr>
+        <p:style>
+          <a:lnRef idx="1">
+            <a:schemeClr val="accent1"/>
+          </a:lnRef>
+          <a:fillRef idx="3">
+            <a:schemeClr val="accent1"/>
+          </a:fillRef>
+          <a:effectRef idx="2">
+            <a:schemeClr val="accent1"/>
+          </a:effectRef>
+          <a:fontRef idx="minor">
+            <a:schemeClr val="lt1"/>
+          </a:fontRef>
+        </p:style>
+        <p:txBody>
+          <a:bodyPr rtlCol="0" anchor="ctr"/>
+          <a:lstStyle/>
+          <a:p>
+            <a:pPr algn="ctr"/>
+          </a:p>
+        </p:txBody>
+      </p:sp>
+      <p:sp>
+        <p:nvSpPr>
+          <p:cNvPr id="4" name="Rectangle 3"/>
+          <p:cNvSpPr/>
+          <p:nvPr/>
+        </p:nvSpPr>
+        <p:spPr>
+          <a:xfrm>
+            <a:off x="0" y="0"/>
+            <a:ext cx="109728" cy="914400"/>
+          </a:xfrm>
+          <a:prstGeom prst="rect">
+            <a:avLst/>
+          </a:prstGeom>
+          <a:solidFill>
+            <a:srgbClr val="00B0EA"/>
+          </a:solidFill>
+          <a:ln>
+            <a:noFill/>
+          </a:ln>
+        </p:spPr>
+        <p:style>
+          <a:lnRef idx="1">
+            <a:schemeClr val="accent1"/>
+          </a:lnRef>
+          <a:fillRef idx="3">
+            <a:schemeClr val="accent1"/>
+          </a:fillRef>
+          <a:effectRef idx="2">
+            <a:schemeClr val="accent1"/>
+          </a:effectRef>
+          <a:fontRef idx="minor">
+            <a:schemeClr val="lt1"/>
+          </a:fontRef>
+        </p:style>
+        <p:txBody>
+          <a:bodyPr rtlCol="0" anchor="ctr"/>
+          <a:lstStyle/>
+          <a:p>
+            <a:pPr algn="ctr"/>
           </a:p>
         </p:txBody>
       </p:sp>
@@ -7380,63 +6434,781 @@
         </p:nvSpPr>
         <p:spPr>
           <a:xfrm>
-            <a:off x="274320" y="4023360"/>
-            <a:ext cx="11612880" cy="1097280"/>
-          </a:xfrm>
-          <a:prstGeom prst="rect">
-            <a:avLst/>
-          </a:prstGeom>
-          <a:noFill/>
-        </p:spPr>
-        <p:txBody>
-          <a:bodyPr wrap="square">
-            <a:spAutoFit/>
-          </a:bodyPr>
-          <a:lstStyle/>
-          <a:p>
-            <a:pPr algn="l"/>
-            <a:r>
-              <a:rPr sz="2200" b="0">
+            <a:off x="228600" y="109728"/>
+            <a:ext cx="11612880" cy="694944"/>
+          </a:xfrm>
+          <a:prstGeom prst="rect">
+            <a:avLst/>
+          </a:prstGeom>
+          <a:noFill/>
+        </p:spPr>
+        <p:txBody>
+          <a:bodyPr wrap="square">
+            <a:spAutoFit/>
+          </a:bodyPr>
+          <a:lstStyle/>
+          <a:p>
+            <a:pPr algn="l"/>
+            <a:r>
+              <a:rPr sz="2600" b="1">
+                <a:solidFill>
+                  <a:srgbClr val="FFFFFF"/>
+                </a:solidFill>
+              </a:rPr>
+              <a:t>踩坑必修正（否則建不起來）</a:t>
+            </a:r>
+          </a:p>
+        </p:txBody>
+      </p:sp>
+      <p:sp>
+        <p:nvSpPr>
+          <p:cNvPr id="6" name="Rectangle 5"/>
+          <p:cNvSpPr/>
+          <p:nvPr/>
+        </p:nvSpPr>
+        <p:spPr>
+          <a:xfrm>
+            <a:off x="274320" y="1097280"/>
+            <a:ext cx="5669280" cy="5029200"/>
+          </a:xfrm>
+          <a:prstGeom prst="rect">
+            <a:avLst/>
+          </a:prstGeom>
+          <a:solidFill>
+            <a:srgbClr val="1A1A2E"/>
+          </a:solidFill>
+          <a:ln>
+            <a:noFill/>
+          </a:ln>
+        </p:spPr>
+        <p:style>
+          <a:lnRef idx="1">
+            <a:schemeClr val="accent1"/>
+          </a:lnRef>
+          <a:fillRef idx="3">
+            <a:schemeClr val="accent1"/>
+          </a:fillRef>
+          <a:effectRef idx="2">
+            <a:schemeClr val="accent1"/>
+          </a:effectRef>
+          <a:fontRef idx="minor">
+            <a:schemeClr val="lt1"/>
+          </a:fontRef>
+        </p:style>
+        <p:txBody>
+          <a:bodyPr rtlCol="0" anchor="ctr"/>
+          <a:lstStyle/>
+          <a:p>
+            <a:pPr algn="ctr"/>
+          </a:p>
+        </p:txBody>
+      </p:sp>
+      <p:sp>
+        <p:nvSpPr>
+          <p:cNvPr id="7" name="Rectangle 6"/>
+          <p:cNvSpPr/>
+          <p:nvPr/>
+        </p:nvSpPr>
+        <p:spPr>
+          <a:xfrm>
+            <a:off x="6217920" y="1097280"/>
+            <a:ext cx="5669280" cy="5029200"/>
+          </a:xfrm>
+          <a:prstGeom prst="rect">
+            <a:avLst/>
+          </a:prstGeom>
+          <a:solidFill>
+            <a:srgbClr val="1A1A2E"/>
+          </a:solidFill>
+          <a:ln>
+            <a:noFill/>
+          </a:ln>
+        </p:spPr>
+        <p:style>
+          <a:lnRef idx="1">
+            <a:schemeClr val="accent1"/>
+          </a:lnRef>
+          <a:fillRef idx="3">
+            <a:schemeClr val="accent1"/>
+          </a:fillRef>
+          <a:effectRef idx="2">
+            <a:schemeClr val="accent1"/>
+          </a:effectRef>
+          <a:fontRef idx="minor">
+            <a:schemeClr val="lt1"/>
+          </a:fontRef>
+        </p:style>
+        <p:txBody>
+          <a:bodyPr rtlCol="0" anchor="ctr"/>
+          <a:lstStyle/>
+          <a:p>
+            <a:pPr algn="ctr"/>
+          </a:p>
+        </p:txBody>
+      </p:sp>
+      <p:sp>
+        <p:nvSpPr>
+          <p:cNvPr id="8" name="TextBox 7"/>
+          <p:cNvSpPr txBox="1"/>
+          <p:nvPr/>
+        </p:nvSpPr>
+        <p:spPr>
+          <a:xfrm>
+            <a:off x="411480" y="1280160"/>
+            <a:ext cx="5486400" cy="365760"/>
+          </a:xfrm>
+          <a:prstGeom prst="rect">
+            <a:avLst/>
+          </a:prstGeom>
+          <a:noFill/>
+        </p:spPr>
+        <p:txBody>
+          <a:bodyPr wrap="square">
+            <a:spAutoFit/>
+          </a:bodyPr>
+          <a:lstStyle/>
+          <a:p>
+            <a:pPr algn="l"/>
+            <a:r>
+              <a:rPr sz="1300" b="0">
+                <a:solidFill>
+                  <a:srgbClr val="FFFFFF"/>
+                </a:solidFill>
+              </a:rPr>
+              <a:t>Pod CIDR 不能用預設 192.168.0.0/16</a:t>
+            </a:r>
+          </a:p>
+        </p:txBody>
+      </p:sp>
+      <p:sp>
+        <p:nvSpPr>
+          <p:cNvPr id="9" name="TextBox 8"/>
+          <p:cNvSpPr txBox="1"/>
+          <p:nvPr/>
+        </p:nvSpPr>
+        <p:spPr>
+          <a:xfrm>
+            <a:off x="411480" y="1627632"/>
+            <a:ext cx="5486400" cy="365760"/>
+          </a:xfrm>
+          <a:prstGeom prst="rect">
+            <a:avLst/>
+          </a:prstGeom>
+          <a:noFill/>
+        </p:spPr>
+        <p:txBody>
+          <a:bodyPr wrap="square">
+            <a:spAutoFit/>
+          </a:bodyPr>
+          <a:lstStyle/>
+          <a:p>
+            <a:pPr algn="l"/>
+            <a:r>
+              <a:rPr sz="1300" b="0">
+                <a:solidFill>
+                  <a:srgbClr val="FFFFFF"/>
+                </a:solidFill>
+              </a:rPr>
+              <a:t>  → 與管理網段 192.168.114.0/24 重疊</a:t>
+            </a:r>
+          </a:p>
+        </p:txBody>
+      </p:sp>
+      <p:sp>
+        <p:nvSpPr>
+          <p:cNvPr id="10" name="TextBox 9"/>
+          <p:cNvSpPr txBox="1"/>
+          <p:nvPr/>
+        </p:nvSpPr>
+        <p:spPr>
+          <a:xfrm>
+            <a:off x="411480" y="1975104"/>
+            <a:ext cx="5486400" cy="365760"/>
+          </a:xfrm>
+          <a:prstGeom prst="rect">
+            <a:avLst/>
+          </a:prstGeom>
+          <a:noFill/>
+        </p:spPr>
+        <p:txBody>
+          <a:bodyPr wrap="square">
+            <a:spAutoFit/>
+          </a:bodyPr>
+          <a:lstStyle/>
+          <a:p>
+            <a:pPr algn="l"/>
+            <a:r>
+              <a:rPr sz="1300" b="0">
+                <a:solidFill>
+                  <a:srgbClr val="FFFFFF"/>
+                </a:solidFill>
+              </a:rPr>
+              <a:t>  → kubeadm init 後 Antrea overlay route</a:t>
+            </a:r>
+          </a:p>
+        </p:txBody>
+      </p:sp>
+      <p:sp>
+        <p:nvSpPr>
+          <p:cNvPr id="11" name="TextBox 10"/>
+          <p:cNvSpPr txBox="1"/>
+          <p:nvPr/>
+        </p:nvSpPr>
+        <p:spPr>
+          <a:xfrm>
+            <a:off x="411480" y="2322576"/>
+            <a:ext cx="5486400" cy="365760"/>
+          </a:xfrm>
+          <a:prstGeom prst="rect">
+            <a:avLst/>
+          </a:prstGeom>
+          <a:noFill/>
+        </p:spPr>
+        <p:txBody>
+          <a:bodyPr wrap="square">
+            <a:spAutoFit/>
+          </a:bodyPr>
+          <a:lstStyle/>
+          <a:p>
+            <a:pPr algn="l"/>
+            <a:r>
+              <a:rPr sz="1300" b="0">
+                <a:solidFill>
+                  <a:srgbClr val="FFFFFF"/>
+                </a:solidFill>
+              </a:rPr>
+              <a:t>    劫持 DNS / Registry 流量 → CP never Ready</a:t>
+            </a:r>
+          </a:p>
+        </p:txBody>
+      </p:sp>
+      <p:sp>
+        <p:nvSpPr>
+          <p:cNvPr id="12" name="TextBox 11"/>
+          <p:cNvSpPr txBox="1"/>
+          <p:nvPr/>
+        </p:nvSpPr>
+        <p:spPr>
+          <a:xfrm>
+            <a:off x="411480" y="2670048"/>
+            <a:ext cx="5486400" cy="365760"/>
+          </a:xfrm>
+          <a:prstGeom prst="rect">
+            <a:avLst/>
+          </a:prstGeom>
+          <a:noFill/>
+        </p:spPr>
+        <p:txBody>
+          <a:bodyPr wrap="square">
+            <a:spAutoFit/>
+          </a:bodyPr>
+          <a:lstStyle/>
+          <a:p>
+            <a:pPr algn="l"/>
+            <a:r>
+              <a:rPr sz="1300" b="0">
+                <a:solidFill>
+                  <a:srgbClr val="FFFFFF"/>
+                </a:solidFill>
+              </a:rPr>
+              <a:t>  ✅ 改用 100.96.0.0/11</a:t>
+            </a:r>
+          </a:p>
+        </p:txBody>
+      </p:sp>
+      <p:sp>
+        <p:nvSpPr>
+          <p:cNvPr id="13" name="TextBox 12"/>
+          <p:cNvSpPr txBox="1"/>
+          <p:nvPr/>
+        </p:nvSpPr>
+        <p:spPr>
+          <a:xfrm>
+            <a:off x="6355080" y="1280160"/>
+            <a:ext cx="5486400" cy="365760"/>
+          </a:xfrm>
+          <a:prstGeom prst="rect">
+            <a:avLst/>
+          </a:prstGeom>
+          <a:noFill/>
+        </p:spPr>
+        <p:txBody>
+          <a:bodyPr wrap="square">
+            <a:spAutoFit/>
+          </a:bodyPr>
+          <a:lstStyle/>
+          <a:p>
+            <a:pPr algn="l"/>
+            <a:r>
+              <a:rPr sz="1300" b="0">
+                <a:solidFill>
+                  <a:srgbClr val="FFFFFF"/>
+                </a:solidFill>
+              </a:rPr>
+              <a:t>MachineHealthCheck timeout 太短</a:t>
+            </a:r>
+          </a:p>
+        </p:txBody>
+      </p:sp>
+      <p:sp>
+        <p:nvSpPr>
+          <p:cNvPr id="14" name="TextBox 13"/>
+          <p:cNvSpPr txBox="1"/>
+          <p:nvPr/>
+        </p:nvSpPr>
+        <p:spPr>
+          <a:xfrm>
+            <a:off x="6355080" y="1627632"/>
+            <a:ext cx="5486400" cy="365760"/>
+          </a:xfrm>
+          <a:prstGeom prst="rect">
+            <a:avLst/>
+          </a:prstGeom>
+          <a:noFill/>
+        </p:spPr>
+        <p:txBody>
+          <a:bodyPr wrap="square">
+            <a:spAutoFit/>
+          </a:bodyPr>
+          <a:lstStyle/>
+          <a:p>
+            <a:pPr algn="l"/>
+            <a:r>
+              <a:rPr sz="1300" b="0">
+                <a:solidFill>
+                  <a:srgbClr val="FFFFFF"/>
+                </a:solidFill>
+              </a:rPr>
+              <a:t>  → 預設 nodeStartupTimeout = 3600s</a:t>
+            </a:r>
+          </a:p>
+        </p:txBody>
+      </p:sp>
+      <p:sp>
+        <p:nvSpPr>
+          <p:cNvPr id="15" name="TextBox 14"/>
+          <p:cNvSpPr txBox="1"/>
+          <p:nvPr/>
+        </p:nvSpPr>
+        <p:spPr>
+          <a:xfrm>
+            <a:off x="6355080" y="1975104"/>
+            <a:ext cx="5486400" cy="365760"/>
+          </a:xfrm>
+          <a:prstGeom prst="rect">
+            <a:avLst/>
+          </a:prstGeom>
+          <a:noFill/>
+        </p:spPr>
+        <p:txBody>
+          <a:bodyPr wrap="square">
+            <a:spAutoFit/>
+          </a:bodyPr>
+          <a:lstStyle/>
+          <a:p>
+            <a:pPr algn="l"/>
+            <a:r>
+              <a:rPr sz="1300" b="0">
+                <a:solidFill>
+                  <a:srgbClr val="FFFFFF"/>
+                </a:solidFill>
+              </a:rPr>
+              <a:t>  → nested-on-nested 啟動 &gt;60min</a:t>
+            </a:r>
+          </a:p>
+        </p:txBody>
+      </p:sp>
+      <p:sp>
+        <p:nvSpPr>
+          <p:cNvPr id="16" name="TextBox 15"/>
+          <p:cNvSpPr txBox="1"/>
+          <p:nvPr/>
+        </p:nvSpPr>
+        <p:spPr>
+          <a:xfrm>
+            <a:off x="6355080" y="2322576"/>
+            <a:ext cx="5486400" cy="365760"/>
+          </a:xfrm>
+          <a:prstGeom prst="rect">
+            <a:avLst/>
+          </a:prstGeom>
+          <a:noFill/>
+        </p:spPr>
+        <p:txBody>
+          <a:bodyPr wrap="square">
+            <a:spAutoFit/>
+          </a:bodyPr>
+          <a:lstStyle/>
+          <a:p>
+            <a:pPr algn="l"/>
+            <a:r>
+              <a:rPr sz="1300" b="0">
+                <a:solidFill>
+                  <a:srgbClr val="FFFFFF"/>
+                </a:solidFill>
+              </a:rPr>
+              <a:t>  → MHC 提早 remediate → 砍 CP → 死循環</a:t>
+            </a:r>
+          </a:p>
+        </p:txBody>
+      </p:sp>
+      <p:sp>
+        <p:nvSpPr>
+          <p:cNvPr id="17" name="TextBox 16"/>
+          <p:cNvSpPr txBox="1"/>
+          <p:nvPr/>
+        </p:nvSpPr>
+        <p:spPr>
+          <a:xfrm>
+            <a:off x="6355080" y="2670048"/>
+            <a:ext cx="5486400" cy="365760"/>
+          </a:xfrm>
+          <a:prstGeom prst="rect">
+            <a:avLst/>
+          </a:prstGeom>
+          <a:noFill/>
+        </p:spPr>
+        <p:txBody>
+          <a:bodyPr wrap="square">
+            <a:spAutoFit/>
+          </a:bodyPr>
+          <a:lstStyle/>
+          <a:p>
+            <a:pPr algn="l"/>
+            <a:r>
+              <a:rPr sz="1300" b="0">
+                <a:solidFill>
+                  <a:srgbClr val="FFFFFF"/>
+                </a:solidFill>
+              </a:rPr>
+              <a:t>  ✅ topology.controlPlane.healthCheck</a:t>
+            </a:r>
+          </a:p>
+        </p:txBody>
+      </p:sp>
+      <p:sp>
+        <p:nvSpPr>
+          <p:cNvPr id="18" name="TextBox 17"/>
+          <p:cNvSpPr txBox="1"/>
+          <p:nvPr/>
+        </p:nvSpPr>
+        <p:spPr>
+          <a:xfrm>
+            <a:off x="6355080" y="3017520"/>
+            <a:ext cx="5486400" cy="365760"/>
+          </a:xfrm>
+          <a:prstGeom prst="rect">
+            <a:avLst/>
+          </a:prstGeom>
+          <a:noFill/>
+        </p:spPr>
+        <p:txBody>
+          <a:bodyPr wrap="square">
+            <a:spAutoFit/>
+          </a:bodyPr>
+          <a:lstStyle/>
+          <a:p>
+            <a:pPr algn="l"/>
+            <a:r>
+              <a:rPr sz="1300" b="0">
+                <a:solidFill>
+                  <a:srgbClr val="FFFFFF"/>
+                </a:solidFill>
+              </a:rPr>
+              <a:t>     .checks.nodeStartupTimeoutSeconds: 14400</a:t>
+            </a:r>
+          </a:p>
+        </p:txBody>
+      </p:sp>
+      <p:sp>
+        <p:nvSpPr>
+          <p:cNvPr id="19" name="TextBox 18"/>
+          <p:cNvSpPr txBox="1"/>
+          <p:nvPr/>
+        </p:nvSpPr>
+        <p:spPr>
+          <a:xfrm>
+            <a:off x="274320" y="1051560"/>
+            <a:ext cx="2743200" cy="320040"/>
+          </a:xfrm>
+          <a:prstGeom prst="rect">
+            <a:avLst/>
+          </a:prstGeom>
+          <a:noFill/>
+        </p:spPr>
+        <p:txBody>
+          <a:bodyPr wrap="square">
+            <a:spAutoFit/>
+          </a:bodyPr>
+          <a:lstStyle/>
+          <a:p>
+            <a:pPr algn="l"/>
+            <a:r>
+              <a:rPr sz="1400" b="1">
                 <a:solidFill>
                   <a:srgbClr val="00B0EA"/>
                 </a:solidFill>
               </a:rPr>
-              <a:t>VKS on VCF 9.1 — 端到端自動化</a:t>
-            </a:r>
-          </a:p>
-        </p:txBody>
-      </p:sp>
-      <p:sp>
-        <p:nvSpPr>
-          <p:cNvPr id="6" name="TextBox 5"/>
-          <p:cNvSpPr txBox="1"/>
-          <p:nvPr/>
-        </p:nvSpPr>
-        <p:spPr>
-          <a:xfrm>
-            <a:off x="274320" y="4114800"/>
-            <a:ext cx="11612880" cy="411480"/>
-          </a:xfrm>
-          <a:prstGeom prst="rect">
-            <a:avLst/>
-          </a:prstGeom>
-          <a:noFill/>
-        </p:spPr>
-        <p:txBody>
-          <a:bodyPr wrap="square">
-            <a:spAutoFit/>
-          </a:bodyPr>
-          <a:lstStyle/>
-          <a:p>
-            <a:pPr algn="l"/>
-            <a:r>
-              <a:rPr sz="1600" b="0">
+              <a:t>① Pod CIDR 衝突</a:t>
+            </a:r>
+          </a:p>
+        </p:txBody>
+      </p:sp>
+      <p:sp>
+        <p:nvSpPr>
+          <p:cNvPr id="20" name="TextBox 19"/>
+          <p:cNvSpPr txBox="1"/>
+          <p:nvPr/>
+        </p:nvSpPr>
+        <p:spPr>
+          <a:xfrm>
+            <a:off x="6217920" y="1051560"/>
+            <a:ext cx="4572000" cy="320040"/>
+          </a:xfrm>
+          <a:prstGeom prst="rect">
+            <a:avLst/>
+          </a:prstGeom>
+          <a:noFill/>
+        </p:spPr>
+        <p:txBody>
+          <a:bodyPr wrap="square">
+            <a:spAutoFit/>
+          </a:bodyPr>
+          <a:lstStyle/>
+          <a:p>
+            <a:pPr algn="l"/>
+            <a:r>
+              <a:rPr sz="1400" b="1">
                 <a:solidFill>
                   <a:srgbClr val="00B0EA"/>
                 </a:solidFill>
               </a:rPr>
-              <a:t>→  GitHub Repo：github.com/kostenyang/vcf9.1vks</a:t>
-            </a:r>
+              <a:t>② MachineHealthCheck Timeout</a:t>
+            </a:r>
+          </a:p>
+        </p:txBody>
+      </p:sp>
+    </p:spTree>
+  </p:cSld>
+  <p:clrMapOvr>
+    <a:masterClrMapping/>
+  </p:clrMapOvr>
+</p:sld>
+</file>
+
+<file path=ppt/slides/slide18.xml><?xml version="1.0" encoding="utf-8"?>
+<p:sld xmlns:a="http://schemas.openxmlformats.org/drawingml/2006/main" xmlns:p="http://schemas.openxmlformats.org/presentationml/2006/main" xmlns:r="http://schemas.openxmlformats.org/officeDocument/2006/relationships">
+  <p:cSld>
+    <p:spTree>
+      <p:nvGrpSpPr>
+        <p:cNvPr id="1" name=""/>
+        <p:cNvGrpSpPr/>
+        <p:nvPr/>
+      </p:nvGrpSpPr>
+      <p:grpSpPr/>
+      <p:sp>
+        <p:nvSpPr>
+          <p:cNvPr id="2" name="Rectangle 1"/>
+          <p:cNvSpPr/>
+          <p:nvPr/>
+        </p:nvSpPr>
+        <p:spPr>
+          <a:xfrm>
+            <a:off x="0" y="0"/>
+            <a:ext cx="12188952" cy="6858000"/>
+          </a:xfrm>
+          <a:prstGeom prst="rect">
+            <a:avLst/>
+          </a:prstGeom>
+          <a:solidFill>
+            <a:srgbClr val="F5F7FA"/>
+          </a:solidFill>
+          <a:ln>
+            <a:noFill/>
+          </a:ln>
+        </p:spPr>
+        <p:style>
+          <a:lnRef idx="1">
+            <a:schemeClr val="accent1"/>
+          </a:lnRef>
+          <a:fillRef idx="3">
+            <a:schemeClr val="accent1"/>
+          </a:fillRef>
+          <a:effectRef idx="2">
+            <a:schemeClr val="accent1"/>
+          </a:effectRef>
+          <a:fontRef idx="minor">
+            <a:schemeClr val="lt1"/>
+          </a:fontRef>
+        </p:style>
+        <p:txBody>
+          <a:bodyPr rtlCol="0" anchor="ctr"/>
+          <a:lstStyle/>
+          <a:p>
+            <a:pPr algn="ctr"/>
+          </a:p>
+        </p:txBody>
+      </p:sp>
+      <p:sp>
+        <p:nvSpPr>
+          <p:cNvPr id="3" name="Rectangle 2"/>
+          <p:cNvSpPr/>
+          <p:nvPr/>
+        </p:nvSpPr>
+        <p:spPr>
+          <a:xfrm>
+            <a:off x="0" y="0"/>
+            <a:ext cx="12188952" cy="914400"/>
+          </a:xfrm>
+          <a:prstGeom prst="rect">
+            <a:avLst/>
+          </a:prstGeom>
+          <a:solidFill>
+            <a:srgbClr val="1A1A2E"/>
+          </a:solidFill>
+          <a:ln>
+            <a:noFill/>
+          </a:ln>
+        </p:spPr>
+        <p:style>
+          <a:lnRef idx="1">
+            <a:schemeClr val="accent1"/>
+          </a:lnRef>
+          <a:fillRef idx="3">
+            <a:schemeClr val="accent1"/>
+          </a:fillRef>
+          <a:effectRef idx="2">
+            <a:schemeClr val="accent1"/>
+          </a:effectRef>
+          <a:fontRef idx="minor">
+            <a:schemeClr val="lt1"/>
+          </a:fontRef>
+        </p:style>
+        <p:txBody>
+          <a:bodyPr rtlCol="0" anchor="ctr"/>
+          <a:lstStyle/>
+          <a:p>
+            <a:pPr algn="ctr"/>
+          </a:p>
+        </p:txBody>
+      </p:sp>
+      <p:sp>
+        <p:nvSpPr>
+          <p:cNvPr id="4" name="Rectangle 3"/>
+          <p:cNvSpPr/>
+          <p:nvPr/>
+        </p:nvSpPr>
+        <p:spPr>
+          <a:xfrm>
+            <a:off x="0" y="0"/>
+            <a:ext cx="109728" cy="914400"/>
+          </a:xfrm>
+          <a:prstGeom prst="rect">
+            <a:avLst/>
+          </a:prstGeom>
+          <a:solidFill>
+            <a:srgbClr val="00B0EA"/>
+          </a:solidFill>
+          <a:ln>
+            <a:noFill/>
+          </a:ln>
+        </p:spPr>
+        <p:style>
+          <a:lnRef idx="1">
+            <a:schemeClr val="accent1"/>
+          </a:lnRef>
+          <a:fillRef idx="3">
+            <a:schemeClr val="accent1"/>
+          </a:fillRef>
+          <a:effectRef idx="2">
+            <a:schemeClr val="accent1"/>
+          </a:effectRef>
+          <a:fontRef idx="minor">
+            <a:schemeClr val="lt1"/>
+          </a:fontRef>
+        </p:style>
+        <p:txBody>
+          <a:bodyPr rtlCol="0" anchor="ctr"/>
+          <a:lstStyle/>
+          <a:p>
+            <a:pPr algn="ctr"/>
+          </a:p>
+        </p:txBody>
+      </p:sp>
+      <p:sp>
+        <p:nvSpPr>
+          <p:cNvPr id="5" name="TextBox 4"/>
+          <p:cNvSpPr txBox="1"/>
+          <p:nvPr/>
+        </p:nvSpPr>
+        <p:spPr>
+          <a:xfrm>
+            <a:off x="228600" y="109728"/>
+            <a:ext cx="11612880" cy="694944"/>
+          </a:xfrm>
+          <a:prstGeom prst="rect">
+            <a:avLst/>
+          </a:prstGeom>
+          <a:noFill/>
+        </p:spPr>
+        <p:txBody>
+          <a:bodyPr wrap="square">
+            <a:spAutoFit/>
+          </a:bodyPr>
+          <a:lstStyle/>
+          <a:p>
+            <a:pPr algn="l"/>
+            <a:r>
+              <a:rPr sz="2600" b="1">
+                <a:solidFill>
+                  <a:srgbClr val="FFFFFF"/>
+                </a:solidFill>
+              </a:rPr>
+              <a:t>NSX SNAT 驗證通過</a:t>
+            </a:r>
+          </a:p>
+        </p:txBody>
+      </p:sp>
+      <p:sp>
+        <p:nvSpPr>
+          <p:cNvPr id="6" name="Rectangle 5"/>
+          <p:cNvSpPr/>
+          <p:nvPr/>
+        </p:nvSpPr>
+        <p:spPr>
+          <a:xfrm>
+            <a:off x="274320" y="1097280"/>
+            <a:ext cx="11612880" cy="5029200"/>
+          </a:xfrm>
+          <a:prstGeom prst="rect">
+            <a:avLst/>
+          </a:prstGeom>
+          <a:solidFill>
+            <a:srgbClr val="1A1A2E"/>
+          </a:solidFill>
+          <a:ln>
+            <a:noFill/>
+          </a:ln>
+        </p:spPr>
+        <p:style>
+          <a:lnRef idx="1">
+            <a:schemeClr val="accent1"/>
+          </a:lnRef>
+          <a:fillRef idx="3">
+            <a:schemeClr val="accent1"/>
+          </a:fillRef>
+          <a:effectRef idx="2">
+            <a:schemeClr val="accent1"/>
+          </a:effectRef>
+          <a:fontRef idx="minor">
+            <a:schemeClr val="lt1"/>
+          </a:fontRef>
+        </p:style>
+        <p:txBody>
+          <a:bodyPr rtlCol="0" anchor="ctr"/>
+          <a:lstStyle/>
+          <a:p>
+            <a:pPr algn="ctr"/>
           </a:p>
         </p:txBody>
       </p:sp>
@@ -7448,28 +7220,626 @@
         </p:nvSpPr>
         <p:spPr>
           <a:xfrm>
-            <a:off x="274320" y="4507992"/>
-            <a:ext cx="11612880" cy="411480"/>
-          </a:xfrm>
-          <a:prstGeom prst="rect">
-            <a:avLst/>
-          </a:prstGeom>
-          <a:noFill/>
-        </p:spPr>
-        <p:txBody>
-          <a:bodyPr wrap="square">
-            <a:spAutoFit/>
-          </a:bodyPr>
-          <a:lstStyle/>
-          <a:p>
-            <a:pPr algn="l"/>
-            <a:r>
-              <a:rPr sz="1600" b="0">
+            <a:off x="457200" y="1280160"/>
+            <a:ext cx="11247120" cy="365760"/>
+          </a:xfrm>
+          <a:prstGeom prst="rect">
+            <a:avLst/>
+          </a:prstGeom>
+          <a:noFill/>
+        </p:spPr>
+        <p:txBody>
+          <a:bodyPr wrap="square">
+            <a:spAutoFit/>
+          </a:bodyPr>
+          <a:lstStyle/>
+          <a:p>
+            <a:pPr algn="l"/>
+            <a:r>
+              <a:rPr sz="1400" b="0">
+                <a:solidFill>
+                  <a:srgbClr val="FFFFFF"/>
+                </a:solidFill>
+              </a:rPr>
+              <a:t>實測：cluster 建立過程 NSX SNAT session 有效</a:t>
+            </a:r>
+          </a:p>
+        </p:txBody>
+      </p:sp>
+      <p:sp>
+        <p:nvSpPr>
+          <p:cNvPr id="8" name="TextBox 7"/>
+          <p:cNvSpPr txBox="1"/>
+          <p:nvPr/>
+        </p:nvSpPr>
+        <p:spPr>
+          <a:xfrm>
+            <a:off x="457200" y="1627632"/>
+            <a:ext cx="11247120" cy="365760"/>
+          </a:xfrm>
+          <a:prstGeom prst="rect">
+            <a:avLst/>
+          </a:prstGeom>
+          <a:noFill/>
+        </p:spPr>
+        <p:txBody>
+          <a:bodyPr wrap="square">
+            <a:spAutoFit/>
+          </a:bodyPr>
+          <a:lstStyle/>
+          <a:p>
+            <a:pPr algn="l"/>
+            <a:r>
+              <a:rPr sz="1400" b="0">
+                <a:solidFill>
+                  <a:srgbClr val="FFFFFF"/>
+                </a:solidFill>
+              </a:rPr>
+              <a:t>SNAT bytes out：99,960 packets / 144 MB（拉 container image）</a:t>
+            </a:r>
+          </a:p>
+        </p:txBody>
+      </p:sp>
+      <p:sp>
+        <p:nvSpPr>
+          <p:cNvPr id="9" name="TextBox 8"/>
+          <p:cNvSpPr txBox="1"/>
+          <p:nvPr/>
+        </p:nvSpPr>
+        <p:spPr>
+          <a:xfrm>
+            <a:off x="457200" y="1975104"/>
+            <a:ext cx="11247120" cy="365760"/>
+          </a:xfrm>
+          <a:prstGeom prst="rect">
+            <a:avLst/>
+          </a:prstGeom>
+          <a:noFill/>
+        </p:spPr>
+        <p:txBody>
+          <a:bodyPr wrap="square">
+            <a:spAutoFit/>
+          </a:bodyPr>
+          <a:lstStyle/>
+          <a:p>
+            <a:pPr algn="l"/>
+            <a:r>
+              <a:rPr sz="1400" b="0">
+                <a:solidFill>
+                  <a:srgbClr val="FFFFFF"/>
+                </a:solidFill>
+              </a:rPr>
+              <a:t>SNAT source：192.168.114.128/26 external block</a:t>
+            </a:r>
+          </a:p>
+        </p:txBody>
+      </p:sp>
+      <p:sp>
+        <p:nvSpPr>
+          <p:cNvPr id="10" name="TextBox 9"/>
+          <p:cNvSpPr txBox="1"/>
+          <p:nvPr/>
+        </p:nvSpPr>
+        <p:spPr>
+          <a:xfrm>
+            <a:off x="457200" y="2322576"/>
+            <a:ext cx="11247120" cy="365760"/>
+          </a:xfrm>
+          <a:prstGeom prst="rect">
+            <a:avLst/>
+          </a:prstGeom>
+          <a:noFill/>
+        </p:spPr>
+        <p:txBody>
+          <a:bodyPr wrap="square">
+            <a:spAutoFit/>
+          </a:bodyPr>
+          <a:lstStyle/>
+          <a:p>
+            <a:pPr algn="l"/>
+            <a:r>
+              <a:rPr sz="1400" b="0">
+                <a:solidFill>
+                  <a:srgbClr val="FFFFFF"/>
+                </a:solidFill>
+              </a:rPr>
+              <a:t>VNA cluster 負責 SNAT/LB（Path A DTGW 路線）</a:t>
+            </a:r>
+          </a:p>
+        </p:txBody>
+      </p:sp>
+      <p:sp>
+        <p:nvSpPr>
+          <p:cNvPr id="11" name="TextBox 10"/>
+          <p:cNvSpPr txBox="1"/>
+          <p:nvPr/>
+        </p:nvSpPr>
+        <p:spPr>
+          <a:xfrm>
+            <a:off x="457200" y="2670048"/>
+            <a:ext cx="11247120" cy="365760"/>
+          </a:xfrm>
+          <a:prstGeom prst="rect">
+            <a:avLst/>
+          </a:prstGeom>
+          <a:noFill/>
+        </p:spPr>
+        <p:txBody>
+          <a:bodyPr wrap="square">
+            <a:spAutoFit/>
+          </a:bodyPr>
+          <a:lstStyle/>
+          <a:p>
+            <a:pPr algn="l"/>
+            <a:r>
+              <a:rPr sz="1400" b="0">
+                <a:solidFill>
+                  <a:srgbClr val="FFFFFF"/>
+                </a:solidFill>
+              </a:rPr>
+              <a:t/>
+            </a:r>
+          </a:p>
+        </p:txBody>
+      </p:sp>
+      <p:sp>
+        <p:nvSpPr>
+          <p:cNvPr id="12" name="TextBox 11"/>
+          <p:cNvSpPr txBox="1"/>
+          <p:nvPr/>
+        </p:nvSpPr>
+        <p:spPr>
+          <a:xfrm>
+            <a:off x="457200" y="3017520"/>
+            <a:ext cx="11247120" cy="365760"/>
+          </a:xfrm>
+          <a:prstGeom prst="rect">
+            <a:avLst/>
+          </a:prstGeom>
+          <a:noFill/>
+        </p:spPr>
+        <p:txBody>
+          <a:bodyPr wrap="square">
+            <a:spAutoFit/>
+          </a:bodyPr>
+          <a:lstStyle/>
+          <a:p>
+            <a:pPr algn="l"/>
+            <a:r>
+              <a:rPr sz="1400" b="0">
                 <a:solidFill>
                   <a:srgbClr val="00B0EA"/>
                 </a:solidFill>
               </a:rPr>
-              <a:t>→  README.md  →  四種方法、IP 規劃、執行流程</a:t>
+              <a:t>kubectl get nodes 輸出：</a:t>
+            </a:r>
+          </a:p>
+        </p:txBody>
+      </p:sp>
+      <p:sp>
+        <p:nvSpPr>
+          <p:cNvPr id="13" name="TextBox 12"/>
+          <p:cNvSpPr txBox="1"/>
+          <p:nvPr/>
+        </p:nvSpPr>
+        <p:spPr>
+          <a:xfrm>
+            <a:off x="457200" y="3364992"/>
+            <a:ext cx="11247120" cy="365760"/>
+          </a:xfrm>
+          <a:prstGeom prst="rect">
+            <a:avLst/>
+          </a:prstGeom>
+          <a:noFill/>
+        </p:spPr>
+        <p:txBody>
+          <a:bodyPr wrap="square">
+            <a:spAutoFit/>
+          </a:bodyPr>
+          <a:lstStyle/>
+          <a:p>
+            <a:pPr algn="l"/>
+            <a:r>
+              <a:rPr sz="1400" b="0">
+                <a:solidFill>
+                  <a:srgbClr val="00B0EA"/>
+                </a:solidFill>
+              </a:rPr>
+              <a:t>  vks-auto-01-7f6ms-fmgz9       Ready   control-plane   v1.34.2+vmware.2</a:t>
+            </a:r>
+          </a:p>
+        </p:txBody>
+      </p:sp>
+      <p:sp>
+        <p:nvSpPr>
+          <p:cNvPr id="14" name="TextBox 13"/>
+          <p:cNvSpPr txBox="1"/>
+          <p:nvPr/>
+        </p:nvSpPr>
+        <p:spPr>
+          <a:xfrm>
+            <a:off x="457200" y="3712464"/>
+            <a:ext cx="11247120" cy="365760"/>
+          </a:xfrm>
+          <a:prstGeom prst="rect">
+            <a:avLst/>
+          </a:prstGeom>
+          <a:noFill/>
+        </p:spPr>
+        <p:txBody>
+          <a:bodyPr wrap="square">
+            <a:spAutoFit/>
+          </a:bodyPr>
+          <a:lstStyle/>
+          <a:p>
+            <a:pPr algn="l"/>
+            <a:r>
+              <a:rPr sz="1400" b="0">
+                <a:solidFill>
+                  <a:srgbClr val="00B0EA"/>
+                </a:solidFill>
+              </a:rPr>
+              <a:t>  vks-auto-01-node-pool-1-...   Ready   &lt;none&gt;          v1.34.2+vmware.2</a:t>
+            </a:r>
+          </a:p>
+        </p:txBody>
+      </p:sp>
+      <p:sp>
+        <p:nvSpPr>
+          <p:cNvPr id="15" name="TextBox 14"/>
+          <p:cNvSpPr txBox="1"/>
+          <p:nvPr/>
+        </p:nvSpPr>
+        <p:spPr>
+          <a:xfrm>
+            <a:off x="457200" y="4059936"/>
+            <a:ext cx="11247120" cy="365760"/>
+          </a:xfrm>
+          <a:prstGeom prst="rect">
+            <a:avLst/>
+          </a:prstGeom>
+          <a:noFill/>
+        </p:spPr>
+        <p:txBody>
+          <a:bodyPr wrap="square">
+            <a:spAutoFit/>
+          </a:bodyPr>
+          <a:lstStyle/>
+          <a:p>
+            <a:pPr algn="l"/>
+            <a:r>
+              <a:rPr sz="1400" b="0">
+                <a:solidFill>
+                  <a:srgbClr val="FFFFFF"/>
+                </a:solidFill>
+              </a:rPr>
+              <a:t/>
+            </a:r>
+          </a:p>
+        </p:txBody>
+      </p:sp>
+      <p:sp>
+        <p:nvSpPr>
+          <p:cNvPr id="16" name="TextBox 15"/>
+          <p:cNvSpPr txBox="1"/>
+          <p:nvPr/>
+        </p:nvSpPr>
+        <p:spPr>
+          <a:xfrm>
+            <a:off x="457200" y="4407408"/>
+            <a:ext cx="11247120" cy="365760"/>
+          </a:xfrm>
+          <a:prstGeom prst="rect">
+            <a:avLst/>
+          </a:prstGeom>
+          <a:noFill/>
+        </p:spPr>
+        <p:txBody>
+          <a:bodyPr wrap="square">
+            <a:spAutoFit/>
+          </a:bodyPr>
+          <a:lstStyle/>
+          <a:p>
+            <a:pPr algn="l"/>
+            <a:r>
+              <a:rPr sz="1400" b="0">
+                <a:solidFill>
+                  <a:srgbClr val="FFFFFF"/>
+                </a:solidFill>
+              </a:rPr>
+              <a:t>Container runtime：containerd 2.1.5-fips</a:t>
+            </a:r>
+          </a:p>
+        </p:txBody>
+      </p:sp>
+      <p:sp>
+        <p:nvSpPr>
+          <p:cNvPr id="17" name="TextBox 16"/>
+          <p:cNvSpPr txBox="1"/>
+          <p:nvPr/>
+        </p:nvSpPr>
+        <p:spPr>
+          <a:xfrm>
+            <a:off x="457200" y="4754880"/>
+            <a:ext cx="11247120" cy="365760"/>
+          </a:xfrm>
+          <a:prstGeom prst="rect">
+            <a:avLst/>
+          </a:prstGeom>
+          <a:noFill/>
+        </p:spPr>
+        <p:txBody>
+          <a:bodyPr wrap="square">
+            <a:spAutoFit/>
+          </a:bodyPr>
+          <a:lstStyle/>
+          <a:p>
+            <a:pPr algn="l"/>
+            <a:r>
+              <a:rPr sz="1400" b="0">
+                <a:solidFill>
+                  <a:srgbClr val="FFFFFF"/>
+                </a:solidFill>
+              </a:rPr>
+              <a:t>OS：Photon OS (Linux)</a:t>
+            </a:r>
+          </a:p>
+        </p:txBody>
+      </p:sp>
+    </p:spTree>
+  </p:cSld>
+  <p:clrMapOvr>
+    <a:masterClrMapping/>
+  </p:clrMapOvr>
+</p:sld>
+</file>
+
+<file path=ppt/slides/slide19.xml><?xml version="1.0" encoding="utf-8"?>
+<p:sld xmlns:a="http://schemas.openxmlformats.org/drawingml/2006/main" xmlns:p="http://schemas.openxmlformats.org/presentationml/2006/main" xmlns:r="http://schemas.openxmlformats.org/officeDocument/2006/relationships">
+  <p:cSld>
+    <p:spTree>
+      <p:nvGrpSpPr>
+        <p:cNvPr id="1" name=""/>
+        <p:cNvGrpSpPr/>
+        <p:nvPr/>
+      </p:nvGrpSpPr>
+      <p:grpSpPr/>
+      <p:sp>
+        <p:nvSpPr>
+          <p:cNvPr id="2" name="Rectangle 1"/>
+          <p:cNvSpPr/>
+          <p:nvPr/>
+        </p:nvSpPr>
+        <p:spPr>
+          <a:xfrm>
+            <a:off x="0" y="0"/>
+            <a:ext cx="12188952" cy="6858000"/>
+          </a:xfrm>
+          <a:prstGeom prst="rect">
+            <a:avLst/>
+          </a:prstGeom>
+          <a:solidFill>
+            <a:srgbClr val="F5F7FA"/>
+          </a:solidFill>
+          <a:ln>
+            <a:noFill/>
+          </a:ln>
+        </p:spPr>
+        <p:style>
+          <a:lnRef idx="1">
+            <a:schemeClr val="accent1"/>
+          </a:lnRef>
+          <a:fillRef idx="3">
+            <a:schemeClr val="accent1"/>
+          </a:fillRef>
+          <a:effectRef idx="2">
+            <a:schemeClr val="accent1"/>
+          </a:effectRef>
+          <a:fontRef idx="minor">
+            <a:schemeClr val="lt1"/>
+          </a:fontRef>
+        </p:style>
+        <p:txBody>
+          <a:bodyPr rtlCol="0" anchor="ctr"/>
+          <a:lstStyle/>
+          <a:p>
+            <a:pPr algn="ctr"/>
+          </a:p>
+        </p:txBody>
+      </p:sp>
+      <p:sp>
+        <p:nvSpPr>
+          <p:cNvPr id="3" name="Rectangle 2"/>
+          <p:cNvSpPr/>
+          <p:nvPr/>
+        </p:nvSpPr>
+        <p:spPr>
+          <a:xfrm>
+            <a:off x="0" y="0"/>
+            <a:ext cx="12188952" cy="914400"/>
+          </a:xfrm>
+          <a:prstGeom prst="rect">
+            <a:avLst/>
+          </a:prstGeom>
+          <a:solidFill>
+            <a:srgbClr val="1A1A2E"/>
+          </a:solidFill>
+          <a:ln>
+            <a:noFill/>
+          </a:ln>
+        </p:spPr>
+        <p:style>
+          <a:lnRef idx="1">
+            <a:schemeClr val="accent1"/>
+          </a:lnRef>
+          <a:fillRef idx="3">
+            <a:schemeClr val="accent1"/>
+          </a:fillRef>
+          <a:effectRef idx="2">
+            <a:schemeClr val="accent1"/>
+          </a:effectRef>
+          <a:fontRef idx="minor">
+            <a:schemeClr val="lt1"/>
+          </a:fontRef>
+        </p:style>
+        <p:txBody>
+          <a:bodyPr rtlCol="0" anchor="ctr"/>
+          <a:lstStyle/>
+          <a:p>
+            <a:pPr algn="ctr"/>
+          </a:p>
+        </p:txBody>
+      </p:sp>
+      <p:sp>
+        <p:nvSpPr>
+          <p:cNvPr id="4" name="Rectangle 3"/>
+          <p:cNvSpPr/>
+          <p:nvPr/>
+        </p:nvSpPr>
+        <p:spPr>
+          <a:xfrm>
+            <a:off x="0" y="0"/>
+            <a:ext cx="109728" cy="914400"/>
+          </a:xfrm>
+          <a:prstGeom prst="rect">
+            <a:avLst/>
+          </a:prstGeom>
+          <a:solidFill>
+            <a:srgbClr val="00B0EA"/>
+          </a:solidFill>
+          <a:ln>
+            <a:noFill/>
+          </a:ln>
+        </p:spPr>
+        <p:style>
+          <a:lnRef idx="1">
+            <a:schemeClr val="accent1"/>
+          </a:lnRef>
+          <a:fillRef idx="3">
+            <a:schemeClr val="accent1"/>
+          </a:fillRef>
+          <a:effectRef idx="2">
+            <a:schemeClr val="accent1"/>
+          </a:effectRef>
+          <a:fontRef idx="minor">
+            <a:schemeClr val="lt1"/>
+          </a:fontRef>
+        </p:style>
+        <p:txBody>
+          <a:bodyPr rtlCol="0" anchor="ctr"/>
+          <a:lstStyle/>
+          <a:p>
+            <a:pPr algn="ctr"/>
+          </a:p>
+        </p:txBody>
+      </p:sp>
+      <p:sp>
+        <p:nvSpPr>
+          <p:cNvPr id="5" name="TextBox 4"/>
+          <p:cNvSpPr txBox="1"/>
+          <p:nvPr/>
+        </p:nvSpPr>
+        <p:spPr>
+          <a:xfrm>
+            <a:off x="228600" y="109728"/>
+            <a:ext cx="11612880" cy="694944"/>
+          </a:xfrm>
+          <a:prstGeom prst="rect">
+            <a:avLst/>
+          </a:prstGeom>
+          <a:noFill/>
+        </p:spPr>
+        <p:txBody>
+          <a:bodyPr wrap="square">
+            <a:spAutoFit/>
+          </a:bodyPr>
+          <a:lstStyle/>
+          <a:p>
+            <a:pPr algn="l"/>
+            <a:r>
+              <a:rPr sz="2600" b="1">
+                <a:solidFill>
+                  <a:srgbClr val="FFFFFF"/>
+                </a:solidFill>
+              </a:rPr>
+              <a:t>Python 方法（開發用）</a:t>
+            </a:r>
+          </a:p>
+        </p:txBody>
+      </p:sp>
+      <p:sp>
+        <p:nvSpPr>
+          <p:cNvPr id="6" name="Rectangle 5"/>
+          <p:cNvSpPr/>
+          <p:nvPr/>
+        </p:nvSpPr>
+        <p:spPr>
+          <a:xfrm>
+            <a:off x="274320" y="1097280"/>
+            <a:ext cx="11612880" cy="5303520"/>
+          </a:xfrm>
+          <a:prstGeom prst="rect">
+            <a:avLst/>
+          </a:prstGeom>
+          <a:solidFill>
+            <a:srgbClr val="1A1A2E"/>
+          </a:solidFill>
+          <a:ln>
+            <a:noFill/>
+          </a:ln>
+        </p:spPr>
+        <p:style>
+          <a:lnRef idx="1">
+            <a:schemeClr val="accent1"/>
+          </a:lnRef>
+          <a:fillRef idx="3">
+            <a:schemeClr val="accent1"/>
+          </a:fillRef>
+          <a:effectRef idx="2">
+            <a:schemeClr val="accent1"/>
+          </a:effectRef>
+          <a:fontRef idx="minor">
+            <a:schemeClr val="lt1"/>
+          </a:fontRef>
+        </p:style>
+        <p:txBody>
+          <a:bodyPr rtlCol="0" anchor="ctr"/>
+          <a:lstStyle/>
+          <a:p>
+            <a:pPr algn="ctr"/>
+          </a:p>
+        </p:txBody>
+      </p:sp>
+      <p:sp>
+        <p:nvSpPr>
+          <p:cNvPr id="7" name="TextBox 6"/>
+          <p:cNvSpPr txBox="1"/>
+          <p:nvPr/>
+        </p:nvSpPr>
+        <p:spPr>
+          <a:xfrm>
+            <a:off x="457200" y="1234440"/>
+            <a:ext cx="11247120" cy="246888"/>
+          </a:xfrm>
+          <a:prstGeom prst="rect">
+            <a:avLst/>
+          </a:prstGeom>
+          <a:noFill/>
+        </p:spPr>
+        <p:txBody>
+          <a:bodyPr wrap="square">
+            <a:spAutoFit/>
+          </a:bodyPr>
+          <a:lstStyle/>
+          <a:p>
+            <a:pPr algn="l"/>
+            <a:r>
+              <a:rPr sz="1150" b="0">
+                <a:solidFill>
+                  <a:srgbClr val="00B0EA"/>
+                </a:solidFill>
+              </a:rPr>
+              <a:t># 安裝</a:t>
             </a:r>
           </a:p>
         </p:txBody>
@@ -7482,130 +7852,640 @@
         </p:nvSpPr>
         <p:spPr>
           <a:xfrm>
-            <a:off x="274320" y="4901184"/>
-            <a:ext cx="11612880" cy="411480"/>
-          </a:xfrm>
-          <a:prstGeom prst="rect">
-            <a:avLst/>
-          </a:prstGeom>
-          <a:noFill/>
-        </p:spPr>
-        <p:txBody>
-          <a:bodyPr wrap="square">
-            <a:spAutoFit/>
-          </a:bodyPr>
-          <a:lstStyle/>
-          <a:p>
-            <a:pPr algn="l"/>
-            <a:r>
-              <a:rPr sz="1600" b="0">
+            <a:off x="457200" y="1476756"/>
+            <a:ext cx="11247120" cy="246888"/>
+          </a:xfrm>
+          <a:prstGeom prst="rect">
+            <a:avLst/>
+          </a:prstGeom>
+          <a:noFill/>
+        </p:spPr>
+        <p:txBody>
+          <a:bodyPr wrap="square">
+            <a:spAutoFit/>
+          </a:bodyPr>
+          <a:lstStyle/>
+          <a:p>
+            <a:pPr algn="l"/>
+            <a:r>
+              <a:rPr sz="1150" b="0">
+                <a:solidFill>
+                  <a:srgbClr val="FFFFFF"/>
+                </a:solidFill>
+              </a:rPr>
+              <a:t>pip install -r requirements.txt   # requests, PyYAML, kubernetes</a:t>
+            </a:r>
+          </a:p>
+        </p:txBody>
+      </p:sp>
+      <p:sp>
+        <p:nvSpPr>
+          <p:cNvPr id="9" name="TextBox 8"/>
+          <p:cNvSpPr txBox="1"/>
+          <p:nvPr/>
+        </p:nvSpPr>
+        <p:spPr>
+          <a:xfrm>
+            <a:off x="457200" y="1719072"/>
+            <a:ext cx="11247120" cy="246888"/>
+          </a:xfrm>
+          <a:prstGeom prst="rect">
+            <a:avLst/>
+          </a:prstGeom>
+          <a:noFill/>
+        </p:spPr>
+        <p:txBody>
+          <a:bodyPr wrap="square">
+            <a:spAutoFit/>
+          </a:bodyPr>
+          <a:lstStyle/>
+          <a:p>
+            <a:pPr algn="l"/>
+            <a:r>
+              <a:rPr sz="1150" b="0">
+                <a:solidFill>
+                  <a:srgbClr val="FFFFFF"/>
+                </a:solidFill>
+              </a:rPr>
+              <a:t/>
+            </a:r>
+          </a:p>
+        </p:txBody>
+      </p:sp>
+      <p:sp>
+        <p:nvSpPr>
+          <p:cNvPr id="10" name="TextBox 9"/>
+          <p:cNvSpPr txBox="1"/>
+          <p:nvPr/>
+        </p:nvSpPr>
+        <p:spPr>
+          <a:xfrm>
+            <a:off x="457200" y="1961388"/>
+            <a:ext cx="11247120" cy="246888"/>
+          </a:xfrm>
+          <a:prstGeom prst="rect">
+            <a:avLst/>
+          </a:prstGeom>
+          <a:noFill/>
+        </p:spPr>
+        <p:txBody>
+          <a:bodyPr wrap="square">
+            <a:spAutoFit/>
+          </a:bodyPr>
+          <a:lstStyle/>
+          <a:p>
+            <a:pPr algn="l"/>
+            <a:r>
+              <a:rPr sz="1150" b="0">
                 <a:solidFill>
                   <a:srgbClr val="00B0EA"/>
                 </a:solidFill>
               </a:rPr>
-              <a:t>→  research/05-test-execution.md  →  踩坑與修正完整紀錄</a:t>
-            </a:r>
-          </a:p>
-        </p:txBody>
-      </p:sp>
-      <p:sp>
-        <p:nvSpPr>
-          <p:cNvPr id="9" name="TextBox 8"/>
-          <p:cNvSpPr txBox="1"/>
-          <p:nvPr/>
-        </p:nvSpPr>
-        <p:spPr>
-          <a:xfrm>
-            <a:off x="274320" y="5294376"/>
-            <a:ext cx="11612880" cy="411480"/>
-          </a:xfrm>
-          <a:prstGeom prst="rect">
-            <a:avLst/>
-          </a:prstGeom>
-          <a:noFill/>
-        </p:spPr>
-        <p:txBody>
-          <a:bodyPr wrap="square">
-            <a:spAutoFit/>
-          </a:bodyPr>
-          <a:lstStyle/>
-          <a:p>
-            <a:pPr algn="l"/>
-            <a:r>
-              <a:rPr sz="1600" b="0">
+              <a:t># 設定（或 export VC=... VCPASS=... NSXPASS=...）</a:t>
+            </a:r>
+          </a:p>
+        </p:txBody>
+      </p:sp>
+      <p:sp>
+        <p:nvSpPr>
+          <p:cNvPr id="11" name="TextBox 10"/>
+          <p:cNvSpPr txBox="1"/>
+          <p:nvPr/>
+        </p:nvSpPr>
+        <p:spPr>
+          <a:xfrm>
+            <a:off x="457200" y="2203704"/>
+            <a:ext cx="11247120" cy="246888"/>
+          </a:xfrm>
+          <a:prstGeom prst="rect">
+            <a:avLst/>
+          </a:prstGeom>
+          <a:noFill/>
+        </p:spPr>
+        <p:txBody>
+          <a:bodyPr wrap="square">
+            <a:spAutoFit/>
+          </a:bodyPr>
+          <a:lstStyle/>
+          <a:p>
+            <a:pPr algn="l"/>
+            <a:r>
+              <a:rPr sz="1150" b="0">
                 <a:solidFill>
                   <a:srgbClr val="00B0EA"/>
                 </a:solidFill>
               </a:rPr>
-              <a:t>→  python/  →  Step1~4 Python 腳本（requests + kubernetes client）</a:t>
-            </a:r>
-          </a:p>
-        </p:txBody>
-      </p:sp>
-      <p:sp>
-        <p:nvSpPr>
-          <p:cNvPr id="10" name="TextBox 9"/>
-          <p:cNvSpPr txBox="1"/>
-          <p:nvPr/>
-        </p:nvSpPr>
-        <p:spPr>
-          <a:xfrm>
-            <a:off x="274320" y="5687568"/>
-            <a:ext cx="11612880" cy="411480"/>
-          </a:xfrm>
-          <a:prstGeom prst="rect">
-            <a:avLst/>
-          </a:prstGeom>
-          <a:noFill/>
-        </p:spPr>
-        <p:txBody>
-          <a:bodyPr wrap="square">
-            <a:spAutoFit/>
-          </a:bodyPr>
-          <a:lstStyle/>
-          <a:p>
-            <a:pPr algn="l"/>
-            <a:r>
-              <a:rPr sz="1600" b="0">
+              <a:t># python/lab.py  — 共用連線設定</a:t>
+            </a:r>
+          </a:p>
+        </p:txBody>
+      </p:sp>
+      <p:sp>
+        <p:nvSpPr>
+          <p:cNvPr id="12" name="TextBox 11"/>
+          <p:cNvSpPr txBox="1"/>
+          <p:nvPr/>
+        </p:nvSpPr>
+        <p:spPr>
+          <a:xfrm>
+            <a:off x="457200" y="2446020"/>
+            <a:ext cx="11247120" cy="246888"/>
+          </a:xfrm>
+          <a:prstGeom prst="rect">
+            <a:avLst/>
+          </a:prstGeom>
+          <a:noFill/>
+        </p:spPr>
+        <p:txBody>
+          <a:bodyPr wrap="square">
+            <a:spAutoFit/>
+          </a:bodyPr>
+          <a:lstStyle/>
+          <a:p>
+            <a:pPr algn="l"/>
+            <a:r>
+              <a:rPr sz="1150" b="0">
+                <a:solidFill>
+                  <a:srgbClr val="FFFFFF"/>
+                </a:solidFill>
+              </a:rPr>
+              <a:t/>
+            </a:r>
+          </a:p>
+        </p:txBody>
+      </p:sp>
+      <p:sp>
+        <p:nvSpPr>
+          <p:cNvPr id="13" name="TextBox 12"/>
+          <p:cNvSpPr txBox="1"/>
+          <p:nvPr/>
+        </p:nvSpPr>
+        <p:spPr>
+          <a:xfrm>
+            <a:off x="457200" y="2688336"/>
+            <a:ext cx="11247120" cy="246888"/>
+          </a:xfrm>
+          <a:prstGeom prst="rect">
+            <a:avLst/>
+          </a:prstGeom>
+          <a:noFill/>
+        </p:spPr>
+        <p:txBody>
+          <a:bodyPr wrap="square">
+            <a:spAutoFit/>
+          </a:bodyPr>
+          <a:lstStyle/>
+          <a:p>
+            <a:pPr algn="l"/>
+            <a:r>
+              <a:rPr sz="1150" b="0">
                 <a:solidFill>
                   <a:srgbClr val="00B0EA"/>
                 </a:solidFill>
               </a:rPr>
-              <a:t>→  common/vks-cluster.yaml  →  ClusterClass CR（含 Pod CIDR + MHC 修正）</a:t>
-            </a:r>
-          </a:p>
-        </p:txBody>
-      </p:sp>
-      <p:sp>
-        <p:nvSpPr>
-          <p:cNvPr id="11" name="TextBox 10"/>
-          <p:cNvSpPr txBox="1"/>
-          <p:nvPr/>
-        </p:nvSpPr>
-        <p:spPr>
-          <a:xfrm>
-            <a:off x="274320" y="6080760"/>
-            <a:ext cx="11612880" cy="411480"/>
-          </a:xfrm>
-          <a:prstGeom prst="rect">
-            <a:avLst/>
-          </a:prstGeom>
-          <a:noFill/>
-        </p:spPr>
-        <p:txBody>
-          <a:bodyPr wrap="square">
-            <a:spAutoFit/>
-          </a:bodyPr>
-          <a:lstStyle/>
-          <a:p>
-            <a:pPr algn="l"/>
-            <a:r>
-              <a:rPr sz="1600" b="0">
+              <a:t># Step 1 — NSX IP blocks + VPC profile</a:t>
+            </a:r>
+          </a:p>
+        </p:txBody>
+      </p:sp>
+      <p:sp>
+        <p:nvSpPr>
+          <p:cNvPr id="14" name="TextBox 13"/>
+          <p:cNvSpPr txBox="1"/>
+          <p:nvPr/>
+        </p:nvSpPr>
+        <p:spPr>
+          <a:xfrm>
+            <a:off x="457200" y="2930652"/>
+            <a:ext cx="11247120" cy="246888"/>
+          </a:xfrm>
+          <a:prstGeom prst="rect">
+            <a:avLst/>
+          </a:prstGeom>
+          <a:noFill/>
+        </p:spPr>
+        <p:txBody>
+          <a:bodyPr wrap="square">
+            <a:spAutoFit/>
+          </a:bodyPr>
+          <a:lstStyle/>
+          <a:p>
+            <a:pPr algn="l"/>
+            <a:r>
+              <a:rPr sz="1150" b="0">
+                <a:solidFill>
+                  <a:srgbClr val="FFFFFF"/>
+                </a:solidFill>
+              </a:rPr>
+              <a:t>python step1_setup_dtgw.py --dry-run</a:t>
+            </a:r>
+          </a:p>
+        </p:txBody>
+      </p:sp>
+      <p:sp>
+        <p:nvSpPr>
+          <p:cNvPr id="15" name="TextBox 14"/>
+          <p:cNvSpPr txBox="1"/>
+          <p:nvPr/>
+        </p:nvSpPr>
+        <p:spPr>
+          <a:xfrm>
+            <a:off x="457200" y="3172968"/>
+            <a:ext cx="11247120" cy="246888"/>
+          </a:xfrm>
+          <a:prstGeom prst="rect">
+            <a:avLst/>
+          </a:prstGeom>
+          <a:noFill/>
+        </p:spPr>
+        <p:txBody>
+          <a:bodyPr wrap="square">
+            <a:spAutoFit/>
+          </a:bodyPr>
+          <a:lstStyle/>
+          <a:p>
+            <a:pPr algn="l"/>
+            <a:r>
+              <a:rPr sz="1150" b="0">
+                <a:solidFill>
+                  <a:srgbClr val="FFFFFF"/>
+                </a:solidFill>
+              </a:rPr>
+              <a:t>python step1_setup_dtgw.py</a:t>
+            </a:r>
+          </a:p>
+        </p:txBody>
+      </p:sp>
+      <p:sp>
+        <p:nvSpPr>
+          <p:cNvPr id="16" name="TextBox 15"/>
+          <p:cNvSpPr txBox="1"/>
+          <p:nvPr/>
+        </p:nvSpPr>
+        <p:spPr>
+          <a:xfrm>
+            <a:off x="457200" y="3415284"/>
+            <a:ext cx="11247120" cy="246888"/>
+          </a:xfrm>
+          <a:prstGeom prst="rect">
+            <a:avLst/>
+          </a:prstGeom>
+          <a:noFill/>
+        </p:spPr>
+        <p:txBody>
+          <a:bodyPr wrap="square">
+            <a:spAutoFit/>
+          </a:bodyPr>
+          <a:lstStyle/>
+          <a:p>
+            <a:pPr algn="l"/>
+            <a:r>
+              <a:rPr sz="1150" b="0">
+                <a:solidFill>
+                  <a:srgbClr val="FFFFFF"/>
+                </a:solidFill>
+              </a:rPr>
+              <a:t/>
+            </a:r>
+          </a:p>
+        </p:txBody>
+      </p:sp>
+      <p:sp>
+        <p:nvSpPr>
+          <p:cNvPr id="17" name="TextBox 16"/>
+          <p:cNvSpPr txBox="1"/>
+          <p:nvPr/>
+        </p:nvSpPr>
+        <p:spPr>
+          <a:xfrm>
+            <a:off x="457200" y="3657600"/>
+            <a:ext cx="11247120" cy="246888"/>
+          </a:xfrm>
+          <a:prstGeom prst="rect">
+            <a:avLst/>
+          </a:prstGeom>
+          <a:noFill/>
+        </p:spPr>
+        <p:txBody>
+          <a:bodyPr wrap="square">
+            <a:spAutoFit/>
+          </a:bodyPr>
+          <a:lstStyle/>
+          <a:p>
+            <a:pPr algn="l"/>
+            <a:r>
+              <a:rPr sz="1150" b="0">
                 <a:solidFill>
                   <a:srgbClr val="00B0EA"/>
                 </a:solidFill>
               </a:rPr>
-              <a:t>→  screenshots/  →  37 張實機截圖</a:t>
+              <a:t># Step 2 — 啟用 Supervisor</a:t>
+            </a:r>
+          </a:p>
+        </p:txBody>
+      </p:sp>
+      <p:sp>
+        <p:nvSpPr>
+          <p:cNvPr id="18" name="TextBox 17"/>
+          <p:cNvSpPr txBox="1"/>
+          <p:nvPr/>
+        </p:nvSpPr>
+        <p:spPr>
+          <a:xfrm>
+            <a:off x="457200" y="3899916"/>
+            <a:ext cx="11247120" cy="246888"/>
+          </a:xfrm>
+          <a:prstGeom prst="rect">
+            <a:avLst/>
+          </a:prstGeom>
+          <a:noFill/>
+        </p:spPr>
+        <p:txBody>
+          <a:bodyPr wrap="square">
+            <a:spAutoFit/>
+          </a:bodyPr>
+          <a:lstStyle/>
+          <a:p>
+            <a:pPr algn="l"/>
+            <a:r>
+              <a:rPr sz="1150" b="0">
+                <a:solidFill>
+                  <a:srgbClr val="FFFFFF"/>
+                </a:solidFill>
+              </a:rPr>
+              <a:t>python step2_enable_supervisor.py</a:t>
+            </a:r>
+          </a:p>
+        </p:txBody>
+      </p:sp>
+      <p:sp>
+        <p:nvSpPr>
+          <p:cNvPr id="19" name="TextBox 18"/>
+          <p:cNvSpPr txBox="1"/>
+          <p:nvPr/>
+        </p:nvSpPr>
+        <p:spPr>
+          <a:xfrm>
+            <a:off x="457200" y="4142232"/>
+            <a:ext cx="11247120" cy="246888"/>
+          </a:xfrm>
+          <a:prstGeom prst="rect">
+            <a:avLst/>
+          </a:prstGeom>
+          <a:noFill/>
+        </p:spPr>
+        <p:txBody>
+          <a:bodyPr wrap="square">
+            <a:spAutoFit/>
+          </a:bodyPr>
+          <a:lstStyle/>
+          <a:p>
+            <a:pPr algn="l"/>
+            <a:r>
+              <a:rPr sz="1150" b="0">
+                <a:solidFill>
+                  <a:srgbClr val="FFFFFF"/>
+                </a:solidFill>
+              </a:rPr>
+              <a:t/>
+            </a:r>
+          </a:p>
+        </p:txBody>
+      </p:sp>
+      <p:sp>
+        <p:nvSpPr>
+          <p:cNvPr id="20" name="TextBox 19"/>
+          <p:cNvSpPr txBox="1"/>
+          <p:nvPr/>
+        </p:nvSpPr>
+        <p:spPr>
+          <a:xfrm>
+            <a:off x="457200" y="4384548"/>
+            <a:ext cx="11247120" cy="246888"/>
+          </a:xfrm>
+          <a:prstGeom prst="rect">
+            <a:avLst/>
+          </a:prstGeom>
+          <a:noFill/>
+        </p:spPr>
+        <p:txBody>
+          <a:bodyPr wrap="square">
+            <a:spAutoFit/>
+          </a:bodyPr>
+          <a:lstStyle/>
+          <a:p>
+            <a:pPr algn="l"/>
+            <a:r>
+              <a:rPr sz="1150" b="0">
+                <a:solidFill>
+                  <a:srgbClr val="00B0EA"/>
+                </a:solidFill>
+              </a:rPr>
+              <a:t># Step 3 — 建 namespace</a:t>
+            </a:r>
+          </a:p>
+        </p:txBody>
+      </p:sp>
+      <p:sp>
+        <p:nvSpPr>
+          <p:cNvPr id="21" name="TextBox 20"/>
+          <p:cNvSpPr txBox="1"/>
+          <p:nvPr/>
+        </p:nvSpPr>
+        <p:spPr>
+          <a:xfrm>
+            <a:off x="457200" y="4626864"/>
+            <a:ext cx="11247120" cy="246888"/>
+          </a:xfrm>
+          <a:prstGeom prst="rect">
+            <a:avLst/>
+          </a:prstGeom>
+          <a:noFill/>
+        </p:spPr>
+        <p:txBody>
+          <a:bodyPr wrap="square">
+            <a:spAutoFit/>
+          </a:bodyPr>
+          <a:lstStyle/>
+          <a:p>
+            <a:pPr algn="l"/>
+            <a:r>
+              <a:rPr sz="1150" b="0">
+                <a:solidFill>
+                  <a:srgbClr val="FFFFFF"/>
+                </a:solidFill>
+              </a:rPr>
+              <a:t>python step3_new_namespace.py</a:t>
+            </a:r>
+          </a:p>
+        </p:txBody>
+      </p:sp>
+      <p:sp>
+        <p:nvSpPr>
+          <p:cNvPr id="22" name="TextBox 21"/>
+          <p:cNvSpPr txBox="1"/>
+          <p:nvPr/>
+        </p:nvSpPr>
+        <p:spPr>
+          <a:xfrm>
+            <a:off x="457200" y="4869180"/>
+            <a:ext cx="11247120" cy="246888"/>
+          </a:xfrm>
+          <a:prstGeom prst="rect">
+            <a:avLst/>
+          </a:prstGeom>
+          <a:noFill/>
+        </p:spPr>
+        <p:txBody>
+          <a:bodyPr wrap="square">
+            <a:spAutoFit/>
+          </a:bodyPr>
+          <a:lstStyle/>
+          <a:p>
+            <a:pPr algn="l"/>
+            <a:r>
+              <a:rPr sz="1150" b="0">
+                <a:solidFill>
+                  <a:srgbClr val="FFFFFF"/>
+                </a:solidFill>
+              </a:rPr>
+              <a:t/>
+            </a:r>
+          </a:p>
+        </p:txBody>
+      </p:sp>
+      <p:sp>
+        <p:nvSpPr>
+          <p:cNvPr id="23" name="TextBox 22"/>
+          <p:cNvSpPr txBox="1"/>
+          <p:nvPr/>
+        </p:nvSpPr>
+        <p:spPr>
+          <a:xfrm>
+            <a:off x="457200" y="5111496"/>
+            <a:ext cx="11247120" cy="246888"/>
+          </a:xfrm>
+          <a:prstGeom prst="rect">
+            <a:avLst/>
+          </a:prstGeom>
+          <a:noFill/>
+        </p:spPr>
+        <p:txBody>
+          <a:bodyPr wrap="square">
+            <a:spAutoFit/>
+          </a:bodyPr>
+          <a:lstStyle/>
+          <a:p>
+            <a:pPr algn="l"/>
+            <a:r>
+              <a:rPr sz="1150" b="0">
+                <a:solidFill>
+                  <a:srgbClr val="00B0EA"/>
+                </a:solidFill>
+              </a:rPr>
+              <a:t># Step 4 — 建 VKS cluster (kubectl 或 kubernetes client)</a:t>
+            </a:r>
+          </a:p>
+        </p:txBody>
+      </p:sp>
+      <p:sp>
+        <p:nvSpPr>
+          <p:cNvPr id="24" name="TextBox 23"/>
+          <p:cNvSpPr txBox="1"/>
+          <p:nvPr/>
+        </p:nvSpPr>
+        <p:spPr>
+          <a:xfrm>
+            <a:off x="457200" y="5353812"/>
+            <a:ext cx="11247120" cy="246888"/>
+          </a:xfrm>
+          <a:prstGeom prst="rect">
+            <a:avLst/>
+          </a:prstGeom>
+          <a:noFill/>
+        </p:spPr>
+        <p:txBody>
+          <a:bodyPr wrap="square">
+            <a:spAutoFit/>
+          </a:bodyPr>
+          <a:lstStyle/>
+          <a:p>
+            <a:pPr algn="l"/>
+            <a:r>
+              <a:rPr sz="1150" b="0">
+                <a:solidFill>
+                  <a:srgbClr val="FFFFFF"/>
+                </a:solidFill>
+              </a:rPr>
+              <a:t>kubectl-vsphere login --server=192.168.114.132 -u administrator@vsphere.local --insecure-skip-tls-verify</a:t>
+            </a:r>
+          </a:p>
+        </p:txBody>
+      </p:sp>
+      <p:sp>
+        <p:nvSpPr>
+          <p:cNvPr id="25" name="TextBox 24"/>
+          <p:cNvSpPr txBox="1"/>
+          <p:nvPr/>
+        </p:nvSpPr>
+        <p:spPr>
+          <a:xfrm>
+            <a:off x="457200" y="5596128"/>
+            <a:ext cx="11247120" cy="246888"/>
+          </a:xfrm>
+          <a:prstGeom prst="rect">
+            <a:avLst/>
+          </a:prstGeom>
+          <a:noFill/>
+        </p:spPr>
+        <p:txBody>
+          <a:bodyPr wrap="square">
+            <a:spAutoFit/>
+          </a:bodyPr>
+          <a:lstStyle/>
+          <a:p>
+            <a:pPr algn="l"/>
+            <a:r>
+              <a:rPr sz="1150" b="0">
+                <a:solidFill>
+                  <a:srgbClr val="FFFFFF"/>
+                </a:solidFill>
+              </a:rPr>
+              <a:t>python step4_new_vks_cluster.py</a:t>
+            </a:r>
+          </a:p>
+        </p:txBody>
+      </p:sp>
+      <p:sp>
+        <p:nvSpPr>
+          <p:cNvPr id="26" name="TextBox 25"/>
+          <p:cNvSpPr txBox="1"/>
+          <p:nvPr/>
+        </p:nvSpPr>
+        <p:spPr>
+          <a:xfrm>
+            <a:off x="457200" y="5838444"/>
+            <a:ext cx="11247120" cy="246888"/>
+          </a:xfrm>
+          <a:prstGeom prst="rect">
+            <a:avLst/>
+          </a:prstGeom>
+          <a:noFill/>
+        </p:spPr>
+        <p:txBody>
+          <a:bodyPr wrap="square">
+            <a:spAutoFit/>
+          </a:bodyPr>
+          <a:lstStyle/>
+          <a:p>
+            <a:pPr algn="l"/>
+            <a:r>
+              <a:rPr sz="1150" b="0">
+                <a:solidFill>
+                  <a:srgbClr val="FFFFFF"/>
+                </a:solidFill>
+              </a:rPr>
+              <a:t>python step4_new_vks_cluster.py --client   # 純 python-kubernetes</a:t>
             </a:r>
           </a:p>
         </p:txBody>
@@ -7882,6 +8762,1635 @@
 </p:sld>
 </file>
 
+<file path=ppt/slides/slide20.xml><?xml version="1.0" encoding="utf-8"?>
+<p:sld xmlns:a="http://schemas.openxmlformats.org/drawingml/2006/main" xmlns:p="http://schemas.openxmlformats.org/presentationml/2006/main" xmlns:r="http://schemas.openxmlformats.org/officeDocument/2006/relationships">
+  <p:cSld>
+    <p:spTree>
+      <p:nvGrpSpPr>
+        <p:cNvPr id="1" name=""/>
+        <p:cNvGrpSpPr/>
+        <p:nvPr/>
+      </p:nvGrpSpPr>
+      <p:grpSpPr/>
+      <p:sp>
+        <p:nvSpPr>
+          <p:cNvPr id="2" name="Rectangle 1"/>
+          <p:cNvSpPr/>
+          <p:nvPr/>
+        </p:nvSpPr>
+        <p:spPr>
+          <a:xfrm>
+            <a:off x="0" y="0"/>
+            <a:ext cx="12188952" cy="6858000"/>
+          </a:xfrm>
+          <a:prstGeom prst="rect">
+            <a:avLst/>
+          </a:prstGeom>
+          <a:solidFill>
+            <a:srgbClr val="F5F7FA"/>
+          </a:solidFill>
+          <a:ln>
+            <a:noFill/>
+          </a:ln>
+        </p:spPr>
+        <p:style>
+          <a:lnRef idx="1">
+            <a:schemeClr val="accent1"/>
+          </a:lnRef>
+          <a:fillRef idx="3">
+            <a:schemeClr val="accent1"/>
+          </a:fillRef>
+          <a:effectRef idx="2">
+            <a:schemeClr val="accent1"/>
+          </a:effectRef>
+          <a:fontRef idx="minor">
+            <a:schemeClr val="lt1"/>
+          </a:fontRef>
+        </p:style>
+        <p:txBody>
+          <a:bodyPr rtlCol="0" anchor="ctr"/>
+          <a:lstStyle/>
+          <a:p>
+            <a:pPr algn="ctr"/>
+          </a:p>
+        </p:txBody>
+      </p:sp>
+      <p:sp>
+        <p:nvSpPr>
+          <p:cNvPr id="3" name="Rectangle 2"/>
+          <p:cNvSpPr/>
+          <p:nvPr/>
+        </p:nvSpPr>
+        <p:spPr>
+          <a:xfrm>
+            <a:off x="0" y="0"/>
+            <a:ext cx="12188952" cy="914400"/>
+          </a:xfrm>
+          <a:prstGeom prst="rect">
+            <a:avLst/>
+          </a:prstGeom>
+          <a:solidFill>
+            <a:srgbClr val="1A1A2E"/>
+          </a:solidFill>
+          <a:ln>
+            <a:noFill/>
+          </a:ln>
+        </p:spPr>
+        <p:style>
+          <a:lnRef idx="1">
+            <a:schemeClr val="accent1"/>
+          </a:lnRef>
+          <a:fillRef idx="3">
+            <a:schemeClr val="accent1"/>
+          </a:fillRef>
+          <a:effectRef idx="2">
+            <a:schemeClr val="accent1"/>
+          </a:effectRef>
+          <a:fontRef idx="minor">
+            <a:schemeClr val="lt1"/>
+          </a:fontRef>
+        </p:style>
+        <p:txBody>
+          <a:bodyPr rtlCol="0" anchor="ctr"/>
+          <a:lstStyle/>
+          <a:p>
+            <a:pPr algn="ctr"/>
+          </a:p>
+        </p:txBody>
+      </p:sp>
+      <p:sp>
+        <p:nvSpPr>
+          <p:cNvPr id="4" name="Rectangle 3"/>
+          <p:cNvSpPr/>
+          <p:nvPr/>
+        </p:nvSpPr>
+        <p:spPr>
+          <a:xfrm>
+            <a:off x="0" y="0"/>
+            <a:ext cx="109728" cy="914400"/>
+          </a:xfrm>
+          <a:prstGeom prst="rect">
+            <a:avLst/>
+          </a:prstGeom>
+          <a:solidFill>
+            <a:srgbClr val="00B0EA"/>
+          </a:solidFill>
+          <a:ln>
+            <a:noFill/>
+          </a:ln>
+        </p:spPr>
+        <p:style>
+          <a:lnRef idx="1">
+            <a:schemeClr val="accent1"/>
+          </a:lnRef>
+          <a:fillRef idx="3">
+            <a:schemeClr val="accent1"/>
+          </a:fillRef>
+          <a:effectRef idx="2">
+            <a:schemeClr val="accent1"/>
+          </a:effectRef>
+          <a:fontRef idx="minor">
+            <a:schemeClr val="lt1"/>
+          </a:fontRef>
+        </p:style>
+        <p:txBody>
+          <a:bodyPr rtlCol="0" anchor="ctr"/>
+          <a:lstStyle/>
+          <a:p>
+            <a:pPr algn="ctr"/>
+          </a:p>
+        </p:txBody>
+      </p:sp>
+      <p:sp>
+        <p:nvSpPr>
+          <p:cNvPr id="5" name="TextBox 4"/>
+          <p:cNvSpPr txBox="1"/>
+          <p:nvPr/>
+        </p:nvSpPr>
+        <p:spPr>
+          <a:xfrm>
+            <a:off x="228600" y="109728"/>
+            <a:ext cx="11612880" cy="694944"/>
+          </a:xfrm>
+          <a:prstGeom prst="rect">
+            <a:avLst/>
+          </a:prstGeom>
+          <a:noFill/>
+        </p:spPr>
+        <p:txBody>
+          <a:bodyPr wrap="square">
+            <a:spAutoFit/>
+          </a:bodyPr>
+          <a:lstStyle/>
+          <a:p>
+            <a:pPr algn="l"/>
+            <a:r>
+              <a:rPr sz="2600" b="1">
+                <a:solidFill>
+                  <a:srgbClr val="FFFFFF"/>
+                </a:solidFill>
+              </a:rPr>
+              <a:t>PowerShell &amp; API 方法</a:t>
+            </a:r>
+          </a:p>
+        </p:txBody>
+      </p:sp>
+      <p:sp>
+        <p:nvSpPr>
+          <p:cNvPr id="6" name="Rectangle 5"/>
+          <p:cNvSpPr/>
+          <p:nvPr/>
+        </p:nvSpPr>
+        <p:spPr>
+          <a:xfrm>
+            <a:off x="274320" y="1097280"/>
+            <a:ext cx="5486400" cy="5029200"/>
+          </a:xfrm>
+          <a:prstGeom prst="rect">
+            <a:avLst/>
+          </a:prstGeom>
+          <a:solidFill>
+            <a:srgbClr val="1A1A2E"/>
+          </a:solidFill>
+          <a:ln>
+            <a:noFill/>
+          </a:ln>
+        </p:spPr>
+        <p:style>
+          <a:lnRef idx="1">
+            <a:schemeClr val="accent1"/>
+          </a:lnRef>
+          <a:fillRef idx="3">
+            <a:schemeClr val="accent1"/>
+          </a:fillRef>
+          <a:effectRef idx="2">
+            <a:schemeClr val="accent1"/>
+          </a:effectRef>
+          <a:fontRef idx="minor">
+            <a:schemeClr val="lt1"/>
+          </a:fontRef>
+        </p:style>
+        <p:txBody>
+          <a:bodyPr rtlCol="0" anchor="ctr"/>
+          <a:lstStyle/>
+          <a:p>
+            <a:pPr algn="ctr"/>
+          </a:p>
+        </p:txBody>
+      </p:sp>
+      <p:sp>
+        <p:nvSpPr>
+          <p:cNvPr id="7" name="Rectangle 6"/>
+          <p:cNvSpPr/>
+          <p:nvPr/>
+        </p:nvSpPr>
+        <p:spPr>
+          <a:xfrm>
+            <a:off x="6035040" y="1097280"/>
+            <a:ext cx="5852160" cy="5029200"/>
+          </a:xfrm>
+          <a:prstGeom prst="rect">
+            <a:avLst/>
+          </a:prstGeom>
+          <a:solidFill>
+            <a:srgbClr val="1A1A2E"/>
+          </a:solidFill>
+          <a:ln>
+            <a:noFill/>
+          </a:ln>
+        </p:spPr>
+        <p:style>
+          <a:lnRef idx="1">
+            <a:schemeClr val="accent1"/>
+          </a:lnRef>
+          <a:fillRef idx="3">
+            <a:schemeClr val="accent1"/>
+          </a:fillRef>
+          <a:effectRef idx="2">
+            <a:schemeClr val="accent1"/>
+          </a:effectRef>
+          <a:fontRef idx="minor">
+            <a:schemeClr val="lt1"/>
+          </a:fontRef>
+        </p:style>
+        <p:txBody>
+          <a:bodyPr rtlCol="0" anchor="ctr"/>
+          <a:lstStyle/>
+          <a:p>
+            <a:pPr algn="ctr"/>
+          </a:p>
+        </p:txBody>
+      </p:sp>
+      <p:sp>
+        <p:nvSpPr>
+          <p:cNvPr id="8" name="TextBox 7"/>
+          <p:cNvSpPr txBox="1"/>
+          <p:nvPr/>
+        </p:nvSpPr>
+        <p:spPr>
+          <a:xfrm>
+            <a:off x="457200" y="1280160"/>
+            <a:ext cx="5212080" cy="301752"/>
+          </a:xfrm>
+          <a:prstGeom prst="rect">
+            <a:avLst/>
+          </a:prstGeom>
+          <a:noFill/>
+        </p:spPr>
+        <p:txBody>
+          <a:bodyPr wrap="square">
+            <a:spAutoFit/>
+          </a:bodyPr>
+          <a:lstStyle/>
+          <a:p>
+            <a:pPr algn="l"/>
+            <a:r>
+              <a:rPr sz="1100" b="0">
+                <a:solidFill>
+                  <a:srgbClr val="00B0EA"/>
+                </a:solidFill>
+              </a:rPr>
+              <a:t># PowerShell（common/ + path-a-dtgw/）</a:t>
+            </a:r>
+          </a:p>
+        </p:txBody>
+      </p:sp>
+      <p:sp>
+        <p:nvSpPr>
+          <p:cNvPr id="9" name="TextBox 8"/>
+          <p:cNvSpPr txBox="1"/>
+          <p:nvPr/>
+        </p:nvSpPr>
+        <p:spPr>
+          <a:xfrm>
+            <a:off x="457200" y="1572768"/>
+            <a:ext cx="5212080" cy="301752"/>
+          </a:xfrm>
+          <a:prstGeom prst="rect">
+            <a:avLst/>
+          </a:prstGeom>
+          <a:noFill/>
+        </p:spPr>
+        <p:txBody>
+          <a:bodyPr wrap="square">
+            <a:spAutoFit/>
+          </a:bodyPr>
+          <a:lstStyle/>
+          <a:p>
+            <a:pPr algn="l"/>
+            <a:r>
+              <a:rPr sz="1100" b="0">
+                <a:solidFill>
+                  <a:srgbClr val="FFFFFF"/>
+                </a:solidFill>
+              </a:rPr>
+              <a:t/>
+            </a:r>
+          </a:p>
+        </p:txBody>
+      </p:sp>
+      <p:sp>
+        <p:nvSpPr>
+          <p:cNvPr id="10" name="TextBox 9"/>
+          <p:cNvSpPr txBox="1"/>
+          <p:nvPr/>
+        </p:nvSpPr>
+        <p:spPr>
+          <a:xfrm>
+            <a:off x="457200" y="1865376"/>
+            <a:ext cx="5212080" cy="301752"/>
+          </a:xfrm>
+          <a:prstGeom prst="rect">
+            <a:avLst/>
+          </a:prstGeom>
+          <a:noFill/>
+        </p:spPr>
+        <p:txBody>
+          <a:bodyPr wrap="square">
+            <a:spAutoFit/>
+          </a:bodyPr>
+          <a:lstStyle/>
+          <a:p>
+            <a:pPr algn="l"/>
+            <a:r>
+              <a:rPr sz="1100" b="0">
+                <a:solidFill>
+                  <a:srgbClr val="FFFFFF"/>
+                </a:solidFill>
+              </a:rPr>
+              <a:t>pwsh Step0-Check-Prereqs.ps1</a:t>
+            </a:r>
+          </a:p>
+        </p:txBody>
+      </p:sp>
+      <p:sp>
+        <p:nvSpPr>
+          <p:cNvPr id="11" name="TextBox 10"/>
+          <p:cNvSpPr txBox="1"/>
+          <p:nvPr/>
+        </p:nvSpPr>
+        <p:spPr>
+          <a:xfrm>
+            <a:off x="457200" y="2157984"/>
+            <a:ext cx="5212080" cy="301752"/>
+          </a:xfrm>
+          <a:prstGeom prst="rect">
+            <a:avLst/>
+          </a:prstGeom>
+          <a:noFill/>
+        </p:spPr>
+        <p:txBody>
+          <a:bodyPr wrap="square">
+            <a:spAutoFit/>
+          </a:bodyPr>
+          <a:lstStyle/>
+          <a:p>
+            <a:pPr algn="l"/>
+            <a:r>
+              <a:rPr sz="1100" b="0">
+                <a:solidFill>
+                  <a:srgbClr val="FFFFFF"/>
+                </a:solidFill>
+              </a:rPr>
+              <a:t>pwsh path-a-dtgw/Step1-Setup-DTGW.ps1 \</a:t>
+            </a:r>
+          </a:p>
+        </p:txBody>
+      </p:sp>
+      <p:sp>
+        <p:nvSpPr>
+          <p:cNvPr id="12" name="TextBox 11"/>
+          <p:cNvSpPr txBox="1"/>
+          <p:nvPr/>
+        </p:nvSpPr>
+        <p:spPr>
+          <a:xfrm>
+            <a:off x="457200" y="2450592"/>
+            <a:ext cx="5212080" cy="301752"/>
+          </a:xfrm>
+          <a:prstGeom prst="rect">
+            <a:avLst/>
+          </a:prstGeom>
+          <a:noFill/>
+        </p:spPr>
+        <p:txBody>
+          <a:bodyPr wrap="square">
+            <a:spAutoFit/>
+          </a:bodyPr>
+          <a:lstStyle/>
+          <a:p>
+            <a:pPr algn="l"/>
+            <a:r>
+              <a:rPr sz="1100" b="0">
+                <a:solidFill>
+                  <a:srgbClr val="FFFFFF"/>
+                </a:solidFill>
+              </a:rPr>
+              <a:t>     -DryRun    # 先 dry-run</a:t>
+            </a:r>
+          </a:p>
+        </p:txBody>
+      </p:sp>
+      <p:sp>
+        <p:nvSpPr>
+          <p:cNvPr id="13" name="TextBox 12"/>
+          <p:cNvSpPr txBox="1"/>
+          <p:nvPr/>
+        </p:nvSpPr>
+        <p:spPr>
+          <a:xfrm>
+            <a:off x="457200" y="2743200"/>
+            <a:ext cx="5212080" cy="301752"/>
+          </a:xfrm>
+          <a:prstGeom prst="rect">
+            <a:avLst/>
+          </a:prstGeom>
+          <a:noFill/>
+        </p:spPr>
+        <p:txBody>
+          <a:bodyPr wrap="square">
+            <a:spAutoFit/>
+          </a:bodyPr>
+          <a:lstStyle/>
+          <a:p>
+            <a:pPr algn="l"/>
+            <a:r>
+              <a:rPr sz="1100" b="0">
+                <a:solidFill>
+                  <a:srgbClr val="FFFFFF"/>
+                </a:solidFill>
+              </a:rPr>
+              <a:t>pwsh path-a-dtgw/Step1-Setup-DTGW.ps1</a:t>
+            </a:r>
+          </a:p>
+        </p:txBody>
+      </p:sp>
+      <p:sp>
+        <p:nvSpPr>
+          <p:cNvPr id="14" name="TextBox 13"/>
+          <p:cNvSpPr txBox="1"/>
+          <p:nvPr/>
+        </p:nvSpPr>
+        <p:spPr>
+          <a:xfrm>
+            <a:off x="457200" y="3035808"/>
+            <a:ext cx="5212080" cy="301752"/>
+          </a:xfrm>
+          <a:prstGeom prst="rect">
+            <a:avLst/>
+          </a:prstGeom>
+          <a:noFill/>
+        </p:spPr>
+        <p:txBody>
+          <a:bodyPr wrap="square">
+            <a:spAutoFit/>
+          </a:bodyPr>
+          <a:lstStyle/>
+          <a:p>
+            <a:pPr algn="l"/>
+            <a:r>
+              <a:rPr sz="1100" b="0">
+                <a:solidFill>
+                  <a:srgbClr val="FFFFFF"/>
+                </a:solidFill>
+              </a:rPr>
+              <a:t>pwsh Step2-Enable-Supervisor.ps1</a:t>
+            </a:r>
+          </a:p>
+        </p:txBody>
+      </p:sp>
+      <p:sp>
+        <p:nvSpPr>
+          <p:cNvPr id="15" name="TextBox 14"/>
+          <p:cNvSpPr txBox="1"/>
+          <p:nvPr/>
+        </p:nvSpPr>
+        <p:spPr>
+          <a:xfrm>
+            <a:off x="457200" y="3328416"/>
+            <a:ext cx="5212080" cy="301752"/>
+          </a:xfrm>
+          <a:prstGeom prst="rect">
+            <a:avLst/>
+          </a:prstGeom>
+          <a:noFill/>
+        </p:spPr>
+        <p:txBody>
+          <a:bodyPr wrap="square">
+            <a:spAutoFit/>
+          </a:bodyPr>
+          <a:lstStyle/>
+          <a:p>
+            <a:pPr algn="l"/>
+            <a:r>
+              <a:rPr sz="1100" b="0">
+                <a:solidFill>
+                  <a:srgbClr val="FFFFFF"/>
+                </a:solidFill>
+              </a:rPr>
+              <a:t>pwsh Step3-New-Namespace.ps1</a:t>
+            </a:r>
+          </a:p>
+        </p:txBody>
+      </p:sp>
+      <p:sp>
+        <p:nvSpPr>
+          <p:cNvPr id="16" name="TextBox 15"/>
+          <p:cNvSpPr txBox="1"/>
+          <p:nvPr/>
+        </p:nvSpPr>
+        <p:spPr>
+          <a:xfrm>
+            <a:off x="457200" y="3621024"/>
+            <a:ext cx="5212080" cy="301752"/>
+          </a:xfrm>
+          <a:prstGeom prst="rect">
+            <a:avLst/>
+          </a:prstGeom>
+          <a:noFill/>
+        </p:spPr>
+        <p:txBody>
+          <a:bodyPr wrap="square">
+            <a:spAutoFit/>
+          </a:bodyPr>
+          <a:lstStyle/>
+          <a:p>
+            <a:pPr algn="l"/>
+            <a:r>
+              <a:rPr sz="1100" b="0">
+                <a:solidFill>
+                  <a:srgbClr val="FFFFFF"/>
+                </a:solidFill>
+              </a:rPr>
+              <a:t>pwsh Step4-New-VksCluster.ps1</a:t>
+            </a:r>
+          </a:p>
+        </p:txBody>
+      </p:sp>
+      <p:sp>
+        <p:nvSpPr>
+          <p:cNvPr id="17" name="TextBox 16"/>
+          <p:cNvSpPr txBox="1"/>
+          <p:nvPr/>
+        </p:nvSpPr>
+        <p:spPr>
+          <a:xfrm>
+            <a:off x="457200" y="3913632"/>
+            <a:ext cx="5212080" cy="301752"/>
+          </a:xfrm>
+          <a:prstGeom prst="rect">
+            <a:avLst/>
+          </a:prstGeom>
+          <a:noFill/>
+        </p:spPr>
+        <p:txBody>
+          <a:bodyPr wrap="square">
+            <a:spAutoFit/>
+          </a:bodyPr>
+          <a:lstStyle/>
+          <a:p>
+            <a:pPr algn="l"/>
+            <a:r>
+              <a:rPr sz="1100" b="0">
+                <a:solidFill>
+                  <a:srgbClr val="FFFFFF"/>
+                </a:solidFill>
+              </a:rPr>
+              <a:t/>
+            </a:r>
+          </a:p>
+        </p:txBody>
+      </p:sp>
+      <p:sp>
+        <p:nvSpPr>
+          <p:cNvPr id="18" name="TextBox 17"/>
+          <p:cNvSpPr txBox="1"/>
+          <p:nvPr/>
+        </p:nvSpPr>
+        <p:spPr>
+          <a:xfrm>
+            <a:off x="457200" y="4206240"/>
+            <a:ext cx="5212080" cy="301752"/>
+          </a:xfrm>
+          <a:prstGeom prst="rect">
+            <a:avLst/>
+          </a:prstGeom>
+          <a:noFill/>
+        </p:spPr>
+        <p:txBody>
+          <a:bodyPr wrap="square">
+            <a:spAutoFit/>
+          </a:bodyPr>
+          <a:lstStyle/>
+          <a:p>
+            <a:pPr algn="l"/>
+            <a:r>
+              <a:rPr sz="1100" b="0">
+                <a:solidFill>
+                  <a:srgbClr val="00B0EA"/>
+                </a:solidFill>
+              </a:rPr>
+              <a:t># PowerCLI cmdlet 路線</a:t>
+            </a:r>
+          </a:p>
+        </p:txBody>
+      </p:sp>
+      <p:sp>
+        <p:nvSpPr>
+          <p:cNvPr id="19" name="TextBox 18"/>
+          <p:cNvSpPr txBox="1"/>
+          <p:nvPr/>
+        </p:nvSpPr>
+        <p:spPr>
+          <a:xfrm>
+            <a:off x="457200" y="4498848"/>
+            <a:ext cx="5212080" cy="301752"/>
+          </a:xfrm>
+          <a:prstGeom prst="rect">
+            <a:avLst/>
+          </a:prstGeom>
+          <a:noFill/>
+        </p:spPr>
+        <p:txBody>
+          <a:bodyPr wrap="square">
+            <a:spAutoFit/>
+          </a:bodyPr>
+          <a:lstStyle/>
+          <a:p>
+            <a:pPr algn="l"/>
+            <a:r>
+              <a:rPr sz="1100" b="0">
+                <a:solidFill>
+                  <a:srgbClr val="FFFFFF"/>
+                </a:solidFill>
+              </a:rPr>
+              <a:t>Enable-WMCluster ...</a:t>
+            </a:r>
+          </a:p>
+        </p:txBody>
+      </p:sp>
+      <p:sp>
+        <p:nvSpPr>
+          <p:cNvPr id="20" name="TextBox 19"/>
+          <p:cNvSpPr txBox="1"/>
+          <p:nvPr/>
+        </p:nvSpPr>
+        <p:spPr>
+          <a:xfrm>
+            <a:off x="457200" y="4791456"/>
+            <a:ext cx="5212080" cy="301752"/>
+          </a:xfrm>
+          <a:prstGeom prst="rect">
+            <a:avLst/>
+          </a:prstGeom>
+          <a:noFill/>
+        </p:spPr>
+        <p:txBody>
+          <a:bodyPr wrap="square">
+            <a:spAutoFit/>
+          </a:bodyPr>
+          <a:lstStyle/>
+          <a:p>
+            <a:pPr algn="l"/>
+            <a:r>
+              <a:rPr sz="1100" b="0">
+                <a:solidFill>
+                  <a:srgbClr val="FFFFFF"/>
+                </a:solidFill>
+              </a:rPr>
+              <a:t>New-WMNamespace ...</a:t>
+            </a:r>
+          </a:p>
+        </p:txBody>
+      </p:sp>
+      <p:sp>
+        <p:nvSpPr>
+          <p:cNvPr id="21" name="TextBox 20"/>
+          <p:cNvSpPr txBox="1"/>
+          <p:nvPr/>
+        </p:nvSpPr>
+        <p:spPr>
+          <a:xfrm>
+            <a:off x="6172200" y="1280160"/>
+            <a:ext cx="5577840" cy="301752"/>
+          </a:xfrm>
+          <a:prstGeom prst="rect">
+            <a:avLst/>
+          </a:prstGeom>
+          <a:noFill/>
+        </p:spPr>
+        <p:txBody>
+          <a:bodyPr wrap="square">
+            <a:spAutoFit/>
+          </a:bodyPr>
+          <a:lstStyle/>
+          <a:p>
+            <a:pPr algn="l"/>
+            <a:r>
+              <a:rPr sz="1100" b="0">
+                <a:solidFill>
+                  <a:srgbClr val="00B0EA"/>
+                </a:solidFill>
+              </a:rPr>
+              <a:t># API（curl / 語言無關）</a:t>
+            </a:r>
+          </a:p>
+        </p:txBody>
+      </p:sp>
+      <p:sp>
+        <p:nvSpPr>
+          <p:cNvPr id="22" name="TextBox 21"/>
+          <p:cNvSpPr txBox="1"/>
+          <p:nvPr/>
+        </p:nvSpPr>
+        <p:spPr>
+          <a:xfrm>
+            <a:off x="6172200" y="1572768"/>
+            <a:ext cx="5577840" cy="301752"/>
+          </a:xfrm>
+          <a:prstGeom prst="rect">
+            <a:avLst/>
+          </a:prstGeom>
+          <a:noFill/>
+        </p:spPr>
+        <p:txBody>
+          <a:bodyPr wrap="square">
+            <a:spAutoFit/>
+          </a:bodyPr>
+          <a:lstStyle/>
+          <a:p>
+            <a:pPr algn="l"/>
+            <a:r>
+              <a:rPr sz="1100" b="0">
+                <a:solidFill>
+                  <a:srgbClr val="FFFFFF"/>
+                </a:solidFill>
+              </a:rPr>
+              <a:t/>
+            </a:r>
+          </a:p>
+        </p:txBody>
+      </p:sp>
+      <p:sp>
+        <p:nvSpPr>
+          <p:cNvPr id="23" name="TextBox 22"/>
+          <p:cNvSpPr txBox="1"/>
+          <p:nvPr/>
+        </p:nvSpPr>
+        <p:spPr>
+          <a:xfrm>
+            <a:off x="6172200" y="1865376"/>
+            <a:ext cx="5577840" cy="301752"/>
+          </a:xfrm>
+          <a:prstGeom prst="rect">
+            <a:avLst/>
+          </a:prstGeom>
+          <a:noFill/>
+        </p:spPr>
+        <p:txBody>
+          <a:bodyPr wrap="square">
+            <a:spAutoFit/>
+          </a:bodyPr>
+          <a:lstStyle/>
+          <a:p>
+            <a:pPr algn="l"/>
+            <a:r>
+              <a:rPr sz="1100" b="0">
+                <a:solidFill>
+                  <a:srgbClr val="00B0EA"/>
+                </a:solidFill>
+              </a:rPr>
+              <a:t># 認證</a:t>
+            </a:r>
+          </a:p>
+        </p:txBody>
+      </p:sp>
+      <p:sp>
+        <p:nvSpPr>
+          <p:cNvPr id="24" name="TextBox 23"/>
+          <p:cNvSpPr txBox="1"/>
+          <p:nvPr/>
+        </p:nvSpPr>
+        <p:spPr>
+          <a:xfrm>
+            <a:off x="6172200" y="2157984"/>
+            <a:ext cx="5577840" cy="301752"/>
+          </a:xfrm>
+          <a:prstGeom prst="rect">
+            <a:avLst/>
+          </a:prstGeom>
+          <a:noFill/>
+        </p:spPr>
+        <p:txBody>
+          <a:bodyPr wrap="square">
+            <a:spAutoFit/>
+          </a:bodyPr>
+          <a:lstStyle/>
+          <a:p>
+            <a:pPr algn="l"/>
+            <a:r>
+              <a:rPr sz="1100" b="0">
+                <a:solidFill>
+                  <a:srgbClr val="FFFFFF"/>
+                </a:solidFill>
+              </a:rPr>
+              <a:t>SID=$(curl -u admin:pass -X POST</a:t>
+            </a:r>
+          </a:p>
+        </p:txBody>
+      </p:sp>
+      <p:sp>
+        <p:nvSpPr>
+          <p:cNvPr id="25" name="TextBox 24"/>
+          <p:cNvSpPr txBox="1"/>
+          <p:nvPr/>
+        </p:nvSpPr>
+        <p:spPr>
+          <a:xfrm>
+            <a:off x="6172200" y="2450592"/>
+            <a:ext cx="5577840" cy="301752"/>
+          </a:xfrm>
+          <a:prstGeom prst="rect">
+            <a:avLst/>
+          </a:prstGeom>
+          <a:noFill/>
+        </p:spPr>
+        <p:txBody>
+          <a:bodyPr wrap="square">
+            <a:spAutoFit/>
+          </a:bodyPr>
+          <a:lstStyle/>
+          <a:p>
+            <a:pPr algn="l"/>
+            <a:r>
+              <a:rPr sz="1100" b="0">
+                <a:solidFill>
+                  <a:srgbClr val="FFFFFF"/>
+                </a:solidFill>
+              </a:rPr>
+              <a:t>  https://vc/api/session)</a:t>
+            </a:r>
+          </a:p>
+        </p:txBody>
+      </p:sp>
+      <p:sp>
+        <p:nvSpPr>
+          <p:cNvPr id="26" name="TextBox 25"/>
+          <p:cNvSpPr txBox="1"/>
+          <p:nvPr/>
+        </p:nvSpPr>
+        <p:spPr>
+          <a:xfrm>
+            <a:off x="6172200" y="2743200"/>
+            <a:ext cx="5577840" cy="301752"/>
+          </a:xfrm>
+          <a:prstGeom prst="rect">
+            <a:avLst/>
+          </a:prstGeom>
+          <a:noFill/>
+        </p:spPr>
+        <p:txBody>
+          <a:bodyPr wrap="square">
+            <a:spAutoFit/>
+          </a:bodyPr>
+          <a:lstStyle/>
+          <a:p>
+            <a:pPr algn="l"/>
+            <a:r>
+              <a:rPr sz="1100" b="0">
+                <a:solidFill>
+                  <a:srgbClr val="FFFFFF"/>
+                </a:solidFill>
+              </a:rPr>
+              <a:t/>
+            </a:r>
+          </a:p>
+        </p:txBody>
+      </p:sp>
+      <p:sp>
+        <p:nvSpPr>
+          <p:cNvPr id="27" name="TextBox 26"/>
+          <p:cNvSpPr txBox="1"/>
+          <p:nvPr/>
+        </p:nvSpPr>
+        <p:spPr>
+          <a:xfrm>
+            <a:off x="6172200" y="3035808"/>
+            <a:ext cx="5577840" cy="301752"/>
+          </a:xfrm>
+          <a:prstGeom prst="rect">
+            <a:avLst/>
+          </a:prstGeom>
+          <a:noFill/>
+        </p:spPr>
+        <p:txBody>
+          <a:bodyPr wrap="square">
+            <a:spAutoFit/>
+          </a:bodyPr>
+          <a:lstStyle/>
+          <a:p>
+            <a:pPr algn="l"/>
+            <a:r>
+              <a:rPr sz="1100" b="0">
+                <a:solidFill>
+                  <a:srgbClr val="00B0EA"/>
+                </a:solidFill>
+              </a:rPr>
+              <a:t># NSX IP blocks</a:t>
+            </a:r>
+          </a:p>
+        </p:txBody>
+      </p:sp>
+      <p:sp>
+        <p:nvSpPr>
+          <p:cNvPr id="28" name="TextBox 27"/>
+          <p:cNvSpPr txBox="1"/>
+          <p:nvPr/>
+        </p:nvSpPr>
+        <p:spPr>
+          <a:xfrm>
+            <a:off x="6172200" y="3328416"/>
+            <a:ext cx="5577840" cy="301752"/>
+          </a:xfrm>
+          <a:prstGeom prst="rect">
+            <a:avLst/>
+          </a:prstGeom>
+          <a:noFill/>
+        </p:spPr>
+        <p:txBody>
+          <a:bodyPr wrap="square">
+            <a:spAutoFit/>
+          </a:bodyPr>
+          <a:lstStyle/>
+          <a:p>
+            <a:pPr algn="l"/>
+            <a:r>
+              <a:rPr sz="1100" b="0">
+                <a:solidFill>
+                  <a:srgbClr val="FFFFFF"/>
+                </a:solidFill>
+              </a:rPr>
+              <a:t>curl -X PATCH https://nsx/policy/api/v1</a:t>
+            </a:r>
+          </a:p>
+        </p:txBody>
+      </p:sp>
+      <p:sp>
+        <p:nvSpPr>
+          <p:cNvPr id="29" name="TextBox 28"/>
+          <p:cNvSpPr txBox="1"/>
+          <p:nvPr/>
+        </p:nvSpPr>
+        <p:spPr>
+          <a:xfrm>
+            <a:off x="6172200" y="3621024"/>
+            <a:ext cx="5577840" cy="301752"/>
+          </a:xfrm>
+          <a:prstGeom prst="rect">
+            <a:avLst/>
+          </a:prstGeom>
+          <a:noFill/>
+        </p:spPr>
+        <p:txBody>
+          <a:bodyPr wrap="square">
+            <a:spAutoFit/>
+          </a:bodyPr>
+          <a:lstStyle/>
+          <a:p>
+            <a:pPr algn="l"/>
+            <a:r>
+              <a:rPr sz="1100" b="0">
+                <a:solidFill>
+                  <a:srgbClr val="FFFFFF"/>
+                </a:solidFill>
+              </a:rPr>
+              <a:t>  /infra/ip-blocks/vcf-m02-vks-ext</a:t>
+            </a:r>
+          </a:p>
+        </p:txBody>
+      </p:sp>
+      <p:sp>
+        <p:nvSpPr>
+          <p:cNvPr id="30" name="TextBox 29"/>
+          <p:cNvSpPr txBox="1"/>
+          <p:nvPr/>
+        </p:nvSpPr>
+        <p:spPr>
+          <a:xfrm>
+            <a:off x="6172200" y="3913632"/>
+            <a:ext cx="5577840" cy="301752"/>
+          </a:xfrm>
+          <a:prstGeom prst="rect">
+            <a:avLst/>
+          </a:prstGeom>
+          <a:noFill/>
+        </p:spPr>
+        <p:txBody>
+          <a:bodyPr wrap="square">
+            <a:spAutoFit/>
+          </a:bodyPr>
+          <a:lstStyle/>
+          <a:p>
+            <a:pPr algn="l"/>
+            <a:r>
+              <a:rPr sz="1100" b="0">
+                <a:solidFill>
+                  <a:srgbClr val="FFFFFF"/>
+                </a:solidFill>
+              </a:rPr>
+              <a:t/>
+            </a:r>
+          </a:p>
+        </p:txBody>
+      </p:sp>
+      <p:sp>
+        <p:nvSpPr>
+          <p:cNvPr id="31" name="TextBox 30"/>
+          <p:cNvSpPr txBox="1"/>
+          <p:nvPr/>
+        </p:nvSpPr>
+        <p:spPr>
+          <a:xfrm>
+            <a:off x="6172200" y="4206240"/>
+            <a:ext cx="5577840" cy="301752"/>
+          </a:xfrm>
+          <a:prstGeom prst="rect">
+            <a:avLst/>
+          </a:prstGeom>
+          <a:noFill/>
+        </p:spPr>
+        <p:txBody>
+          <a:bodyPr wrap="square">
+            <a:spAutoFit/>
+          </a:bodyPr>
+          <a:lstStyle/>
+          <a:p>
+            <a:pPr algn="l"/>
+            <a:r>
+              <a:rPr sz="1100" b="0">
+                <a:solidFill>
+                  <a:srgbClr val="00B0EA"/>
+                </a:solidFill>
+              </a:rPr>
+              <a:t># 啟用 Supervisor</a:t>
+            </a:r>
+          </a:p>
+        </p:txBody>
+      </p:sp>
+      <p:sp>
+        <p:nvSpPr>
+          <p:cNvPr id="32" name="TextBox 31"/>
+          <p:cNvSpPr txBox="1"/>
+          <p:nvPr/>
+        </p:nvSpPr>
+        <p:spPr>
+          <a:xfrm>
+            <a:off x="6172200" y="4498848"/>
+            <a:ext cx="5577840" cy="301752"/>
+          </a:xfrm>
+          <a:prstGeom prst="rect">
+            <a:avLst/>
+          </a:prstGeom>
+          <a:noFill/>
+        </p:spPr>
+        <p:txBody>
+          <a:bodyPr wrap="square">
+            <a:spAutoFit/>
+          </a:bodyPr>
+          <a:lstStyle/>
+          <a:p>
+            <a:pPr algn="l"/>
+            <a:r>
+              <a:rPr sz="1100" b="0">
+                <a:solidFill>
+                  <a:srgbClr val="FFFFFF"/>
+                </a:solidFill>
+              </a:rPr>
+              <a:t>curl -X POST https://vc/api/vcenter</a:t>
+            </a:r>
+          </a:p>
+        </p:txBody>
+      </p:sp>
+      <p:sp>
+        <p:nvSpPr>
+          <p:cNvPr id="33" name="TextBox 32"/>
+          <p:cNvSpPr txBox="1"/>
+          <p:nvPr/>
+        </p:nvSpPr>
+        <p:spPr>
+          <a:xfrm>
+            <a:off x="6172200" y="4791456"/>
+            <a:ext cx="5577840" cy="301752"/>
+          </a:xfrm>
+          <a:prstGeom prst="rect">
+            <a:avLst/>
+          </a:prstGeom>
+          <a:noFill/>
+        </p:spPr>
+        <p:txBody>
+          <a:bodyPr wrap="square">
+            <a:spAutoFit/>
+          </a:bodyPr>
+          <a:lstStyle/>
+          <a:p>
+            <a:pPr algn="l"/>
+            <a:r>
+              <a:rPr sz="1100" b="0">
+                <a:solidFill>
+                  <a:srgbClr val="FFFFFF"/>
+                </a:solidFill>
+              </a:rPr>
+              <a:t>  /namespace-management/supervisors</a:t>
+            </a:r>
+          </a:p>
+        </p:txBody>
+      </p:sp>
+      <p:sp>
+        <p:nvSpPr>
+          <p:cNvPr id="34" name="TextBox 33"/>
+          <p:cNvSpPr txBox="1"/>
+          <p:nvPr/>
+        </p:nvSpPr>
+        <p:spPr>
+          <a:xfrm>
+            <a:off x="6172200" y="5084064"/>
+            <a:ext cx="5577840" cy="301752"/>
+          </a:xfrm>
+          <a:prstGeom prst="rect">
+            <a:avLst/>
+          </a:prstGeom>
+          <a:noFill/>
+        </p:spPr>
+        <p:txBody>
+          <a:bodyPr wrap="square">
+            <a:spAutoFit/>
+          </a:bodyPr>
+          <a:lstStyle/>
+          <a:p>
+            <a:pPr algn="l"/>
+            <a:r>
+              <a:rPr sz="1100" b="0">
+                <a:solidFill>
+                  <a:srgbClr val="FFFFFF"/>
+                </a:solidFill>
+              </a:rPr>
+              <a:t/>
+            </a:r>
+          </a:p>
+        </p:txBody>
+      </p:sp>
+      <p:sp>
+        <p:nvSpPr>
+          <p:cNvPr id="35" name="TextBox 34"/>
+          <p:cNvSpPr txBox="1"/>
+          <p:nvPr/>
+        </p:nvSpPr>
+        <p:spPr>
+          <a:xfrm>
+            <a:off x="6172200" y="5376672"/>
+            <a:ext cx="5577840" cy="301752"/>
+          </a:xfrm>
+          <a:prstGeom prst="rect">
+            <a:avLst/>
+          </a:prstGeom>
+          <a:noFill/>
+        </p:spPr>
+        <p:txBody>
+          <a:bodyPr wrap="square">
+            <a:spAutoFit/>
+          </a:bodyPr>
+          <a:lstStyle/>
+          <a:p>
+            <a:pPr algn="l"/>
+            <a:r>
+              <a:rPr sz="1100" b="0">
+                <a:solidFill>
+                  <a:srgbClr val="00B0EA"/>
+                </a:solidFill>
+              </a:rPr>
+              <a:t># VKS cluster (Cluster CR)</a:t>
+            </a:r>
+          </a:p>
+        </p:txBody>
+      </p:sp>
+      <p:sp>
+        <p:nvSpPr>
+          <p:cNvPr id="36" name="TextBox 35"/>
+          <p:cNvSpPr txBox="1"/>
+          <p:nvPr/>
+        </p:nvSpPr>
+        <p:spPr>
+          <a:xfrm>
+            <a:off x="6172200" y="5669280"/>
+            <a:ext cx="5577840" cy="301752"/>
+          </a:xfrm>
+          <a:prstGeom prst="rect">
+            <a:avLst/>
+          </a:prstGeom>
+          <a:noFill/>
+        </p:spPr>
+        <p:txBody>
+          <a:bodyPr wrap="square">
+            <a:spAutoFit/>
+          </a:bodyPr>
+          <a:lstStyle/>
+          <a:p>
+            <a:pPr algn="l"/>
+            <a:r>
+              <a:rPr sz="1100" b="0">
+                <a:solidFill>
+                  <a:srgbClr val="FFFFFF"/>
+                </a:solidFill>
+              </a:rPr>
+              <a:t>kubectl apply -f common/vks-cluster.yaml</a:t>
+            </a:r>
+          </a:p>
+        </p:txBody>
+      </p:sp>
+    </p:spTree>
+  </p:cSld>
+  <p:clrMapOvr>
+    <a:masterClrMapping/>
+  </p:clrMapOvr>
+</p:sld>
+</file>
+
+<file path=ppt/slides/slide21.xml><?xml version="1.0" encoding="utf-8"?>
+<p:sld xmlns:a="http://schemas.openxmlformats.org/drawingml/2006/main" xmlns:p="http://schemas.openxmlformats.org/presentationml/2006/main" xmlns:r="http://schemas.openxmlformats.org/officeDocument/2006/relationships">
+  <p:cSld>
+    <p:spTree>
+      <p:nvGrpSpPr>
+        <p:cNvPr id="1" name=""/>
+        <p:cNvGrpSpPr/>
+        <p:nvPr/>
+      </p:nvGrpSpPr>
+      <p:grpSpPr/>
+      <p:sp>
+        <p:nvSpPr>
+          <p:cNvPr id="2" name="Rectangle 1"/>
+          <p:cNvSpPr/>
+          <p:nvPr/>
+        </p:nvSpPr>
+        <p:spPr>
+          <a:xfrm>
+            <a:off x="0" y="0"/>
+            <a:ext cx="12188952" cy="6858000"/>
+          </a:xfrm>
+          <a:prstGeom prst="rect">
+            <a:avLst/>
+          </a:prstGeom>
+          <a:solidFill>
+            <a:srgbClr val="1A1A2E"/>
+          </a:solidFill>
+          <a:ln>
+            <a:noFill/>
+          </a:ln>
+        </p:spPr>
+        <p:style>
+          <a:lnRef idx="1">
+            <a:schemeClr val="accent1"/>
+          </a:lnRef>
+          <a:fillRef idx="3">
+            <a:schemeClr val="accent1"/>
+          </a:fillRef>
+          <a:effectRef idx="2">
+            <a:schemeClr val="accent1"/>
+          </a:effectRef>
+          <a:fontRef idx="minor">
+            <a:schemeClr val="lt1"/>
+          </a:fontRef>
+        </p:style>
+        <p:txBody>
+          <a:bodyPr rtlCol="0" anchor="ctr"/>
+          <a:lstStyle/>
+          <a:p>
+            <a:pPr algn="ctr"/>
+          </a:p>
+        </p:txBody>
+      </p:sp>
+      <p:sp>
+        <p:nvSpPr>
+          <p:cNvPr id="3" name="Rectangle 2"/>
+          <p:cNvSpPr/>
+          <p:nvPr/>
+        </p:nvSpPr>
+        <p:spPr>
+          <a:xfrm>
+            <a:off x="0" y="0"/>
+            <a:ext cx="109728" cy="6858000"/>
+          </a:xfrm>
+          <a:prstGeom prst="rect">
+            <a:avLst/>
+          </a:prstGeom>
+          <a:solidFill>
+            <a:srgbClr val="00B0EA"/>
+          </a:solidFill>
+          <a:ln>
+            <a:noFill/>
+          </a:ln>
+        </p:spPr>
+        <p:style>
+          <a:lnRef idx="1">
+            <a:schemeClr val="accent1"/>
+          </a:lnRef>
+          <a:fillRef idx="3">
+            <a:schemeClr val="accent1"/>
+          </a:fillRef>
+          <a:effectRef idx="2">
+            <a:schemeClr val="accent1"/>
+          </a:effectRef>
+          <a:fontRef idx="minor">
+            <a:schemeClr val="lt1"/>
+          </a:fontRef>
+        </p:style>
+        <p:txBody>
+          <a:bodyPr rtlCol="0" anchor="ctr"/>
+          <a:lstStyle/>
+          <a:p>
+            <a:pPr algn="ctr"/>
+          </a:p>
+        </p:txBody>
+      </p:sp>
+      <p:sp>
+        <p:nvSpPr>
+          <p:cNvPr id="4" name="TextBox 3"/>
+          <p:cNvSpPr txBox="1"/>
+          <p:nvPr/>
+        </p:nvSpPr>
+        <p:spPr>
+          <a:xfrm>
+            <a:off x="274320" y="2286000"/>
+            <a:ext cx="11612880" cy="1645920"/>
+          </a:xfrm>
+          <a:prstGeom prst="rect">
+            <a:avLst/>
+          </a:prstGeom>
+          <a:noFill/>
+        </p:spPr>
+        <p:txBody>
+          <a:bodyPr wrap="square">
+            <a:spAutoFit/>
+          </a:bodyPr>
+          <a:lstStyle/>
+          <a:p>
+            <a:pPr algn="l"/>
+            <a:r>
+              <a:rPr sz="4000" b="1">
+                <a:solidFill>
+                  <a:srgbClr val="FFFFFF"/>
+                </a:solidFill>
+              </a:rPr>
+              <a:t>完成</a:t>
+            </a:r>
+          </a:p>
+        </p:txBody>
+      </p:sp>
+      <p:sp>
+        <p:nvSpPr>
+          <p:cNvPr id="5" name="TextBox 4"/>
+          <p:cNvSpPr txBox="1"/>
+          <p:nvPr/>
+        </p:nvSpPr>
+        <p:spPr>
+          <a:xfrm>
+            <a:off x="274320" y="4023360"/>
+            <a:ext cx="11612880" cy="1097280"/>
+          </a:xfrm>
+          <a:prstGeom prst="rect">
+            <a:avLst/>
+          </a:prstGeom>
+          <a:noFill/>
+        </p:spPr>
+        <p:txBody>
+          <a:bodyPr wrap="square">
+            <a:spAutoFit/>
+          </a:bodyPr>
+          <a:lstStyle/>
+          <a:p>
+            <a:pPr algn="l"/>
+            <a:r>
+              <a:rPr sz="2200" b="0">
+                <a:solidFill>
+                  <a:srgbClr val="00B0EA"/>
+                </a:solidFill>
+              </a:rPr>
+              <a:t>VKS on VCF 9.1 — 端到端自動化</a:t>
+            </a:r>
+          </a:p>
+        </p:txBody>
+      </p:sp>
+      <p:sp>
+        <p:nvSpPr>
+          <p:cNvPr id="6" name="TextBox 5"/>
+          <p:cNvSpPr txBox="1"/>
+          <p:nvPr/>
+        </p:nvSpPr>
+        <p:spPr>
+          <a:xfrm>
+            <a:off x="274320" y="4114800"/>
+            <a:ext cx="11612880" cy="411480"/>
+          </a:xfrm>
+          <a:prstGeom prst="rect">
+            <a:avLst/>
+          </a:prstGeom>
+          <a:noFill/>
+        </p:spPr>
+        <p:txBody>
+          <a:bodyPr wrap="square">
+            <a:spAutoFit/>
+          </a:bodyPr>
+          <a:lstStyle/>
+          <a:p>
+            <a:pPr algn="l"/>
+            <a:r>
+              <a:rPr sz="1600" b="0">
+                <a:solidFill>
+                  <a:srgbClr val="00B0EA"/>
+                </a:solidFill>
+              </a:rPr>
+              <a:t>→  GitHub Repo：github.com/kostenyang/vcf9.1vks</a:t>
+            </a:r>
+          </a:p>
+        </p:txBody>
+      </p:sp>
+      <p:sp>
+        <p:nvSpPr>
+          <p:cNvPr id="7" name="TextBox 6"/>
+          <p:cNvSpPr txBox="1"/>
+          <p:nvPr/>
+        </p:nvSpPr>
+        <p:spPr>
+          <a:xfrm>
+            <a:off x="274320" y="4507992"/>
+            <a:ext cx="11612880" cy="411480"/>
+          </a:xfrm>
+          <a:prstGeom prst="rect">
+            <a:avLst/>
+          </a:prstGeom>
+          <a:noFill/>
+        </p:spPr>
+        <p:txBody>
+          <a:bodyPr wrap="square">
+            <a:spAutoFit/>
+          </a:bodyPr>
+          <a:lstStyle/>
+          <a:p>
+            <a:pPr algn="l"/>
+            <a:r>
+              <a:rPr sz="1600" b="0">
+                <a:solidFill>
+                  <a:srgbClr val="00B0EA"/>
+                </a:solidFill>
+              </a:rPr>
+              <a:t>→  README.md  →  四種方法、IP 規劃、執行流程</a:t>
+            </a:r>
+          </a:p>
+        </p:txBody>
+      </p:sp>
+      <p:sp>
+        <p:nvSpPr>
+          <p:cNvPr id="8" name="TextBox 7"/>
+          <p:cNvSpPr txBox="1"/>
+          <p:nvPr/>
+        </p:nvSpPr>
+        <p:spPr>
+          <a:xfrm>
+            <a:off x="274320" y="4901184"/>
+            <a:ext cx="11612880" cy="411480"/>
+          </a:xfrm>
+          <a:prstGeom prst="rect">
+            <a:avLst/>
+          </a:prstGeom>
+          <a:noFill/>
+        </p:spPr>
+        <p:txBody>
+          <a:bodyPr wrap="square">
+            <a:spAutoFit/>
+          </a:bodyPr>
+          <a:lstStyle/>
+          <a:p>
+            <a:pPr algn="l"/>
+            <a:r>
+              <a:rPr sz="1600" b="0">
+                <a:solidFill>
+                  <a:srgbClr val="00B0EA"/>
+                </a:solidFill>
+              </a:rPr>
+              <a:t>→  research/05-test-execution.md  →  踩坑與修正完整紀錄</a:t>
+            </a:r>
+          </a:p>
+        </p:txBody>
+      </p:sp>
+      <p:sp>
+        <p:nvSpPr>
+          <p:cNvPr id="9" name="TextBox 8"/>
+          <p:cNvSpPr txBox="1"/>
+          <p:nvPr/>
+        </p:nvSpPr>
+        <p:spPr>
+          <a:xfrm>
+            <a:off x="274320" y="5294376"/>
+            <a:ext cx="11612880" cy="411480"/>
+          </a:xfrm>
+          <a:prstGeom prst="rect">
+            <a:avLst/>
+          </a:prstGeom>
+          <a:noFill/>
+        </p:spPr>
+        <p:txBody>
+          <a:bodyPr wrap="square">
+            <a:spAutoFit/>
+          </a:bodyPr>
+          <a:lstStyle/>
+          <a:p>
+            <a:pPr algn="l"/>
+            <a:r>
+              <a:rPr sz="1600" b="0">
+                <a:solidFill>
+                  <a:srgbClr val="00B0EA"/>
+                </a:solidFill>
+              </a:rPr>
+              <a:t>→  python/  →  Step1~4 Python 腳本（requests + kubernetes client）</a:t>
+            </a:r>
+          </a:p>
+        </p:txBody>
+      </p:sp>
+      <p:sp>
+        <p:nvSpPr>
+          <p:cNvPr id="10" name="TextBox 9"/>
+          <p:cNvSpPr txBox="1"/>
+          <p:nvPr/>
+        </p:nvSpPr>
+        <p:spPr>
+          <a:xfrm>
+            <a:off x="274320" y="5687568"/>
+            <a:ext cx="11612880" cy="411480"/>
+          </a:xfrm>
+          <a:prstGeom prst="rect">
+            <a:avLst/>
+          </a:prstGeom>
+          <a:noFill/>
+        </p:spPr>
+        <p:txBody>
+          <a:bodyPr wrap="square">
+            <a:spAutoFit/>
+          </a:bodyPr>
+          <a:lstStyle/>
+          <a:p>
+            <a:pPr algn="l"/>
+            <a:r>
+              <a:rPr sz="1600" b="0">
+                <a:solidFill>
+                  <a:srgbClr val="00B0EA"/>
+                </a:solidFill>
+              </a:rPr>
+              <a:t>→  common/vks-cluster.yaml  →  ClusterClass CR（含 Pod CIDR + MHC 修正）</a:t>
+            </a:r>
+          </a:p>
+        </p:txBody>
+      </p:sp>
+      <p:sp>
+        <p:nvSpPr>
+          <p:cNvPr id="11" name="TextBox 10"/>
+          <p:cNvSpPr txBox="1"/>
+          <p:nvPr/>
+        </p:nvSpPr>
+        <p:spPr>
+          <a:xfrm>
+            <a:off x="274320" y="6080760"/>
+            <a:ext cx="11612880" cy="411480"/>
+          </a:xfrm>
+          <a:prstGeom prst="rect">
+            <a:avLst/>
+          </a:prstGeom>
+          <a:noFill/>
+        </p:spPr>
+        <p:txBody>
+          <a:bodyPr wrap="square">
+            <a:spAutoFit/>
+          </a:bodyPr>
+          <a:lstStyle/>
+          <a:p>
+            <a:pPr algn="l"/>
+            <a:r>
+              <a:rPr sz="1600" b="0">
+                <a:solidFill>
+                  <a:srgbClr val="00B0EA"/>
+                </a:solidFill>
+              </a:rPr>
+              <a:t>→  screenshots/  →  32 張實機截圖（含 NSX + Supervisor Configure 前置設定）</a:t>
+            </a:r>
+          </a:p>
+        </p:txBody>
+      </p:sp>
+    </p:spTree>
+  </p:cSld>
+  <p:clrMapOvr>
+    <a:masterClrMapping/>
+  </p:clrMapOvr>
+</p:sld>
+</file>
+
 <file path=ppt/slides/slide3.xml><?xml version="1.0" encoding="utf-8"?>
 <p:sld xmlns:a="http://schemas.openxmlformats.org/drawingml/2006/main" xmlns:p="http://schemas.openxmlformats.org/presentationml/2006/main" xmlns:r="http://schemas.openxmlformats.org/officeDocument/2006/relationships">
   <p:cSld>
@@ -13066,14 +15575,14 @@
                   <a:srgbClr val="FFFFFF"/>
                 </a:solidFill>
               </a:rPr>
-              <a:t>Supervisor 運行狀態</a:t>
+              <a:t>NSX 前置設定：IP Address Blocks</a:t>
             </a:r>
           </a:p>
         </p:txBody>
       </p:sp>
       <p:pic>
         <p:nvPicPr>
-          <p:cNvPr id="6" name="Picture 5" descr="30-supervisor-running.jpg"/>
+          <p:cNvPr id="6" name="Picture 5" descr="40-nsx-ip-blocks.jpg"/>
           <p:cNvPicPr>
             <a:picLocks noChangeAspect="1"/>
           </p:cNvPicPr>
@@ -13088,13 +15597,464 @@
         <p:spPr>
           <a:xfrm>
             <a:off x="274320" y="1005840"/>
-            <a:ext cx="11612880" cy="5577840"/>
+            <a:ext cx="7772400" cy="5303520"/>
           </a:xfrm>
           <a:prstGeom prst="rect">
             <a:avLst/>
           </a:prstGeom>
         </p:spPr>
       </p:pic>
+      <p:sp>
+        <p:nvSpPr>
+          <p:cNvPr id="7" name="Rectangle 6"/>
+          <p:cNvSpPr/>
+          <p:nvPr/>
+        </p:nvSpPr>
+        <p:spPr>
+          <a:xfrm>
+            <a:off x="8321040" y="1005840"/>
+            <a:ext cx="3657600" cy="5303520"/>
+          </a:xfrm>
+          <a:prstGeom prst="rect">
+            <a:avLst/>
+          </a:prstGeom>
+          <a:solidFill>
+            <a:srgbClr val="1A1A2E"/>
+          </a:solidFill>
+          <a:ln>
+            <a:noFill/>
+          </a:ln>
+        </p:spPr>
+        <p:style>
+          <a:lnRef idx="1">
+            <a:schemeClr val="accent1"/>
+          </a:lnRef>
+          <a:fillRef idx="3">
+            <a:schemeClr val="accent1"/>
+          </a:fillRef>
+          <a:effectRef idx="2">
+            <a:schemeClr val="accent1"/>
+          </a:effectRef>
+          <a:fontRef idx="minor">
+            <a:schemeClr val="lt1"/>
+          </a:fontRef>
+        </p:style>
+        <p:txBody>
+          <a:bodyPr rtlCol="0" anchor="ctr"/>
+          <a:lstStyle/>
+          <a:p>
+            <a:pPr algn="ctr"/>
+          </a:p>
+        </p:txBody>
+      </p:sp>
+      <p:sp>
+        <p:nvSpPr>
+          <p:cNvPr id="8" name="TextBox 7"/>
+          <p:cNvSpPr txBox="1"/>
+          <p:nvPr/>
+        </p:nvSpPr>
+        <p:spPr>
+          <a:xfrm>
+            <a:off x="8412480" y="1188720"/>
+            <a:ext cx="3383280" cy="292608"/>
+          </a:xfrm>
+          <a:prstGeom prst="rect">
+            <a:avLst/>
+          </a:prstGeom>
+          <a:noFill/>
+        </p:spPr>
+        <p:txBody>
+          <a:bodyPr wrap="square">
+            <a:spAutoFit/>
+          </a:bodyPr>
+          <a:lstStyle/>
+          <a:p>
+            <a:pPr algn="l"/>
+            <a:r>
+              <a:rPr sz="1200" b="0">
+                <a:solidFill>
+                  <a:srgbClr val="FFFFFF"/>
+                </a:solidFill>
+              </a:rPr>
+              <a:t>External Block（SNAT/LB 來源）</a:t>
+            </a:r>
+          </a:p>
+        </p:txBody>
+      </p:sp>
+      <p:sp>
+        <p:nvSpPr>
+          <p:cNvPr id="9" name="TextBox 8"/>
+          <p:cNvSpPr txBox="1"/>
+          <p:nvPr/>
+        </p:nvSpPr>
+        <p:spPr>
+          <a:xfrm>
+            <a:off x="8412480" y="1527048"/>
+            <a:ext cx="3383280" cy="292608"/>
+          </a:xfrm>
+          <a:prstGeom prst="rect">
+            <a:avLst/>
+          </a:prstGeom>
+          <a:noFill/>
+        </p:spPr>
+        <p:txBody>
+          <a:bodyPr wrap="square">
+            <a:spAutoFit/>
+          </a:bodyPr>
+          <a:lstStyle/>
+          <a:p>
+            <a:pPr algn="l"/>
+            <a:r>
+              <a:rPr sz="1200" b="0">
+                <a:solidFill>
+                  <a:srgbClr val="FFFFFF"/>
+                </a:solidFill>
+              </a:rPr>
+              <a:t>  vcf-m02-vks-ext-ipblock</a:t>
+            </a:r>
+          </a:p>
+        </p:txBody>
+      </p:sp>
+      <p:sp>
+        <p:nvSpPr>
+          <p:cNvPr id="10" name="TextBox 9"/>
+          <p:cNvSpPr txBox="1"/>
+          <p:nvPr/>
+        </p:nvSpPr>
+        <p:spPr>
+          <a:xfrm>
+            <a:off x="8412480" y="1865376"/>
+            <a:ext cx="3383280" cy="292608"/>
+          </a:xfrm>
+          <a:prstGeom prst="rect">
+            <a:avLst/>
+          </a:prstGeom>
+          <a:noFill/>
+        </p:spPr>
+        <p:txBody>
+          <a:bodyPr wrap="square">
+            <a:spAutoFit/>
+          </a:bodyPr>
+          <a:lstStyle/>
+          <a:p>
+            <a:pPr algn="l"/>
+            <a:r>
+              <a:rPr sz="1200" b="0">
+                <a:solidFill>
+                  <a:srgbClr val="FFFFFF"/>
+                </a:solidFill>
+              </a:rPr>
+              <a:t>  192.168.114.128/26</a:t>
+            </a:r>
+          </a:p>
+        </p:txBody>
+      </p:sp>
+      <p:sp>
+        <p:nvSpPr>
+          <p:cNvPr id="11" name="TextBox 10"/>
+          <p:cNvSpPr txBox="1"/>
+          <p:nvPr/>
+        </p:nvSpPr>
+        <p:spPr>
+          <a:xfrm>
+            <a:off x="8412480" y="2203704"/>
+            <a:ext cx="3383280" cy="292608"/>
+          </a:xfrm>
+          <a:prstGeom prst="rect">
+            <a:avLst/>
+          </a:prstGeom>
+          <a:noFill/>
+        </p:spPr>
+        <p:txBody>
+          <a:bodyPr wrap="square">
+            <a:spAutoFit/>
+          </a:bodyPr>
+          <a:lstStyle/>
+          <a:p>
+            <a:pPr algn="l"/>
+            <a:r>
+              <a:rPr sz="1200" b="0">
+                <a:solidFill>
+                  <a:srgbClr val="FFFFFF"/>
+                </a:solidFill>
+              </a:rPr>
+              <a:t>  /26 邊界對齊！(.128,.192,.0)</a:t>
+            </a:r>
+          </a:p>
+        </p:txBody>
+      </p:sp>
+      <p:sp>
+        <p:nvSpPr>
+          <p:cNvPr id="12" name="TextBox 11"/>
+          <p:cNvSpPr txBox="1"/>
+          <p:nvPr/>
+        </p:nvSpPr>
+        <p:spPr>
+          <a:xfrm>
+            <a:off x="8412480" y="2542032"/>
+            <a:ext cx="3383280" cy="292608"/>
+          </a:xfrm>
+          <a:prstGeom prst="rect">
+            <a:avLst/>
+          </a:prstGeom>
+          <a:noFill/>
+        </p:spPr>
+        <p:txBody>
+          <a:bodyPr wrap="square">
+            <a:spAutoFit/>
+          </a:bodyPr>
+          <a:lstStyle/>
+          <a:p>
+            <a:pPr algn="l"/>
+            <a:r>
+              <a:rPr sz="1200" b="0">
+                <a:solidFill>
+                  <a:srgbClr val="FFFFFF"/>
+                </a:solidFill>
+              </a:rPr>
+              <a:t/>
+            </a:r>
+          </a:p>
+        </p:txBody>
+      </p:sp>
+      <p:sp>
+        <p:nvSpPr>
+          <p:cNvPr id="13" name="TextBox 12"/>
+          <p:cNvSpPr txBox="1"/>
+          <p:nvPr/>
+        </p:nvSpPr>
+        <p:spPr>
+          <a:xfrm>
+            <a:off x="8412480" y="2880360"/>
+            <a:ext cx="3383280" cy="292608"/>
+          </a:xfrm>
+          <a:prstGeom prst="rect">
+            <a:avLst/>
+          </a:prstGeom>
+          <a:noFill/>
+        </p:spPr>
+        <p:txBody>
+          <a:bodyPr wrap="square">
+            <a:spAutoFit/>
+          </a:bodyPr>
+          <a:lstStyle/>
+          <a:p>
+            <a:pPr algn="l"/>
+            <a:r>
+              <a:rPr sz="1200" b="0">
+                <a:solidFill>
+                  <a:srgbClr val="FFFFFF"/>
+                </a:solidFill>
+              </a:rPr>
+              <a:t>Private TGW Block（VKS 必要）</a:t>
+            </a:r>
+          </a:p>
+        </p:txBody>
+      </p:sp>
+      <p:sp>
+        <p:nvSpPr>
+          <p:cNvPr id="14" name="TextBox 13"/>
+          <p:cNvSpPr txBox="1"/>
+          <p:nvPr/>
+        </p:nvSpPr>
+        <p:spPr>
+          <a:xfrm>
+            <a:off x="8412480" y="3218688"/>
+            <a:ext cx="3383280" cy="292608"/>
+          </a:xfrm>
+          <a:prstGeom prst="rect">
+            <a:avLst/>
+          </a:prstGeom>
+          <a:noFill/>
+        </p:spPr>
+        <p:txBody>
+          <a:bodyPr wrap="square">
+            <a:spAutoFit/>
+          </a:bodyPr>
+          <a:lstStyle/>
+          <a:p>
+            <a:pPr algn="l"/>
+            <a:r>
+              <a:rPr sz="1200" b="0">
+                <a:solidFill>
+                  <a:srgbClr val="FFFFFF"/>
+                </a:solidFill>
+              </a:rPr>
+              <a:t>  vcf-m02-vks-priv-tgw</a:t>
+            </a:r>
+          </a:p>
+        </p:txBody>
+      </p:sp>
+      <p:sp>
+        <p:nvSpPr>
+          <p:cNvPr id="15" name="TextBox 14"/>
+          <p:cNvSpPr txBox="1"/>
+          <p:nvPr/>
+        </p:nvSpPr>
+        <p:spPr>
+          <a:xfrm>
+            <a:off x="8412480" y="3557016"/>
+            <a:ext cx="3383280" cy="292608"/>
+          </a:xfrm>
+          <a:prstGeom prst="rect">
+            <a:avLst/>
+          </a:prstGeom>
+          <a:noFill/>
+        </p:spPr>
+        <p:txBody>
+          <a:bodyPr wrap="square">
+            <a:spAutoFit/>
+          </a:bodyPr>
+          <a:lstStyle/>
+          <a:p>
+            <a:pPr algn="l"/>
+            <a:r>
+              <a:rPr sz="1200" b="0">
+                <a:solidFill>
+                  <a:srgbClr val="FFFFFF"/>
+                </a:solidFill>
+              </a:rPr>
+              <a:t>  172.30.0.0/16</a:t>
+            </a:r>
+          </a:p>
+        </p:txBody>
+      </p:sp>
+      <p:sp>
+        <p:nvSpPr>
+          <p:cNvPr id="16" name="TextBox 15"/>
+          <p:cNvSpPr txBox="1"/>
+          <p:nvPr/>
+        </p:nvSpPr>
+        <p:spPr>
+          <a:xfrm>
+            <a:off x="8412480" y="3895344"/>
+            <a:ext cx="3383280" cy="292608"/>
+          </a:xfrm>
+          <a:prstGeom prst="rect">
+            <a:avLst/>
+          </a:prstGeom>
+          <a:noFill/>
+        </p:spPr>
+        <p:txBody>
+          <a:bodyPr wrap="square">
+            <a:spAutoFit/>
+          </a:bodyPr>
+          <a:lstStyle/>
+          <a:p>
+            <a:pPr algn="l"/>
+            <a:r>
+              <a:rPr sz="1200" b="0">
+                <a:solidFill>
+                  <a:srgbClr val="FFFFFF"/>
+                </a:solidFill>
+              </a:rPr>
+              <a:t>  /16 硬規定</a:t>
+            </a:r>
+          </a:p>
+        </p:txBody>
+      </p:sp>
+      <p:sp>
+        <p:nvSpPr>
+          <p:cNvPr id="17" name="TextBox 16"/>
+          <p:cNvSpPr txBox="1"/>
+          <p:nvPr/>
+        </p:nvSpPr>
+        <p:spPr>
+          <a:xfrm>
+            <a:off x="8412480" y="4233672"/>
+            <a:ext cx="3383280" cy="292608"/>
+          </a:xfrm>
+          <a:prstGeom prst="rect">
+            <a:avLst/>
+          </a:prstGeom>
+          <a:noFill/>
+        </p:spPr>
+        <p:txBody>
+          <a:bodyPr wrap="square">
+            <a:spAutoFit/>
+          </a:bodyPr>
+          <a:lstStyle/>
+          <a:p>
+            <a:pPr algn="l"/>
+            <a:r>
+              <a:rPr sz="1200" b="0">
+                <a:solidFill>
+                  <a:srgbClr val="FFFFFF"/>
+                </a:solidFill>
+              </a:rPr>
+              <a:t/>
+            </a:r>
+          </a:p>
+        </p:txBody>
+      </p:sp>
+      <p:sp>
+        <p:nvSpPr>
+          <p:cNvPr id="18" name="TextBox 17"/>
+          <p:cNvSpPr txBox="1"/>
+          <p:nvPr/>
+        </p:nvSpPr>
+        <p:spPr>
+          <a:xfrm>
+            <a:off x="8412480" y="4572000"/>
+            <a:ext cx="3383280" cy="292608"/>
+          </a:xfrm>
+          <a:prstGeom prst="rect">
+            <a:avLst/>
+          </a:prstGeom>
+          <a:noFill/>
+        </p:spPr>
+        <p:txBody>
+          <a:bodyPr wrap="square">
+            <a:spAutoFit/>
+          </a:bodyPr>
+          <a:lstStyle/>
+          <a:p>
+            <a:pPr algn="l"/>
+            <a:r>
+              <a:rPr sz="1200" b="0">
+                <a:solidFill>
+                  <a:srgbClr val="FFFFFF"/>
+                </a:solidFill>
+              </a:rPr>
+              <a:t>(系統預設 default--kube-s...</a:t>
+            </a:r>
+          </a:p>
+        </p:txBody>
+      </p:sp>
+      <p:sp>
+        <p:nvSpPr>
+          <p:cNvPr id="19" name="TextBox 18"/>
+          <p:cNvSpPr txBox="1"/>
+          <p:nvPr/>
+        </p:nvSpPr>
+        <p:spPr>
+          <a:xfrm>
+            <a:off x="8412480" y="4910328"/>
+            <a:ext cx="3383280" cy="292608"/>
+          </a:xfrm>
+          <a:prstGeom prst="rect">
+            <a:avLst/>
+          </a:prstGeom>
+          <a:noFill/>
+        </p:spPr>
+        <p:txBody>
+          <a:bodyPr wrap="square">
+            <a:spAutoFit/>
+          </a:bodyPr>
+          <a:lstStyle/>
+          <a:p>
+            <a:pPr algn="l"/>
+            <a:r>
+              <a:rPr sz="1200" b="0">
+                <a:solidFill>
+                  <a:srgbClr val="FFFFFF"/>
+                </a:solidFill>
+              </a:rPr>
+              <a:t>  172.28.0.0/16 勿動)</a:t>
+            </a:r>
+          </a:p>
+        </p:txBody>
+      </p:sp>
     </p:spTree>
   </p:cSld>
   <p:clrMapOvr>
@@ -13271,14 +16231,14 @@
                   <a:srgbClr val="FFFFFF"/>
                 </a:solidFill>
               </a:rPr>
-              <a:t>必備：兩個 Content Library</a:t>
+              <a:t>NSX 前置設定：VPC Connectivity Profile</a:t>
             </a:r>
           </a:p>
         </p:txBody>
       </p:sp>
       <p:pic>
         <p:nvPicPr>
-          <p:cNvPr id="6" name="Picture 5" descr="34-content-library-list.jpg"/>
+          <p:cNvPr id="6" name="Picture 5" descr="41-nsx-vpc-profiles.jpg"/>
           <p:cNvPicPr>
             <a:picLocks noChangeAspect="1"/>
           </p:cNvPicPr>
@@ -13293,7 +16253,7 @@
         <p:spPr>
           <a:xfrm>
             <a:off x="274320" y="1005840"/>
-            <a:ext cx="7315200" cy="5029200"/>
+            <a:ext cx="7772400" cy="5303520"/>
           </a:xfrm>
           <a:prstGeom prst="rect">
             <a:avLst/>
@@ -13308,8 +16268,8 @@
         </p:nvSpPr>
         <p:spPr>
           <a:xfrm>
-            <a:off x="7772400" y="1005840"/>
-            <a:ext cx="4114800" cy="5029200"/>
+            <a:off x="8321040" y="1005840"/>
+            <a:ext cx="3657600" cy="5303520"/>
           </a:xfrm>
           <a:prstGeom prst="rect">
             <a:avLst/>
@@ -13351,8 +16311,8 @@
         </p:nvSpPr>
         <p:spPr>
           <a:xfrm>
-            <a:off x="7863840" y="1188720"/>
-            <a:ext cx="3840480" cy="320040"/>
+            <a:off x="8412480" y="1188720"/>
+            <a:ext cx="3383280" cy="292608"/>
           </a:xfrm>
           <a:prstGeom prst="rect">
             <a:avLst/>
@@ -13372,7 +16332,7 @@
                   <a:srgbClr val="FFFFFF"/>
                 </a:solidFill>
               </a:rPr>
-              <a:t>tkg-content-library</a:t>
+              <a:t>vcf-m02-vks-vpc-profile</a:t>
             </a:r>
           </a:p>
         </p:txBody>
@@ -13385,8 +16345,8 @@
         </p:nvSpPr>
         <p:spPr>
           <a:xfrm>
-            <a:off x="7863840" y="1490472"/>
-            <a:ext cx="3840480" cy="320040"/>
+            <a:off x="8412480" y="1527048"/>
+            <a:ext cx="3383280" cy="292608"/>
           </a:xfrm>
           <a:prstGeom prst="rect">
             <a:avLst/>
@@ -13406,7 +16366,7 @@
                   <a:srgbClr val="FFFFFF"/>
                 </a:solidFill>
               </a:rPr>
-              <a:t>  → Supervisor image</a:t>
+              <a:t>  Transit Gateway:</a:t>
             </a:r>
           </a:p>
         </p:txBody>
@@ -13419,8 +16379,8 @@
         </p:nvSpPr>
         <p:spPr>
           <a:xfrm>
-            <a:off x="7863840" y="1792224"/>
-            <a:ext cx="3840480" cy="320040"/>
+            <a:off x="8412480" y="1865376"/>
+            <a:ext cx="3383280" cy="292608"/>
           </a:xfrm>
           <a:prstGeom prst="rect">
             <a:avLst/>
@@ -13440,7 +16400,7 @@
                   <a:srgbClr val="FFFFFF"/>
                 </a:solidFill>
               </a:rPr>
-              <a:t>  → 訂閱 .../supervisor/v1/latest/lib.json</a:t>
+              <a:t>    Default Transit Gateway</a:t>
             </a:r>
           </a:p>
         </p:txBody>
@@ -13453,8 +16413,8 @@
         </p:nvSpPr>
         <p:spPr>
           <a:xfrm>
-            <a:off x="7863840" y="2093976"/>
-            <a:ext cx="3840480" cy="320040"/>
+            <a:off x="8412480" y="2203704"/>
+            <a:ext cx="3383280" cy="292608"/>
           </a:xfrm>
           <a:prstGeom prst="rect">
             <a:avLst/>
@@ -13474,6 +16434,40 @@
                   <a:srgbClr val="FFFFFF"/>
                 </a:solidFill>
               </a:rPr>
+              <a:t>    (DTGW / distributed)</a:t>
+            </a:r>
+          </a:p>
+        </p:txBody>
+      </p:sp>
+      <p:sp>
+        <p:nvSpPr>
+          <p:cNvPr id="12" name="TextBox 11"/>
+          <p:cNvSpPr txBox="1"/>
+          <p:nvPr/>
+        </p:nvSpPr>
+        <p:spPr>
+          <a:xfrm>
+            <a:off x="8412480" y="2542032"/>
+            <a:ext cx="3383280" cy="292608"/>
+          </a:xfrm>
+          <a:prstGeom prst="rect">
+            <a:avLst/>
+          </a:prstGeom>
+          <a:noFill/>
+        </p:spPr>
+        <p:txBody>
+          <a:bodyPr wrap="square">
+            <a:spAutoFit/>
+          </a:bodyPr>
+          <a:lstStyle/>
+          <a:p>
+            <a:pPr algn="l"/>
+            <a:r>
+              <a:rPr sz="1200" b="0">
+                <a:solidFill>
+                  <a:srgbClr val="FFFFFF"/>
+                </a:solidFill>
+              </a:rPr>
               <a:t/>
             </a:r>
           </a:p>
@@ -13481,14 +16475,14 @@
       </p:sp>
       <p:sp>
         <p:nvSpPr>
-          <p:cNvPr id="12" name="TextBox 11"/>
-          <p:cNvSpPr txBox="1"/>
-          <p:nvPr/>
-        </p:nvSpPr>
-        <p:spPr>
-          <a:xfrm>
-            <a:off x="7863840" y="2395728"/>
-            <a:ext cx="3840480" cy="320040"/>
+          <p:cNvPr id="13" name="TextBox 12"/>
+          <p:cNvSpPr txBox="1"/>
+          <p:nvPr/>
+        </p:nvSpPr>
+        <p:spPr>
+          <a:xfrm>
+            <a:off x="8412480" y="2880360"/>
+            <a:ext cx="3383280" cy="292608"/>
           </a:xfrm>
           <a:prstGeom prst="rect">
             <a:avLst/>
@@ -13508,21 +16502,21 @@
                   <a:srgbClr val="FFFFFF"/>
                 </a:solidFill>
               </a:rPr>
-              <a:t>tkg-tkr-library</a:t>
-            </a:r>
-          </a:p>
-        </p:txBody>
-      </p:sp>
-      <p:sp>
-        <p:nvSpPr>
-          <p:cNvPr id="13" name="TextBox 12"/>
-          <p:cNvSpPr txBox="1"/>
-          <p:nvPr/>
-        </p:nvSpPr>
-        <p:spPr>
-          <a:xfrm>
-            <a:off x="7863840" y="2697480"/>
-            <a:ext cx="3840480" cy="320040"/>
+              <a:t>  External IP Blocks:</a:t>
+            </a:r>
+          </a:p>
+        </p:txBody>
+      </p:sp>
+      <p:sp>
+        <p:nvSpPr>
+          <p:cNvPr id="14" name="TextBox 13"/>
+          <p:cNvSpPr txBox="1"/>
+          <p:nvPr/>
+        </p:nvSpPr>
+        <p:spPr>
+          <a:xfrm>
+            <a:off x="8412480" y="3218688"/>
+            <a:ext cx="3383280" cy="292608"/>
           </a:xfrm>
           <a:prstGeom prst="rect">
             <a:avLst/>
@@ -13542,21 +16536,21 @@
                   <a:srgbClr val="FFFFFF"/>
                 </a:solidFill>
               </a:rPr>
-              <a:t>  → TKG node image (Photon OS)</a:t>
-            </a:r>
-          </a:p>
-        </p:txBody>
-      </p:sp>
-      <p:sp>
-        <p:nvSpPr>
-          <p:cNvPr id="14" name="TextBox 13"/>
-          <p:cNvSpPr txBox="1"/>
-          <p:nvPr/>
-        </p:nvSpPr>
-        <p:spPr>
-          <a:xfrm>
-            <a:off x="7863840" y="2999232"/>
-            <a:ext cx="3840480" cy="320040"/>
+              <a:t>    vcf-m02-vks-ext-ipblock</a:t>
+            </a:r>
+          </a:p>
+        </p:txBody>
+      </p:sp>
+      <p:sp>
+        <p:nvSpPr>
+          <p:cNvPr id="15" name="TextBox 14"/>
+          <p:cNvSpPr txBox="1"/>
+          <p:nvPr/>
+        </p:nvSpPr>
+        <p:spPr>
+          <a:xfrm>
+            <a:off x="8412480" y="3557016"/>
+            <a:ext cx="3383280" cy="292608"/>
           </a:xfrm>
           <a:prstGeom prst="rect">
             <a:avLst/>
@@ -13576,21 +16570,21 @@
                   <a:srgbClr val="FFFFFF"/>
                 </a:solidFill>
               </a:rPr>
-              <a:t>  → 訂閱 .../v2/latest/lib.json</a:t>
-            </a:r>
-          </a:p>
-        </p:txBody>
-      </p:sp>
-      <p:sp>
-        <p:nvSpPr>
-          <p:cNvPr id="15" name="TextBox 14"/>
-          <p:cNvSpPr txBox="1"/>
-          <p:nvPr/>
-        </p:nvSpPr>
-        <p:spPr>
-          <a:xfrm>
-            <a:off x="7863840" y="3300984"/>
-            <a:ext cx="3840480" cy="320040"/>
+              <a:t/>
+            </a:r>
+          </a:p>
+        </p:txBody>
+      </p:sp>
+      <p:sp>
+        <p:nvSpPr>
+          <p:cNvPr id="16" name="TextBox 15"/>
+          <p:cNvSpPr txBox="1"/>
+          <p:nvPr/>
+        </p:nvSpPr>
+        <p:spPr>
+          <a:xfrm>
+            <a:off x="8412480" y="3895344"/>
+            <a:ext cx="3383280" cy="292608"/>
           </a:xfrm>
           <a:prstGeom prst="rect">
             <a:avLst/>
@@ -13610,21 +16604,21 @@
                   <a:srgbClr val="FFFFFF"/>
                 </a:solidFill>
               </a:rPr>
-              <a:t>  → 7.69 GB / 123 items</a:t>
-            </a:r>
-          </a:p>
-        </p:txBody>
-      </p:sp>
-      <p:sp>
-        <p:nvSpPr>
-          <p:cNvPr id="16" name="TextBox 15"/>
-          <p:cNvSpPr txBox="1"/>
-          <p:nvPr/>
-        </p:nvSpPr>
-        <p:spPr>
-          <a:xfrm>
-            <a:off x="7863840" y="3602736"/>
-            <a:ext cx="3840480" cy="320040"/>
+              <a:t>  Private TGW IP Blocks:</a:t>
+            </a:r>
+          </a:p>
+        </p:txBody>
+      </p:sp>
+      <p:sp>
+        <p:nvSpPr>
+          <p:cNvPr id="17" name="TextBox 16"/>
+          <p:cNvSpPr txBox="1"/>
+          <p:nvPr/>
+        </p:nvSpPr>
+        <p:spPr>
+          <a:xfrm>
+            <a:off x="8412480" y="4233672"/>
+            <a:ext cx="3383280" cy="292608"/>
           </a:xfrm>
           <a:prstGeom prst="rect">
             <a:avLst/>
@@ -13644,6 +16638,40 @@
                   <a:srgbClr val="FFFFFF"/>
                 </a:solidFill>
               </a:rPr>
+              <a:t>    vcf-m02-vks-priv-tgw</a:t>
+            </a:r>
+          </a:p>
+        </p:txBody>
+      </p:sp>
+      <p:sp>
+        <p:nvSpPr>
+          <p:cNvPr id="18" name="TextBox 17"/>
+          <p:cNvSpPr txBox="1"/>
+          <p:nvPr/>
+        </p:nvSpPr>
+        <p:spPr>
+          <a:xfrm>
+            <a:off x="8412480" y="4572000"/>
+            <a:ext cx="3383280" cy="292608"/>
+          </a:xfrm>
+          <a:prstGeom prst="rect">
+            <a:avLst/>
+          </a:prstGeom>
+          <a:noFill/>
+        </p:spPr>
+        <p:txBody>
+          <a:bodyPr wrap="square">
+            <a:spAutoFit/>
+          </a:bodyPr>
+          <a:lstStyle/>
+          <a:p>
+            <a:pPr algn="l"/>
+            <a:r>
+              <a:rPr sz="1200" b="0">
+                <a:solidFill>
+                  <a:srgbClr val="FFFFFF"/>
+                </a:solidFill>
+              </a:rPr>
               <a:t/>
             </a:r>
           </a:p>
@@ -13651,14 +16679,14 @@
       </p:sp>
       <p:sp>
         <p:nvSpPr>
-          <p:cNvPr id="17" name="TextBox 16"/>
-          <p:cNvSpPr txBox="1"/>
-          <p:nvPr/>
-        </p:nvSpPr>
-        <p:spPr>
-          <a:xfrm>
-            <a:off x="7863840" y="3904488"/>
-            <a:ext cx="3840480" cy="320040"/>
+          <p:cNvPr id="19" name="TextBox 18"/>
+          <p:cNvSpPr txBox="1"/>
+          <p:nvPr/>
+        </p:nvSpPr>
+        <p:spPr>
+          <a:xfrm>
+            <a:off x="8412480" y="4910328"/>
+            <a:ext cx="3383280" cy="292608"/>
           </a:xfrm>
           <a:prstGeom prst="rect">
             <a:avLst/>
@@ -13678,109 +16706,7 @@
                   <a:srgbClr val="FFFFFF"/>
                 </a:solidFill>
               </a:rPr>
-              <a:t>⚠️ 少了 tkr-library</a:t>
-            </a:r>
-          </a:p>
-        </p:txBody>
-      </p:sp>
-      <p:sp>
-        <p:nvSpPr>
-          <p:cNvPr id="18" name="TextBox 17"/>
-          <p:cNvSpPr txBox="1"/>
-          <p:nvPr/>
-        </p:nvSpPr>
-        <p:spPr>
-          <a:xfrm>
-            <a:off x="7863840" y="4206240"/>
-            <a:ext cx="3840480" cy="320040"/>
-          </a:xfrm>
-          <a:prstGeom prst="rect">
-            <a:avLst/>
-          </a:prstGeom>
-          <a:noFill/>
-        </p:spPr>
-        <p:txBody>
-          <a:bodyPr wrap="square">
-            <a:spAutoFit/>
-          </a:bodyPr>
-          <a:lstStyle/>
-          <a:p>
-            <a:pPr algn="l"/>
-            <a:r>
-              <a:rPr sz="1200" b="0">
-                <a:solidFill>
-                  <a:srgbClr val="FFFFFF"/>
-                </a:solidFill>
-              </a:rPr>
-              <a:t>  tkr-resolver 報</a:t>
-            </a:r>
-          </a:p>
-        </p:txBody>
-      </p:sp>
-      <p:sp>
-        <p:nvSpPr>
-          <p:cNvPr id="19" name="TextBox 18"/>
-          <p:cNvSpPr txBox="1"/>
-          <p:nvPr/>
-        </p:nvSpPr>
-        <p:spPr>
-          <a:xfrm>
-            <a:off x="7863840" y="4507992"/>
-            <a:ext cx="3840480" cy="320040"/>
-          </a:xfrm>
-          <a:prstGeom prst="rect">
-            <a:avLst/>
-          </a:prstGeom>
-          <a:noFill/>
-        </p:spPr>
-        <p:txBody>
-          <a:bodyPr wrap="square">
-            <a:spAutoFit/>
-          </a:bodyPr>
-          <a:lstStyle/>
-          <a:p>
-            <a:pPr algn="l"/>
-            <a:r>
-              <a:rPr sz="1200" b="0">
-                <a:solidFill>
-                  <a:srgbClr val="FFFFFF"/>
-                </a:solidFill>
-              </a:rPr>
-              <a:t>  "Could not resolve KR/OSImage"</a:t>
-            </a:r>
-          </a:p>
-        </p:txBody>
-      </p:sp>
-      <p:sp>
-        <p:nvSpPr>
-          <p:cNvPr id="20" name="TextBox 19"/>
-          <p:cNvSpPr txBox="1"/>
-          <p:nvPr/>
-        </p:nvSpPr>
-        <p:spPr>
-          <a:xfrm>
-            <a:off x="7863840" y="4809744"/>
-            <a:ext cx="3840480" cy="320040"/>
-          </a:xfrm>
-          <a:prstGeom prst="rect">
-            <a:avLst/>
-          </a:prstGeom>
-          <a:noFill/>
-        </p:spPr>
-        <p:txBody>
-          <a:bodyPr wrap="square">
-            <a:spAutoFit/>
-          </a:bodyPr>
-          <a:lstStyle/>
-          <a:p>
-            <a:pPr algn="l"/>
-            <a:r>
-              <a:rPr sz="1200" b="0">
-                <a:solidFill>
-                  <a:srgbClr val="FFFFFF"/>
-                </a:solidFill>
-              </a:rPr>
-              <a:t>  → cluster 建不起來</a:t>
+              <a:t>  Status: Success ✅</a:t>
             </a:r>
           </a:p>
         </p:txBody>
@@ -13961,14 +16887,14 @@
                   <a:srgbClr val="FFFFFF"/>
                 </a:solidFill>
               </a:rPr>
-              <a:t>Namespace vks-automation</a:t>
+              <a:t>Supervisor Configure — 管理網路（Management Network）</a:t>
             </a:r>
           </a:p>
         </p:txBody>
       </p:sp>
       <p:pic>
         <p:nvPicPr>
-          <p:cNvPr id="6" name="Picture 5" descr="33-namespace-vks-automation.jpg"/>
+          <p:cNvPr id="6" name="Picture 5" descr="43-vc-sup-configure-network-mgmt.jpg"/>
           <p:cNvPicPr>
             <a:picLocks noChangeAspect="1"/>
           </p:cNvPicPr>
@@ -13983,37 +16909,362 @@
         <p:spPr>
           <a:xfrm>
             <a:off x="274320" y="1005840"/>
-            <a:ext cx="5669280" cy="5029200"/>
+            <a:ext cx="7772400" cy="5303520"/>
           </a:xfrm>
           <a:prstGeom prst="rect">
             <a:avLst/>
           </a:prstGeom>
         </p:spPr>
       </p:pic>
-      <p:pic>
-        <p:nvPicPr>
-          <p:cNvPr id="7" name="Picture 6" descr="32-namespaces-list.jpg"/>
-          <p:cNvPicPr>
-            <a:picLocks noChangeAspect="1"/>
-          </p:cNvPicPr>
-          <p:nvPr/>
-        </p:nvPicPr>
-        <p:blipFill>
-          <a:blip r:embed="rId3"/>
-          <a:stretch>
-            <a:fillRect/>
-          </a:stretch>
-        </p:blipFill>
-        <p:spPr>
-          <a:xfrm>
-            <a:off x="6126480" y="1005840"/>
-            <a:ext cx="5760720" cy="5029200"/>
-          </a:xfrm>
-          <a:prstGeom prst="rect">
-            <a:avLst/>
-          </a:prstGeom>
-        </p:spPr>
-      </p:pic>
+      <p:sp>
+        <p:nvSpPr>
+          <p:cNvPr id="7" name="Rectangle 6"/>
+          <p:cNvSpPr/>
+          <p:nvPr/>
+        </p:nvSpPr>
+        <p:spPr>
+          <a:xfrm>
+            <a:off x="8321040" y="1005840"/>
+            <a:ext cx="3657600" cy="5303520"/>
+          </a:xfrm>
+          <a:prstGeom prst="rect">
+            <a:avLst/>
+          </a:prstGeom>
+          <a:solidFill>
+            <a:srgbClr val="1A1A2E"/>
+          </a:solidFill>
+          <a:ln>
+            <a:noFill/>
+          </a:ln>
+        </p:spPr>
+        <p:style>
+          <a:lnRef idx="1">
+            <a:schemeClr val="accent1"/>
+          </a:lnRef>
+          <a:fillRef idx="3">
+            <a:schemeClr val="accent1"/>
+          </a:fillRef>
+          <a:effectRef idx="2">
+            <a:schemeClr val="accent1"/>
+          </a:effectRef>
+          <a:fontRef idx="minor">
+            <a:schemeClr val="lt1"/>
+          </a:fontRef>
+        </p:style>
+        <p:txBody>
+          <a:bodyPr rtlCol="0" anchor="ctr"/>
+          <a:lstStyle/>
+          <a:p>
+            <a:pPr algn="ctr"/>
+          </a:p>
+        </p:txBody>
+      </p:sp>
+      <p:sp>
+        <p:nvSpPr>
+          <p:cNvPr id="8" name="TextBox 7"/>
+          <p:cNvSpPr txBox="1"/>
+          <p:nvPr/>
+        </p:nvSpPr>
+        <p:spPr>
+          <a:xfrm>
+            <a:off x="8412480" y="1188720"/>
+            <a:ext cx="3383280" cy="320040"/>
+          </a:xfrm>
+          <a:prstGeom prst="rect">
+            <a:avLst/>
+          </a:prstGeom>
+          <a:noFill/>
+        </p:spPr>
+        <p:txBody>
+          <a:bodyPr wrap="square">
+            <a:spAutoFit/>
+          </a:bodyPr>
+          <a:lstStyle/>
+          <a:p>
+            <a:pPr algn="l"/>
+            <a:r>
+              <a:rPr sz="1200" b="0">
+                <a:solidFill>
+                  <a:srgbClr val="FFFFFF"/>
+                </a:solidFill>
+              </a:rPr>
+              <a:t>IP Assignment Mode: Static</a:t>
+            </a:r>
+          </a:p>
+        </p:txBody>
+      </p:sp>
+      <p:sp>
+        <p:nvSpPr>
+          <p:cNvPr id="9" name="TextBox 8"/>
+          <p:cNvSpPr txBox="1"/>
+          <p:nvPr/>
+        </p:nvSpPr>
+        <p:spPr>
+          <a:xfrm>
+            <a:off x="8412480" y="1536192"/>
+            <a:ext cx="3383280" cy="320040"/>
+          </a:xfrm>
+          <a:prstGeom prst="rect">
+            <a:avLst/>
+          </a:prstGeom>
+          <a:noFill/>
+        </p:spPr>
+        <p:txBody>
+          <a:bodyPr wrap="square">
+            <a:spAutoFit/>
+          </a:bodyPr>
+          <a:lstStyle/>
+          <a:p>
+            <a:pPr algn="l"/>
+            <a:r>
+              <a:rPr sz="1200" b="0">
+                <a:solidFill>
+                  <a:srgbClr val="FFFFFF"/>
+                </a:solidFill>
+              </a:rPr>
+              <a:t>Network: vcf-m02-cl01-vds01-pg-mgmt</a:t>
+            </a:r>
+          </a:p>
+        </p:txBody>
+      </p:sp>
+      <p:sp>
+        <p:nvSpPr>
+          <p:cNvPr id="10" name="TextBox 9"/>
+          <p:cNvSpPr txBox="1"/>
+          <p:nvPr/>
+        </p:nvSpPr>
+        <p:spPr>
+          <a:xfrm>
+            <a:off x="8412480" y="1883664"/>
+            <a:ext cx="3383280" cy="320040"/>
+          </a:xfrm>
+          <a:prstGeom prst="rect">
+            <a:avLst/>
+          </a:prstGeom>
+          <a:noFill/>
+        </p:spPr>
+        <p:txBody>
+          <a:bodyPr wrap="square">
+            <a:spAutoFit/>
+          </a:bodyPr>
+          <a:lstStyle/>
+          <a:p>
+            <a:pPr algn="l"/>
+            <a:r>
+              <a:rPr sz="1200" b="0">
+                <a:solidFill>
+                  <a:srgbClr val="FFFFFF"/>
+                </a:solidFill>
+              </a:rPr>
+              <a:t>Starting IP: 192.168.114.101</a:t>
+            </a:r>
+          </a:p>
+        </p:txBody>
+      </p:sp>
+      <p:sp>
+        <p:nvSpPr>
+          <p:cNvPr id="11" name="TextBox 10"/>
+          <p:cNvSpPr txBox="1"/>
+          <p:nvPr/>
+        </p:nvSpPr>
+        <p:spPr>
+          <a:xfrm>
+            <a:off x="8412480" y="2231136"/>
+            <a:ext cx="3383280" cy="320040"/>
+          </a:xfrm>
+          <a:prstGeom prst="rect">
+            <a:avLst/>
+          </a:prstGeom>
+          <a:noFill/>
+        </p:spPr>
+        <p:txBody>
+          <a:bodyPr wrap="square">
+            <a:spAutoFit/>
+          </a:bodyPr>
+          <a:lstStyle/>
+          <a:p>
+            <a:pPr algn="l"/>
+            <a:r>
+              <a:rPr sz="1200" b="0">
+                <a:solidFill>
+                  <a:srgbClr val="FFFFFF"/>
+                </a:solidFill>
+              </a:rPr>
+              <a:t>  (5 IPs → .101 ~ .105)</a:t>
+            </a:r>
+          </a:p>
+        </p:txBody>
+      </p:sp>
+      <p:sp>
+        <p:nvSpPr>
+          <p:cNvPr id="12" name="TextBox 11"/>
+          <p:cNvSpPr txBox="1"/>
+          <p:nvPr/>
+        </p:nvSpPr>
+        <p:spPr>
+          <a:xfrm>
+            <a:off x="8412480" y="2578608"/>
+            <a:ext cx="3383280" cy="320040"/>
+          </a:xfrm>
+          <a:prstGeom prst="rect">
+            <a:avLst/>
+          </a:prstGeom>
+          <a:noFill/>
+        </p:spPr>
+        <p:txBody>
+          <a:bodyPr wrap="square">
+            <a:spAutoFit/>
+          </a:bodyPr>
+          <a:lstStyle/>
+          <a:p>
+            <a:pPr algn="l"/>
+            <a:r>
+              <a:rPr sz="1200" b="0">
+                <a:solidFill>
+                  <a:srgbClr val="FFFFFF"/>
+                </a:solidFill>
+              </a:rPr>
+              <a:t>Subnet Mask: 255.255.255.0</a:t>
+            </a:r>
+          </a:p>
+        </p:txBody>
+      </p:sp>
+      <p:sp>
+        <p:nvSpPr>
+          <p:cNvPr id="13" name="TextBox 12"/>
+          <p:cNvSpPr txBox="1"/>
+          <p:nvPr/>
+        </p:nvSpPr>
+        <p:spPr>
+          <a:xfrm>
+            <a:off x="8412480" y="2926080"/>
+            <a:ext cx="3383280" cy="320040"/>
+          </a:xfrm>
+          <a:prstGeom prst="rect">
+            <a:avLst/>
+          </a:prstGeom>
+          <a:noFill/>
+        </p:spPr>
+        <p:txBody>
+          <a:bodyPr wrap="square">
+            <a:spAutoFit/>
+          </a:bodyPr>
+          <a:lstStyle/>
+          <a:p>
+            <a:pPr algn="l"/>
+            <a:r>
+              <a:rPr sz="1200" b="0">
+                <a:solidFill>
+                  <a:srgbClr val="FFFFFF"/>
+                </a:solidFill>
+              </a:rPr>
+              <a:t>Gateway: 192.168.114.254</a:t>
+            </a:r>
+          </a:p>
+        </p:txBody>
+      </p:sp>
+      <p:sp>
+        <p:nvSpPr>
+          <p:cNvPr id="14" name="TextBox 13"/>
+          <p:cNvSpPr txBox="1"/>
+          <p:nvPr/>
+        </p:nvSpPr>
+        <p:spPr>
+          <a:xfrm>
+            <a:off x="8412480" y="3273552"/>
+            <a:ext cx="3383280" cy="320040"/>
+          </a:xfrm>
+          <a:prstGeom prst="rect">
+            <a:avLst/>
+          </a:prstGeom>
+          <a:noFill/>
+        </p:spPr>
+        <p:txBody>
+          <a:bodyPr wrap="square">
+            <a:spAutoFit/>
+          </a:bodyPr>
+          <a:lstStyle/>
+          <a:p>
+            <a:pPr algn="l"/>
+            <a:r>
+              <a:rPr sz="1200" b="0">
+                <a:solidFill>
+                  <a:srgbClr val="FFFFFF"/>
+                </a:solidFill>
+              </a:rPr>
+              <a:t>DNS: 192.168.114.200</a:t>
+            </a:r>
+          </a:p>
+        </p:txBody>
+      </p:sp>
+      <p:sp>
+        <p:nvSpPr>
+          <p:cNvPr id="15" name="TextBox 14"/>
+          <p:cNvSpPr txBox="1"/>
+          <p:nvPr/>
+        </p:nvSpPr>
+        <p:spPr>
+          <a:xfrm>
+            <a:off x="8412480" y="3621024"/>
+            <a:ext cx="3383280" cy="320040"/>
+          </a:xfrm>
+          <a:prstGeom prst="rect">
+            <a:avLst/>
+          </a:prstGeom>
+          <a:noFill/>
+        </p:spPr>
+        <p:txBody>
+          <a:bodyPr wrap="square">
+            <a:spAutoFit/>
+          </a:bodyPr>
+          <a:lstStyle/>
+          <a:p>
+            <a:pPr algn="l"/>
+            <a:r>
+              <a:rPr sz="1200" b="0">
+                <a:solidFill>
+                  <a:srgbClr val="FFFFFF"/>
+                </a:solidFill>
+              </a:rPr>
+              <a:t>DNS Domain: rtolab.local</a:t>
+            </a:r>
+          </a:p>
+        </p:txBody>
+      </p:sp>
+      <p:sp>
+        <p:nvSpPr>
+          <p:cNvPr id="16" name="TextBox 15"/>
+          <p:cNvSpPr txBox="1"/>
+          <p:nvPr/>
+        </p:nvSpPr>
+        <p:spPr>
+          <a:xfrm>
+            <a:off x="8412480" y="3968496"/>
+            <a:ext cx="3383280" cy="320040"/>
+          </a:xfrm>
+          <a:prstGeom prst="rect">
+            <a:avLst/>
+          </a:prstGeom>
+          <a:noFill/>
+        </p:spPr>
+        <p:txBody>
+          <a:bodyPr wrap="square">
+            <a:spAutoFit/>
+          </a:bodyPr>
+          <a:lstStyle/>
+          <a:p>
+            <a:pPr algn="l"/>
+            <a:r>
+              <a:rPr sz="1200" b="0">
+                <a:solidFill>
+                  <a:srgbClr val="FFFFFF"/>
+                </a:solidFill>
+              </a:rPr>
+              <a:t>NTP: 192.168.114.200</a:t>
+            </a:r>
+          </a:p>
+        </p:txBody>
+      </p:sp>
     </p:spTree>
   </p:cSld>
   <p:clrMapOvr>
